--- a/LogicVerse_Presentation_With_Names.pptx
+++ b/LogicVerse_Presentation_With_Names.pptx
@@ -3151,8 +3151,8 @@
         </p:nvSpPr>
         <p:spPr>
           <a:xfrm>
-            <a:off x="731520" y="1097280"/>
-            <a:ext cx="109728" cy="3108960"/>
+            <a:off x="731520" y="1051560"/>
+            <a:ext cx="109728" cy="2926080"/>
           </a:xfrm>
           <a:prstGeom prst="rect">
             <a:avLst/>
@@ -3194,8 +3194,8 @@
         </p:nvSpPr>
         <p:spPr>
           <a:xfrm>
-            <a:off x="1005840" y="1005840"/>
-            <a:ext cx="10424160" cy="3200400"/>
+            <a:off x="1051560" y="960120"/>
+            <a:ext cx="10405872" cy="3017520"/>
           </a:xfrm>
           <a:prstGeom prst="rect">
             <a:avLst/>
@@ -3203,12 +3203,12 @@
           <a:noFill/>
         </p:spPr>
         <p:txBody>
-          <a:bodyPr wrap="square">
+          <a:bodyPr wrap="square" anchor="t" lIns="0" tIns="0" rIns="0" bIns="0">
             <a:spAutoFit/>
           </a:bodyPr>
           <a:lstStyle/>
           <a:p>
-            <a:pPr>
+            <a:pPr algn="l">
               <a:defRPr sz="1100" b="1">
                 <a:solidFill>
                   <a:srgbClr val="F59E0B"/>
@@ -3217,15 +3217,15 @@
               </a:defRPr>
             </a:pPr>
             <a:r>
-              <a:t>DISCRETE MATHEMATICS &amp; THEORY OF COMPUTATION • CAPSTONE PROJECT</a:t>
-            </a:r>
-          </a:p>
-          <a:p>
-            <a:pPr>
+              <a:t>DISCRETE MATHEMATICS &amp; AUTOMATA THEORY • CAPSTONE PRESENTATION</a:t>
+            </a:r>
+          </a:p>
+          <a:p>
+            <a:pPr algn="l">
               <a:spcBef>
                 <a:spcPts val="800"/>
               </a:spcBef>
-              <a:defRPr sz="2800" b="1">
+              <a:defRPr sz="3000" b="1">
                 <a:solidFill>
                   <a:srgbClr val="FFFFFF"/>
                 </a:solidFill>
@@ -3241,19 +3241,19 @@
             </a:r>
           </a:p>
           <a:p>
-            <a:pPr>
-              <a:spcBef>
-                <a:spcPts val="800"/>
-              </a:spcBef>
-              <a:defRPr sz="1300">
-                <a:solidFill>
-                  <a:srgbClr val="CBD5E1"/>
-                </a:solidFill>
-                <a:latin typeface="Calibri"/>
-              </a:defRPr>
-            </a:pPr>
-            <a:r>
-              <a:t>Build mathematical graphs on a canvas, simulate algorithms step-by-step, see live animated state transitions, and learn with an intelligent AI tutor.</a:t>
+            <a:pPr algn="l">
+              <a:spcBef>
+                <a:spcPts val="1000"/>
+              </a:spcBef>
+              <a:defRPr sz="1350">
+                <a:solidFill>
+                  <a:srgbClr val="CBD5E1"/>
+                </a:solidFill>
+                <a:latin typeface="Calibri"/>
+              </a:defRPr>
+            </a:pPr>
+            <a:r>
+              <a:t>Build mathematical graphs on a canvas, simulate algorithms step-by-step, observe dynamic Venn diagrams, and receive live pedagogical guidance from LogicAI.</a:t>
             </a:r>
           </a:p>
         </p:txBody>
@@ -3266,16 +3266,18 @@
         </p:nvSpPr>
         <p:spPr>
           <a:xfrm>
-            <a:off x="731520" y="4389120"/>
-            <a:ext cx="10725912" cy="1920240"/>
+            <a:off x="731520" y="4297680"/>
+            <a:ext cx="10725912" cy="2103120"/>
           </a:xfrm>
           <a:prstGeom prst="roundRect">
-            <a:avLst/>
+            <a:avLst>
+              <a:gd name="adj" fmla="val 4000"/>
+            </a:avLst>
           </a:prstGeom>
           <a:solidFill>
             <a:srgbClr val="191E2A"/>
           </a:solidFill>
-          <a:ln w="19050">
+          <a:ln w="22225">
             <a:solidFill>
               <a:srgbClr val="EB3C3C"/>
             </a:solidFill>
@@ -3296,11 +3298,11 @@
           </a:fontRef>
         </p:style>
         <p:txBody>
-          <a:bodyPr rtlCol="0" anchor="ctr" wrap="square" lIns="365760" tIns="274320"/>
+          <a:bodyPr rtlCol="0" anchor="t" wrap="square" lIns="256032" rIns="256032" tIns="228600" bIns="182880"/>
           <a:lstStyle/>
           <a:p>
-            <a:pPr algn="ctr">
-              <a:defRPr sz="1200" b="1">
+            <a:pPr algn="l">
+              <a:defRPr sz="1300" b="1">
                 <a:solidFill>
                   <a:srgbClr val="FCD34D"/>
                 </a:solidFill>
@@ -3308,49 +3310,82 @@
               </a:defRPr>
             </a:pPr>
             <a:r>
-              <a:t>PROJECT OVERVIEW &amp; TEAM CONTRIBUTORS</a:t>
-            </a:r>
-          </a:p>
-          <a:p>
-            <a:pPr>
-              <a:spcBef>
-                <a:spcPts val="400"/>
-              </a:spcBef>
-              <a:defRPr sz="1150">
+              <a:t>PROJECT ROLES &amp; CONTRIBUTORS</a:t>
+            </a:r>
+          </a:p>
+          <a:p>
+            <a:pPr algn="l">
+              <a:spcBef>
+                <a:spcPts val="700"/>
+              </a:spcBef>
+            </a:pPr>
+            <a:r>
+              <a:rPr sz="1150" b="1">
                 <a:solidFill>
                   <a:srgbClr val="FFFFFF"/>
                 </a:solidFill>
                 <a:latin typeface="Calibri"/>
-              </a:defRPr>
-            </a:pPr>
-            <a:r>
-              <a:t>• Team Lead &amp; Automata/AI Lead: Akash (Finite Automata + LogicAI Tutor + Canvas IDE)</a:t>
-            </a:r>
-          </a:p>
-          <a:p>
-            <a:pPr>
-              <a:defRPr sz="1150">
-                <a:solidFill>
-                  <a:srgbClr val="CBD5E1"/>
-                </a:solidFill>
-                <a:latin typeface="Calibri"/>
-              </a:defRPr>
-            </a:pPr>
-            <a:r>
-              <a:t>• Core Domain Engineers: Sanskar, Ghansham, Hari (Set Theory, Logic Gates, Truth Tables, Proofs)</a:t>
-            </a:r>
-          </a:p>
-          <a:p>
-            <a:pPr>
-              <a:defRPr sz="1150">
-                <a:solidFill>
-                  <a:srgbClr val="CBD5E1"/>
-                </a:solidFill>
-                <a:latin typeface="Calibri"/>
-              </a:defRPr>
-            </a:pPr>
-            <a:r>
-              <a:t>• Relations &amp; Order Theory Engineer: Krishna (Relation Matrix, Warshall's Algorithm, Hasse Diagrams)</a:t>
+              </a:rPr>
+              <a:t>• Akash (Lead): </a:t>
+            </a:r>
+            <a:r>
+              <a:rPr sz="1100">
+                <a:solidFill>
+                  <a:srgbClr val="CBD5E1"/>
+                </a:solidFill>
+                <a:latin typeface="Calibri"/>
+              </a:rPr>
+              <a:t>Finite Automata (DFA/NFA Simulator, NFA-&gt;DFA, Minimization) + LogicAI Chatbot + Canvas IDE</a:t>
+            </a:r>
+          </a:p>
+          <a:p>
+            <a:pPr algn="l">
+              <a:spcBef>
+                <a:spcPts val="700"/>
+              </a:spcBef>
+            </a:pPr>
+            <a:r>
+              <a:rPr sz="1150" b="1">
+                <a:solidFill>
+                  <a:srgbClr val="FFFFFF"/>
+                </a:solidFill>
+                <a:latin typeface="Calibri"/>
+              </a:rPr>
+              <a:t>• Sanskar &amp; Ghansham: </a:t>
+            </a:r>
+            <a:r>
+              <a:rPr sz="1100">
+                <a:solidFill>
+                  <a:srgbClr val="CBD5E1"/>
+                </a:solidFill>
+                <a:latin typeface="Calibri"/>
+              </a:rPr>
+              <a:t>Set Theory Engine, Interactive Venn Diagrams, Propositional Logic Gates &amp; Truth Tables</a:t>
+            </a:r>
+          </a:p>
+          <a:p>
+            <a:pPr algn="l">
+              <a:spcBef>
+                <a:spcPts val="700"/>
+              </a:spcBef>
+            </a:pPr>
+            <a:r>
+              <a:rPr sz="1150" b="1">
+                <a:solidFill>
+                  <a:srgbClr val="FFFFFF"/>
+                </a:solidFill>
+                <a:latin typeface="Calibri"/>
+              </a:rPr>
+              <a:t>• Hari &amp; Krishna: </a:t>
+            </a:r>
+            <a:r>
+              <a:rPr sz="1100">
+                <a:solidFill>
+                  <a:srgbClr val="CBD5E1"/>
+                </a:solidFill>
+                <a:latin typeface="Calibri"/>
+              </a:rPr>
+              <a:t>Mathematical Proof Solvers (PIE, Cantor, Induction) + Binary Relations &amp; Warshall's Algorithm</a:t>
             </a:r>
           </a:p>
         </p:txBody>
@@ -3424,8 +3459,8 @@
         </p:nvSpPr>
         <p:spPr>
           <a:xfrm>
-            <a:off x="731520" y="365760"/>
-            <a:ext cx="10725912" cy="1005840"/>
+            <a:off x="731520" y="320040"/>
+            <a:ext cx="10725912" cy="274320"/>
           </a:xfrm>
           <a:prstGeom prst="rect">
             <a:avLst/>
@@ -3433,13 +3468,13 @@
           <a:noFill/>
         </p:spPr>
         <p:txBody>
-          <a:bodyPr wrap="square" lIns="0" tIns="0" rIns="0" bIns="0">
+          <a:bodyPr wrap="square" anchor="t" lIns="0" rIns="0" tIns="0" bIns="0">
             <a:spAutoFit/>
           </a:bodyPr>
           <a:lstStyle/>
           <a:p>
-            <a:pPr>
-              <a:defRPr sz="1100" b="1">
+            <a:pPr algn="l">
+              <a:defRPr sz="1000" b="1">
                 <a:solidFill>
                   <a:srgbClr val="EB3C3C"/>
                 </a:solidFill>
@@ -3450,11 +3485,31 @@
               <a:t>INTELLIGENT AI TUTORING</a:t>
             </a:r>
           </a:p>
-          <a:p>
-            <a:pPr>
-              <a:spcBef>
-                <a:spcPts val="300"/>
-              </a:spcBef>
+        </p:txBody>
+      </p:sp>
+      <p:sp>
+        <p:nvSpPr>
+          <p:cNvPr id="4" name="TextBox 3"/>
+          <p:cNvSpPr txBox="1"/>
+          <p:nvPr/>
+        </p:nvSpPr>
+        <p:spPr>
+          <a:xfrm>
+            <a:off x="731520" y="594360"/>
+            <a:ext cx="10725912" cy="594360"/>
+          </a:xfrm>
+          <a:prstGeom prst="rect">
+            <a:avLst/>
+          </a:prstGeom>
+          <a:noFill/>
+        </p:spPr>
+        <p:txBody>
+          <a:bodyPr wrap="square" anchor="t" lIns="0" rIns="0" tIns="0" bIns="0">
+            <a:spAutoFit/>
+          </a:bodyPr>
+          <a:lstStyle/>
+          <a:p>
+            <a:pPr algn="l">
               <a:defRPr sz="2200" b="1">
                 <a:solidFill>
                   <a:srgbClr val="FFFFFF"/>
@@ -3463,21 +3518,21 @@
               </a:defRPr>
             </a:pPr>
             <a:r>
-              <a:t>LogicAI: Context-Aware Mathematical Tutor (Engineered by Akash)</a:t>
-            </a:r>
-          </a:p>
-        </p:txBody>
-      </p:sp>
-      <p:sp>
-        <p:nvSpPr>
-          <p:cNvPr id="4" name="Rectangle 3"/>
+              <a:t>LogicAI: Context-Aware Mathematical Tutor (Akash's Contribution)</a:t>
+            </a:r>
+          </a:p>
+        </p:txBody>
+      </p:sp>
+      <p:sp>
+        <p:nvSpPr>
+          <p:cNvPr id="5" name="Rectangle 4"/>
           <p:cNvSpPr/>
           <p:nvPr/>
         </p:nvSpPr>
         <p:spPr>
           <a:xfrm>
-            <a:off x="731520" y="1353312"/>
-            <a:ext cx="10725912" cy="36576"/>
+            <a:off x="731520" y="1234440"/>
+            <a:ext cx="10725912" cy="32004"/>
           </a:xfrm>
           <a:prstGeom prst="rect">
             <a:avLst/>
@@ -3513,22 +3568,24 @@
       </p:sp>
       <p:sp>
         <p:nvSpPr>
-          <p:cNvPr id="5" name="Rounded Rectangle 4"/>
+          <p:cNvPr id="6" name="Rounded Rectangle 5"/>
           <p:cNvSpPr/>
           <p:nvPr/>
         </p:nvSpPr>
         <p:spPr>
           <a:xfrm>
-            <a:off x="731520" y="1645920"/>
-            <a:ext cx="5212080" cy="4663440"/>
+            <a:off x="731520" y="1508760"/>
+            <a:ext cx="5212080" cy="4892040"/>
           </a:xfrm>
           <a:prstGeom prst="roundRect">
-            <a:avLst/>
+            <a:avLst>
+              <a:gd name="adj" fmla="val 4000"/>
+            </a:avLst>
           </a:prstGeom>
           <a:solidFill>
             <a:srgbClr val="191E2A"/>
           </a:solidFill>
-          <a:ln w="19050">
+          <a:ln w="22225">
             <a:solidFill>
               <a:srgbClr val="A855F7"/>
             </a:solidFill>
@@ -3549,11 +3606,11 @@
           </a:fontRef>
         </p:style>
         <p:txBody>
-          <a:bodyPr rtlCol="0" anchor="ctr" wrap="square" lIns="320040" rIns="320040" tIns="274320"/>
+          <a:bodyPr rtlCol="0" anchor="t" wrap="square" lIns="256032" rIns="256032" tIns="228600" bIns="182880"/>
           <a:lstStyle/>
           <a:p>
-            <a:pPr algn="ctr">
-              <a:defRPr sz="1300" b="1">
+            <a:pPr algn="l">
+              <a:defRPr sz="1400" b="1">
                 <a:solidFill>
                   <a:srgbClr val="A855F7"/>
                 </a:solidFill>
@@ -3565,89 +3622,199 @@
             </a:r>
           </a:p>
           <a:p>
-            <a:pPr>
-              <a:spcBef>
-                <a:spcPts val="800"/>
-              </a:spcBef>
-              <a:defRPr sz="1100">
-                <a:solidFill>
-                  <a:srgbClr val="FFFFFF"/>
-                </a:solidFill>
-                <a:latin typeface="Calibri"/>
-              </a:defRPr>
-            </a:pPr>
-            <a:r>
-              <a:t>• Direct Canvas Visibility: LogicAI actually sees what is on your screen: active states, gate inputs, sets, and formulas.</a:t>
-            </a:r>
-          </a:p>
-          <a:p>
-            <a:pPr>
-              <a:spcBef>
-                <a:spcPts val="800"/>
-              </a:spcBef>
-              <a:defRPr sz="1100">
-                <a:solidFill>
-                  <a:srgbClr val="FFFFFF"/>
-                </a:solidFill>
-                <a:latin typeface="Calibri"/>
-              </a:defRPr>
-            </a:pPr>
-            <a:r>
-              <a:t>• Step-by-Step Explanations: Click 'Explain this step' to learn exactly why state q0 moved to q1 on reading symbol '0'.</a:t>
-            </a:r>
-          </a:p>
-          <a:p>
-            <a:pPr>
-              <a:spcBef>
-                <a:spcPts val="800"/>
-              </a:spcBef>
-              <a:defRPr sz="1100">
-                <a:solidFill>
-                  <a:srgbClr val="FFFFFF"/>
-                </a:solidFill>
-                <a:latin typeface="Calibri"/>
-              </a:defRPr>
-            </a:pPr>
-            <a:r>
-              <a:t>• Diagnostic Feedback: Detects disconnected handles, duplicate elements, or invalid transitions and suggests remedies.</a:t>
-            </a:r>
-          </a:p>
-          <a:p>
-            <a:pPr>
-              <a:spcBef>
-                <a:spcPts val="800"/>
-              </a:spcBef>
-              <a:defRPr sz="1100">
-                <a:solidFill>
-                  <a:srgbClr val="FFFFFF"/>
-                </a:solidFill>
-                <a:latin typeface="Calibri"/>
-              </a:defRPr>
-            </a:pPr>
-            <a:r>
-              <a:t>• Quick-Action Buttons: One-click chips for 'Explain this step', 'Generate example', and 'Give me a hint'.</a:t>
-            </a:r>
-          </a:p>
-        </p:txBody>
-      </p:sp>
-      <p:sp>
-        <p:nvSpPr>
-          <p:cNvPr id="6" name="Rounded Rectangle 5"/>
+            <a:pPr algn="l">
+              <a:spcBef>
+                <a:spcPts val="200"/>
+              </a:spcBef>
+              <a:defRPr sz="1050" b="1">
+                <a:solidFill>
+                  <a:srgbClr val="FCD34D"/>
+                </a:solidFill>
+                <a:latin typeface="Calibri"/>
+              </a:defRPr>
+            </a:pPr>
+            <a:r>
+              <a:t>Real-Time Visual State Perception &amp; Guidance</a:t>
+            </a:r>
+          </a:p>
+          <a:p>
+            <a:pPr algn="l">
+              <a:spcBef>
+                <a:spcPts val="1000"/>
+              </a:spcBef>
+              <a:spcAft>
+                <a:spcPts val="100"/>
+              </a:spcAft>
+            </a:pPr>
+            <a:r>
+              <a:rPr sz="1200" b="1">
+                <a:solidFill>
+                  <a:srgbClr val="E9D5FF"/>
+                </a:solidFill>
+                <a:latin typeface="Calibri"/>
+              </a:rPr>
+              <a:t>• Direct Canvas Visibility: </a:t>
+            </a:r>
+            <a:r>
+              <a:rPr sz="1100">
+                <a:solidFill>
+                  <a:srgbClr val="CBD5E1"/>
+                </a:solidFill>
+                <a:latin typeface="Calibri"/>
+              </a:rPr>
+              <a:t>LogicAI actually sees what is on your screen: active states, gate inputs, sets, and formulas.</a:t>
+            </a:r>
+          </a:p>
+          <a:p>
+            <a:pPr algn="l">
+              <a:spcBef>
+                <a:spcPts val="1000"/>
+              </a:spcBef>
+              <a:spcAft>
+                <a:spcPts val="100"/>
+              </a:spcAft>
+            </a:pPr>
+            <a:r>
+              <a:rPr sz="1200" b="1">
+                <a:solidFill>
+                  <a:srgbClr val="E9D5FF"/>
+                </a:solidFill>
+                <a:latin typeface="Calibri"/>
+              </a:rPr>
+              <a:t>• Step-by-Step Explanations: </a:t>
+            </a:r>
+            <a:r>
+              <a:rPr sz="1100">
+                <a:solidFill>
+                  <a:srgbClr val="CBD5E1"/>
+                </a:solidFill>
+                <a:latin typeface="Calibri"/>
+              </a:rPr>
+              <a:t>Click 'Explain this step' to learn exactly why state q0 moved to q1 on reading symbol '0'.</a:t>
+            </a:r>
+          </a:p>
+          <a:p>
+            <a:pPr algn="l">
+              <a:spcBef>
+                <a:spcPts val="1000"/>
+              </a:spcBef>
+              <a:spcAft>
+                <a:spcPts val="100"/>
+              </a:spcAft>
+            </a:pPr>
+            <a:r>
+              <a:rPr sz="1200" b="1">
+                <a:solidFill>
+                  <a:srgbClr val="E9D5FF"/>
+                </a:solidFill>
+                <a:latin typeface="Calibri"/>
+              </a:rPr>
+              <a:t>• Diagnostic Feedback: </a:t>
+            </a:r>
+            <a:r>
+              <a:rPr sz="1100">
+                <a:solidFill>
+                  <a:srgbClr val="CBD5E1"/>
+                </a:solidFill>
+                <a:latin typeface="Calibri"/>
+              </a:rPr>
+              <a:t>Detects disconnected handles, duplicate elements, or invalid transitions and suggests remedies.</a:t>
+            </a:r>
+          </a:p>
+          <a:p>
+            <a:pPr algn="l">
+              <a:spcBef>
+                <a:spcPts val="1000"/>
+              </a:spcBef>
+              <a:spcAft>
+                <a:spcPts val="100"/>
+              </a:spcAft>
+            </a:pPr>
+            <a:r>
+              <a:rPr sz="1200" b="1">
+                <a:solidFill>
+                  <a:srgbClr val="E9D5FF"/>
+                </a:solidFill>
+                <a:latin typeface="Calibri"/>
+              </a:rPr>
+              <a:t>• Quick-Action Buttons: </a:t>
+            </a:r>
+            <a:r>
+              <a:rPr sz="1100">
+                <a:solidFill>
+                  <a:srgbClr val="CBD5E1"/>
+                </a:solidFill>
+                <a:latin typeface="Calibri"/>
+              </a:rPr>
+              <a:t>One-click chips for 'Explain this step', 'Generate example', and 'Give me a hint'.</a:t>
+            </a:r>
+          </a:p>
+          <a:p>
+            <a:pPr algn="l">
+              <a:spcBef>
+                <a:spcPts val="1000"/>
+              </a:spcBef>
+              <a:spcAft>
+                <a:spcPts val="100"/>
+              </a:spcAft>
+            </a:pPr>
+            <a:r>
+              <a:rPr sz="1200" b="1">
+                <a:solidFill>
+                  <a:srgbClr val="E9D5FF"/>
+                </a:solidFill>
+                <a:latin typeface="Calibri"/>
+              </a:rPr>
+              <a:t>• Socratic Guidance: </a:t>
+            </a:r>
+            <a:r>
+              <a:rPr sz="1100">
+                <a:solidFill>
+                  <a:srgbClr val="CBD5E1"/>
+                </a:solidFill>
+                <a:latin typeface="Calibri"/>
+              </a:rPr>
+              <a:t>Prompts students to discover underlying mathematical logic rather than giving raw answers.</a:t>
+            </a:r>
+          </a:p>
+          <a:p>
+            <a:pPr algn="l">
+              <a:spcBef>
+                <a:spcPts val="1400"/>
+              </a:spcBef>
+              <a:defRPr sz="1000" b="1">
+                <a:solidFill>
+                  <a:srgbClr val="E9D5FF"/>
+                </a:solidFill>
+                <a:latin typeface="Calibri"/>
+              </a:defRPr>
+            </a:pPr>
+            <a:r>
+              <a:t>Perception: Injects Complete Active Graph AST Directly into Prompts</a:t>
+            </a:r>
+          </a:p>
+        </p:txBody>
+      </p:sp>
+      <p:sp>
+        <p:nvSpPr>
+          <p:cNvPr id="7" name="Rounded Rectangle 6"/>
           <p:cNvSpPr/>
           <p:nvPr/>
         </p:nvSpPr>
         <p:spPr>
           <a:xfrm>
-            <a:off x="6217920" y="1645920"/>
-            <a:ext cx="5212080" cy="4663440"/>
+            <a:off x="6245352" y="1508760"/>
+            <a:ext cx="5212080" cy="4892040"/>
           </a:xfrm>
           <a:prstGeom prst="roundRect">
-            <a:avLst/>
+            <a:avLst>
+              <a:gd name="adj" fmla="val 4000"/>
+            </a:avLst>
           </a:prstGeom>
           <a:solidFill>
             <a:srgbClr val="191E2A"/>
           </a:solidFill>
-          <a:ln w="19050">
+          <a:ln w="22225">
             <a:solidFill>
               <a:srgbClr val="38BDF8"/>
             </a:solidFill>
@@ -3668,11 +3835,11 @@
           </a:fontRef>
         </p:style>
         <p:txBody>
-          <a:bodyPr rtlCol="0" anchor="ctr" wrap="square" lIns="320040" rIns="320040" tIns="274320"/>
+          <a:bodyPr rtlCol="0" anchor="t" wrap="square" lIns="256032" rIns="256032" tIns="228600" bIns="182880"/>
           <a:lstStyle/>
           <a:p>
-            <a:pPr algn="ctr">
-              <a:defRPr sz="1300" b="1">
+            <a:pPr algn="l">
+              <a:defRPr sz="1400" b="1">
                 <a:solidFill>
                   <a:srgbClr val="38BDF8"/>
                 </a:solidFill>
@@ -3684,67 +3851,175 @@
             </a:r>
           </a:p>
           <a:p>
-            <a:pPr>
-              <a:spcBef>
-                <a:spcPts val="800"/>
-              </a:spcBef>
-              <a:defRPr sz="1100">
-                <a:solidFill>
-                  <a:srgbClr val="CBD5E1"/>
-                </a:solidFill>
-                <a:latin typeface="Calibri"/>
-              </a:defRPr>
-            </a:pPr>
-            <a:r>
-              <a:t>• Next.js /api/chat Route: Server route connecting LogicAI directly to Google Gemini and OpenAI models.</a:t>
-            </a:r>
-          </a:p>
-          <a:p>
-            <a:pPr>
-              <a:spcBef>
-                <a:spcPts val="800"/>
-              </a:spcBef>
-              <a:defRPr sz="1100">
-                <a:solidFill>
-                  <a:srgbClr val="CBD5E1"/>
-                </a:solidFill>
-                <a:latin typeface="Calibri"/>
-              </a:defRPr>
-            </a:pPr>
-            <a:r>
-              <a:t>• In-App Settings Modal: Students can connect their own free Gemini or Groq API key directly in the UI.</a:t>
-            </a:r>
-          </a:p>
-          <a:p>
-            <a:pPr>
-              <a:spcBef>
-                <a:spcPts val="800"/>
-              </a:spcBef>
-              <a:defRPr sz="1100">
-                <a:solidFill>
-                  <a:srgbClr val="CBD5E1"/>
-                </a:solidFill>
-                <a:latin typeface="Calibri"/>
-              </a:defRPr>
-            </a:pPr>
-            <a:r>
-              <a:t>• Answers ANY Question: With live LLM connected, answers open-ended questions across all computer science theory.</a:t>
-            </a:r>
-          </a:p>
-          <a:p>
-            <a:pPr>
-              <a:spcBef>
-                <a:spcPts val="800"/>
-              </a:spcBef>
-              <a:defRPr sz="1100">
-                <a:solidFill>
-                  <a:srgbClr val="CBD5E1"/>
-                </a:solidFill>
-                <a:latin typeface="Calibri"/>
-              </a:defRPr>
-            </a:pPr>
-            <a:r>
-              <a:t>• Zero-Crash Offline Fallback: If no key or internet is available, falls back to local mathematical AST rules smoothly.</a:t>
+            <a:pPr algn="l">
+              <a:spcBef>
+                <a:spcPts val="200"/>
+              </a:spcBef>
+              <a:defRPr sz="1050" b="1">
+                <a:solidFill>
+                  <a:srgbClr val="FCD34D"/>
+                </a:solidFill>
+                <a:latin typeface="Calibri"/>
+              </a:defRPr>
+            </a:pPr>
+            <a:r>
+              <a:t>Next.js API Route, Gemini LLM &amp; Offline Fallback</a:t>
+            </a:r>
+          </a:p>
+          <a:p>
+            <a:pPr algn="l">
+              <a:spcBef>
+                <a:spcPts val="1000"/>
+              </a:spcBef>
+              <a:spcAft>
+                <a:spcPts val="100"/>
+              </a:spcAft>
+            </a:pPr>
+            <a:r>
+              <a:rPr sz="1200" b="1">
+                <a:solidFill>
+                  <a:srgbClr val="BAE6FD"/>
+                </a:solidFill>
+                <a:latin typeface="Calibri"/>
+              </a:rPr>
+              <a:t>• Next.js /api/chat Route: </a:t>
+            </a:r>
+            <a:r>
+              <a:rPr sz="1100">
+                <a:solidFill>
+                  <a:srgbClr val="CBD5E1"/>
+                </a:solidFill>
+                <a:latin typeface="Calibri"/>
+              </a:rPr>
+              <a:t>Server route connecting LogicAI directly to Google Gemini, Groq, and OpenAI models.</a:t>
+            </a:r>
+          </a:p>
+          <a:p>
+            <a:pPr algn="l">
+              <a:spcBef>
+                <a:spcPts val="1000"/>
+              </a:spcBef>
+              <a:spcAft>
+                <a:spcPts val="100"/>
+              </a:spcAft>
+            </a:pPr>
+            <a:r>
+              <a:rPr sz="1200" b="1">
+                <a:solidFill>
+                  <a:srgbClr val="BAE6FD"/>
+                </a:solidFill>
+                <a:latin typeface="Calibri"/>
+              </a:rPr>
+              <a:t>• In-App Settings Modal: </a:t>
+            </a:r>
+            <a:r>
+              <a:rPr sz="1100">
+                <a:solidFill>
+                  <a:srgbClr val="CBD5E1"/>
+                </a:solidFill>
+                <a:latin typeface="Calibri"/>
+              </a:rPr>
+              <a:t>Students can connect their own free Gemini or Groq API key directly in the UI via the ⚙️ modal.</a:t>
+            </a:r>
+          </a:p>
+          <a:p>
+            <a:pPr algn="l">
+              <a:spcBef>
+                <a:spcPts val="1000"/>
+              </a:spcBef>
+              <a:spcAft>
+                <a:spcPts val="100"/>
+              </a:spcAft>
+            </a:pPr>
+            <a:r>
+              <a:rPr sz="1200" b="1">
+                <a:solidFill>
+                  <a:srgbClr val="BAE6FD"/>
+                </a:solidFill>
+                <a:latin typeface="Calibri"/>
+              </a:rPr>
+              <a:t>• Answers ANY Question: </a:t>
+            </a:r>
+            <a:r>
+              <a:rPr sz="1100">
+                <a:solidFill>
+                  <a:srgbClr val="CBD5E1"/>
+                </a:solidFill>
+                <a:latin typeface="Calibri"/>
+              </a:rPr>
+              <a:t>With live LLM connected, answers open-ended questions across all computer science theory.</a:t>
+            </a:r>
+          </a:p>
+          <a:p>
+            <a:pPr algn="l">
+              <a:spcBef>
+                <a:spcPts val="1000"/>
+              </a:spcBef>
+              <a:spcAft>
+                <a:spcPts val="100"/>
+              </a:spcAft>
+            </a:pPr>
+            <a:r>
+              <a:rPr sz="1200" b="1">
+                <a:solidFill>
+                  <a:srgbClr val="BAE6FD"/>
+                </a:solidFill>
+                <a:latin typeface="Calibri"/>
+              </a:rPr>
+              <a:t>• Zero-Crash Offline Fallback: </a:t>
+            </a:r>
+            <a:r>
+              <a:rPr sz="1100">
+                <a:solidFill>
+                  <a:srgbClr val="CBD5E1"/>
+                </a:solidFill>
+                <a:latin typeface="Calibri"/>
+              </a:rPr>
+              <a:t>If no key or internet is available, falls back to local mathematical AST rules smoothly.</a:t>
+            </a:r>
+          </a:p>
+          <a:p>
+            <a:pPr algn="l">
+              <a:spcBef>
+                <a:spcPts val="1000"/>
+              </a:spcBef>
+              <a:spcAft>
+                <a:spcPts val="100"/>
+              </a:spcAft>
+            </a:pPr>
+            <a:r>
+              <a:rPr sz="1200" b="1">
+                <a:solidFill>
+                  <a:srgbClr val="BAE6FD"/>
+                </a:solidFill>
+                <a:latin typeface="Calibri"/>
+              </a:rPr>
+              <a:t>• Privacy &amp; Local Execution: </a:t>
+            </a:r>
+            <a:r>
+              <a:rPr sz="1100">
+                <a:solidFill>
+                  <a:srgbClr val="CBD5E1"/>
+                </a:solidFill>
+                <a:latin typeface="Calibri"/>
+              </a:rPr>
+              <a:t>Option to run with local models via Ollama with zero student telemetry or data tracking.</a:t>
+            </a:r>
+          </a:p>
+          <a:p>
+            <a:pPr algn="l">
+              <a:spcBef>
+                <a:spcPts val="1400"/>
+              </a:spcBef>
+              <a:defRPr sz="1000" b="1">
+                <a:solidFill>
+                  <a:srgbClr val="BAE6FD"/>
+                </a:solidFill>
+                <a:latin typeface="Calibri"/>
+              </a:defRPr>
+            </a:pPr>
+            <a:r>
+              <a:t>Backend: Secure /api/chat Streaming + Deterministic Offline AST</a:t>
             </a:r>
           </a:p>
         </p:txBody>
@@ -3818,8 +4093,8 @@
         </p:nvSpPr>
         <p:spPr>
           <a:xfrm>
-            <a:off x="731520" y="365760"/>
-            <a:ext cx="10725912" cy="1005840"/>
+            <a:off x="731520" y="320040"/>
+            <a:ext cx="10725912" cy="274320"/>
           </a:xfrm>
           <a:prstGeom prst="rect">
             <a:avLst/>
@@ -3827,13 +4102,13 @@
           <a:noFill/>
         </p:spPr>
         <p:txBody>
-          <a:bodyPr wrap="square" lIns="0" tIns="0" rIns="0" bIns="0">
+          <a:bodyPr wrap="square" anchor="t" lIns="0" rIns="0" tIns="0" bIns="0">
             <a:spAutoFit/>
           </a:bodyPr>
           <a:lstStyle/>
           <a:p>
-            <a:pPr>
-              <a:defRPr sz="1100" b="1">
+            <a:pPr algn="l">
+              <a:defRPr sz="1000" b="1">
                 <a:solidFill>
                   <a:srgbClr val="EB3C3C"/>
                 </a:solidFill>
@@ -3841,14 +4116,34 @@
               </a:defRPr>
             </a:pPr>
             <a:r>
-              <a:t>PROJECT EXECUTION &amp; OWNERSHIP</a:t>
-            </a:r>
-          </a:p>
-          <a:p>
-            <a:pPr>
-              <a:spcBef>
-                <a:spcPts val="300"/>
-              </a:spcBef>
+              <a:t>INDIVIDUAL CONTRIBUTIONS</a:t>
+            </a:r>
+          </a:p>
+        </p:txBody>
+      </p:sp>
+      <p:sp>
+        <p:nvSpPr>
+          <p:cNvPr id="4" name="TextBox 3"/>
+          <p:cNvSpPr txBox="1"/>
+          <p:nvPr/>
+        </p:nvSpPr>
+        <p:spPr>
+          <a:xfrm>
+            <a:off x="731520" y="594360"/>
+            <a:ext cx="10725912" cy="594360"/>
+          </a:xfrm>
+          <a:prstGeom prst="rect">
+            <a:avLst/>
+          </a:prstGeom>
+          <a:noFill/>
+        </p:spPr>
+        <p:txBody>
+          <a:bodyPr wrap="square" anchor="t" lIns="0" rIns="0" tIns="0" bIns="0">
+            <a:spAutoFit/>
+          </a:bodyPr>
+          <a:lstStyle/>
+          <a:p>
+            <a:pPr algn="l">
               <a:defRPr sz="2200" b="1">
                 <a:solidFill>
                   <a:srgbClr val="FFFFFF"/>
@@ -3857,21 +4152,21 @@
               </a:defRPr>
             </a:pPr>
             <a:r>
-              <a:t>Team Roles and Individual Contribution Breakdown</a:t>
-            </a:r>
-          </a:p>
-        </p:txBody>
-      </p:sp>
-      <p:sp>
-        <p:nvSpPr>
-          <p:cNvPr id="4" name="Rectangle 3"/>
+              <a:t>Team Roles &amp; Technical Contribution Breakdown</a:t>
+            </a:r>
+          </a:p>
+        </p:txBody>
+      </p:sp>
+      <p:sp>
+        <p:nvSpPr>
+          <p:cNvPr id="5" name="Rectangle 4"/>
           <p:cNvSpPr/>
           <p:nvPr/>
         </p:nvSpPr>
         <p:spPr>
           <a:xfrm>
-            <a:off x="731520" y="1353312"/>
-            <a:ext cx="10725912" cy="36576"/>
+            <a:off x="731520" y="1234440"/>
+            <a:ext cx="10725912" cy="32004"/>
           </a:xfrm>
           <a:prstGeom prst="rect">
             <a:avLst/>
@@ -3907,22 +4202,24 @@
       </p:sp>
       <p:sp>
         <p:nvSpPr>
-          <p:cNvPr id="5" name="Rounded Rectangle 4"/>
+          <p:cNvPr id="6" name="Rounded Rectangle 5"/>
           <p:cNvSpPr/>
           <p:nvPr/>
         </p:nvSpPr>
         <p:spPr>
           <a:xfrm>
-            <a:off x="731520" y="1645920"/>
-            <a:ext cx="1993392" cy="4663440"/>
+            <a:off x="731520" y="1508760"/>
+            <a:ext cx="2011680" cy="4892040"/>
           </a:xfrm>
           <a:prstGeom prst="roundRect">
-            <a:avLst/>
+            <a:avLst>
+              <a:gd name="adj" fmla="val 4000"/>
+            </a:avLst>
           </a:prstGeom>
           <a:solidFill>
             <a:srgbClr val="191E2A"/>
           </a:solidFill>
-          <a:ln w="19050">
+          <a:ln w="22225">
             <a:solidFill>
               <a:srgbClr val="38BDF8"/>
             </a:solidFill>
@@ -3943,10 +4240,10 @@
           </a:fontRef>
         </p:style>
         <p:txBody>
-          <a:bodyPr rtlCol="0" anchor="ctr" wrap="square" lIns="164592" rIns="164592" tIns="228600"/>
+          <a:bodyPr rtlCol="0" anchor="t" wrap="square" lIns="146304" rIns="146304" tIns="182880" bIns="137160"/>
           <a:lstStyle/>
           <a:p>
-            <a:pPr algn="ctr">
+            <a:pPr algn="l">
               <a:defRPr sz="1300" b="1">
                 <a:solidFill>
                   <a:srgbClr val="38BDF8"/>
@@ -3959,57 +4256,179 @@
             </a:r>
           </a:p>
           <a:p>
-            <a:pPr>
-              <a:spcBef>
-                <a:spcPts val="300"/>
+            <a:pPr algn="l">
+              <a:spcBef>
+                <a:spcPts val="200"/>
               </a:spcBef>
               <a:defRPr sz="950" b="1">
                 <a:solidFill>
                   <a:srgbClr val="FFFFFF"/>
                 </a:solidFill>
+                <a:latin typeface="Calibri"/>
+              </a:defRPr>
+            </a:pPr>
+            <a:r>
+              <a:t>Team Lead &amp; System Architect</a:t>
+            </a:r>
+          </a:p>
+          <a:p>
+            <a:pPr algn="l">
+              <a:spcBef>
+                <a:spcPts val="800"/>
+              </a:spcBef>
+              <a:defRPr sz="850" b="1">
+                <a:solidFill>
+                  <a:srgbClr val="38BDF8"/>
+                </a:solidFill>
                 <a:latin typeface="Arial"/>
               </a:defRPr>
             </a:pPr>
             <a:r>
-              <a:t>Team Lead &amp; System Architect</a:t>
-            </a:r>
-          </a:p>
-          <a:p>
-            <a:pPr>
+              <a:t>CORE DELIVERABLES</a:t>
+            </a:r>
+          </a:p>
+          <a:p>
+            <a:pPr algn="l">
+              <a:spcBef>
+                <a:spcPts val="600"/>
+              </a:spcBef>
+            </a:pPr>
+            <a:r>
+              <a:rPr sz="950" b="1">
+                <a:solidFill>
+                  <a:srgbClr val="FFFFFF"/>
+                </a:solidFill>
+                <a:latin typeface="Calibri"/>
+              </a:rPr>
+              <a:t>• Automata Engine: </a:t>
+            </a:r>
+            <a:r>
+              <a:rPr sz="900">
+                <a:solidFill>
+                  <a:srgbClr val="CBD5E1"/>
+                </a:solidFill>
+                <a:latin typeface="Calibri"/>
+              </a:rPr>
+              <a:t>DFA/NFA simulator, glowing stepper, and batch test runner.</a:t>
+            </a:r>
+          </a:p>
+          <a:p>
+            <a:pPr algn="l">
+              <a:spcBef>
+                <a:spcPts val="600"/>
+              </a:spcBef>
+            </a:pPr>
+            <a:r>
+              <a:rPr sz="950" b="1">
+                <a:solidFill>
+                  <a:srgbClr val="FFFFFF"/>
+                </a:solidFill>
+                <a:latin typeface="Calibri"/>
+              </a:rPr>
+              <a:t>• Algorithms: </a:t>
+            </a:r>
+            <a:r>
+              <a:rPr sz="900">
+                <a:solidFill>
+                  <a:srgbClr val="CBD5E1"/>
+                </a:solidFill>
+                <a:latin typeface="Calibri"/>
+              </a:rPr>
+              <a:t>NFA to DFA subset construction &amp; Hopcroft DFA minimization.</a:t>
+            </a:r>
+          </a:p>
+          <a:p>
+            <a:pPr algn="l">
+              <a:spcBef>
+                <a:spcPts val="600"/>
+              </a:spcBef>
+            </a:pPr>
+            <a:r>
+              <a:rPr sz="950" b="1">
+                <a:solidFill>
+                  <a:srgbClr val="FFFFFF"/>
+                </a:solidFill>
+                <a:latin typeface="Calibri"/>
+              </a:rPr>
+              <a:t>• LogicAI Chatbot: </a:t>
+            </a:r>
+            <a:r>
+              <a:rPr sz="900">
+                <a:solidFill>
+                  <a:srgbClr val="CBD5E1"/>
+                </a:solidFill>
+                <a:latin typeface="Calibri"/>
+              </a:rPr>
+              <a:t>Canvas context injection &amp; live LLM integration with API modal.</a:t>
+            </a:r>
+          </a:p>
+          <a:p>
+            <a:pPr algn="l">
+              <a:spcBef>
+                <a:spcPts val="600"/>
+              </a:spcBef>
+            </a:pPr>
+            <a:r>
+              <a:rPr sz="950" b="1">
+                <a:solidFill>
+                  <a:srgbClr val="FFFFFF"/>
+                </a:solidFill>
+                <a:latin typeface="Calibri"/>
+              </a:rPr>
+              <a:t>• Frontend IDE: </a:t>
+            </a:r>
+            <a:r>
+              <a:rPr sz="900">
+                <a:solidFill>
+                  <a:srgbClr val="CBD5E1"/>
+                </a:solidFill>
+                <a:latin typeface="Calibri"/>
+              </a:rPr>
+              <a:t>Next.js 16 shell, dock panels, and custom glowing node components.</a:t>
+            </a:r>
+          </a:p>
+          <a:p>
+            <a:pPr algn="l">
               <a:spcBef>
                 <a:spcPts val="1000"/>
               </a:spcBef>
-              <a:defRPr sz="1050">
-                <a:solidFill>
-                  <a:srgbClr val="CBD5E1"/>
-                </a:solidFill>
-                <a:latin typeface="Calibri"/>
-              </a:defRPr>
-            </a:pPr>
-            <a:r>
-              <a:t>Finite Automata (DFA/NFA simulator, NFA-&gt;DFA, Minimization) + LogicAI Chatbot (LLM integration &amp; context) + Frontend Shell.</a:t>
-            </a:r>
-          </a:p>
-        </p:txBody>
-      </p:sp>
-      <p:sp>
-        <p:nvSpPr>
-          <p:cNvPr id="6" name="Rounded Rectangle 5"/>
+              <a:defRPr sz="850" b="1">
+                <a:solidFill>
+                  <a:srgbClr val="FCD34D"/>
+                </a:solidFill>
+                <a:latin typeface="Calibri"/>
+              </a:defRPr>
+            </a:pPr>
+            <a:r>
+              <a:t>Stack: Next.js 16 • React Flow • Gemini LLM</a:t>
+            </a:r>
+            <a:br/>
+            <a:r>
+              <a:t>Status: ✓ Verified &amp; Tested</a:t>
+            </a:r>
+          </a:p>
+        </p:txBody>
+      </p:sp>
+      <p:sp>
+        <p:nvSpPr>
+          <p:cNvPr id="7" name="Rounded Rectangle 6"/>
           <p:cNvSpPr/>
           <p:nvPr/>
         </p:nvSpPr>
         <p:spPr>
           <a:xfrm>
-            <a:off x="2926080" y="1645920"/>
-            <a:ext cx="1993392" cy="4663440"/>
+            <a:off x="2910535" y="1508760"/>
+            <a:ext cx="2011680" cy="4892040"/>
           </a:xfrm>
           <a:prstGeom prst="roundRect">
-            <a:avLst/>
+            <a:avLst>
+              <a:gd name="adj" fmla="val 4000"/>
+            </a:avLst>
           </a:prstGeom>
           <a:solidFill>
             <a:srgbClr val="191E2A"/>
           </a:solidFill>
-          <a:ln w="19050">
+          <a:ln w="22225">
             <a:solidFill>
               <a:srgbClr val="F59E0B"/>
             </a:solidFill>
@@ -4030,10 +4449,10 @@
           </a:fontRef>
         </p:style>
         <p:txBody>
-          <a:bodyPr rtlCol="0" anchor="ctr" wrap="square" lIns="164592" rIns="164592" tIns="228600"/>
+          <a:bodyPr rtlCol="0" anchor="t" wrap="square" lIns="146304" rIns="146304" tIns="182880" bIns="137160"/>
           <a:lstStyle/>
           <a:p>
-            <a:pPr algn="ctr">
+            <a:pPr algn="l">
               <a:defRPr sz="1300" b="1">
                 <a:solidFill>
                   <a:srgbClr val="F59E0B"/>
@@ -4046,57 +4465,179 @@
             </a:r>
           </a:p>
           <a:p>
-            <a:pPr>
-              <a:spcBef>
-                <a:spcPts val="300"/>
+            <a:pPr algn="l">
+              <a:spcBef>
+                <a:spcPts val="200"/>
               </a:spcBef>
               <a:defRPr sz="950" b="1">
                 <a:solidFill>
                   <a:srgbClr val="FFFFFF"/>
                 </a:solidFill>
+                <a:latin typeface="Calibri"/>
+              </a:defRPr>
+            </a:pPr>
+            <a:r>
+              <a:t>Set Theory &amp; Venn Specialist</a:t>
+            </a:r>
+          </a:p>
+          <a:p>
+            <a:pPr algn="l">
+              <a:spcBef>
+                <a:spcPts val="800"/>
+              </a:spcBef>
+              <a:defRPr sz="850" b="1">
+                <a:solidFill>
+                  <a:srgbClr val="F59E0B"/>
+                </a:solidFill>
                 <a:latin typeface="Arial"/>
               </a:defRPr>
             </a:pPr>
             <a:r>
-              <a:t>Set Theory &amp; Venn Specialist</a:t>
-            </a:r>
-          </a:p>
-          <a:p>
-            <a:pPr>
+              <a:t>CORE DELIVERABLES</a:t>
+            </a:r>
+          </a:p>
+          <a:p>
+            <a:pPr algn="l">
+              <a:spcBef>
+                <a:spcPts val="600"/>
+              </a:spcBef>
+            </a:pPr>
+            <a:r>
+              <a:rPr sz="950" b="1">
+                <a:solidFill>
+                  <a:srgbClr val="FFFFFF"/>
+                </a:solidFill>
+                <a:latin typeface="Calibri"/>
+              </a:rPr>
+              <a:t>• Set Builder: </a:t>
+            </a:r>
+            <a:r>
+              <a:rPr sz="900">
+                <a:solidFill>
+                  <a:srgbClr val="CBD5E1"/>
+                </a:solidFill>
+                <a:latin typeface="Calibri"/>
+              </a:rPr>
+              <a:t>Custom sets, set roster notation, and bracket parsing.</a:t>
+            </a:r>
+          </a:p>
+          <a:p>
+            <a:pPr algn="l">
+              <a:spcBef>
+                <a:spcPts val="600"/>
+              </a:spcBef>
+            </a:pPr>
+            <a:r>
+              <a:rPr sz="950" b="1">
+                <a:solidFill>
+                  <a:srgbClr val="FFFFFF"/>
+                </a:solidFill>
+                <a:latin typeface="Calibri"/>
+              </a:rPr>
+              <a:t>• Set Operations: </a:t>
+            </a:r>
+            <a:r>
+              <a:rPr sz="900">
+                <a:solidFill>
+                  <a:srgbClr val="CBD5E1"/>
+                </a:solidFill>
+                <a:latin typeface="Calibri"/>
+              </a:rPr>
+              <a:t>Union, Intersection, Difference, and Power Set P(A).</a:t>
+            </a:r>
+          </a:p>
+          <a:p>
+            <a:pPr algn="l">
+              <a:spcBef>
+                <a:spcPts val="600"/>
+              </a:spcBef>
+            </a:pPr>
+            <a:r>
+              <a:rPr sz="950" b="1">
+                <a:solidFill>
+                  <a:srgbClr val="FFFFFF"/>
+                </a:solidFill>
+                <a:latin typeface="Calibri"/>
+              </a:rPr>
+              <a:t>• Dynamic Venn: </a:t>
+            </a:r>
+            <a:r>
+              <a:rPr sz="900">
+                <a:solidFill>
+                  <a:srgbClr val="CBD5E1"/>
+                </a:solidFill>
+                <a:latin typeface="Calibri"/>
+              </a:rPr>
+              <a:t>Interactive 2-set &amp; 3-set SVG diagrams with 8-region spatial sorting.</a:t>
+            </a:r>
+          </a:p>
+          <a:p>
+            <a:pPr algn="l">
+              <a:spcBef>
+                <a:spcPts val="600"/>
+              </a:spcBef>
+            </a:pPr>
+            <a:r>
+              <a:rPr sz="950" b="1">
+                <a:solidFill>
+                  <a:srgbClr val="FFFFFF"/>
+                </a:solidFill>
+                <a:latin typeface="Calibri"/>
+              </a:rPr>
+              <a:t>• Live Reactivity: </a:t>
+            </a:r>
+            <a:r>
+              <a:rPr sz="900">
+                <a:solidFill>
+                  <a:srgbClr val="CBD5E1"/>
+                </a:solidFill>
+                <a:latin typeface="Calibri"/>
+              </a:rPr>
+              <a:t>Zustand synchronization re-evaluating sets upon node mutations.</a:t>
+            </a:r>
+          </a:p>
+          <a:p>
+            <a:pPr algn="l">
               <a:spcBef>
                 <a:spcPts val="1000"/>
               </a:spcBef>
-              <a:defRPr sz="1050">
-                <a:solidFill>
-                  <a:srgbClr val="CBD5E1"/>
-                </a:solidFill>
-                <a:latin typeface="Calibri"/>
-              </a:defRPr>
-            </a:pPr>
-            <a:r>
-              <a:t>Core Set Operations (Union, Intersection, Difference, Power Set) + Dynamic 2-Set &amp; 3-Set SVG Venn Diagram partitioning.</a:t>
-            </a:r>
-          </a:p>
-        </p:txBody>
-      </p:sp>
-      <p:sp>
-        <p:nvSpPr>
-          <p:cNvPr id="7" name="Rounded Rectangle 6"/>
+              <a:defRPr sz="850" b="1">
+                <a:solidFill>
+                  <a:srgbClr val="FCD34D"/>
+                </a:solidFill>
+                <a:latin typeface="Calibri"/>
+              </a:defRPr>
+            </a:pPr>
+            <a:r>
+              <a:t>Stack: SVG Math • Set Theory • Zustand</a:t>
+            </a:r>
+            <a:br/>
+            <a:r>
+              <a:t>Status: ✓ Verified &amp; Tested</a:t>
+            </a:r>
+          </a:p>
+        </p:txBody>
+      </p:sp>
+      <p:sp>
+        <p:nvSpPr>
+          <p:cNvPr id="8" name="Rounded Rectangle 7"/>
           <p:cNvSpPr/>
           <p:nvPr/>
         </p:nvSpPr>
         <p:spPr>
           <a:xfrm>
-            <a:off x="5120640" y="1645920"/>
-            <a:ext cx="1993392" cy="4663440"/>
+            <a:off x="5089550" y="1508760"/>
+            <a:ext cx="2011680" cy="4892040"/>
           </a:xfrm>
           <a:prstGeom prst="roundRect">
-            <a:avLst/>
+            <a:avLst>
+              <a:gd name="adj" fmla="val 4000"/>
+            </a:avLst>
           </a:prstGeom>
           <a:solidFill>
             <a:srgbClr val="191E2A"/>
           </a:solidFill>
-          <a:ln w="19050">
+          <a:ln w="22225">
             <a:solidFill>
               <a:srgbClr val="10B981"/>
             </a:solidFill>
@@ -4117,10 +4658,10 @@
           </a:fontRef>
         </p:style>
         <p:txBody>
-          <a:bodyPr rtlCol="0" anchor="ctr" wrap="square" lIns="164592" rIns="164592" tIns="228600"/>
+          <a:bodyPr rtlCol="0" anchor="t" wrap="square" lIns="146304" rIns="146304" tIns="182880" bIns="137160"/>
           <a:lstStyle/>
           <a:p>
-            <a:pPr algn="ctr">
+            <a:pPr algn="l">
               <a:defRPr sz="1300" b="1">
                 <a:solidFill>
                   <a:srgbClr val="10B981"/>
@@ -4133,57 +4674,179 @@
             </a:r>
           </a:p>
           <a:p>
-            <a:pPr>
-              <a:spcBef>
-                <a:spcPts val="300"/>
+            <a:pPr algn="l">
+              <a:spcBef>
+                <a:spcPts val="200"/>
               </a:spcBef>
               <a:defRPr sz="950" b="1">
                 <a:solidFill>
                   <a:srgbClr val="FFFFFF"/>
                 </a:solidFill>
+                <a:latin typeface="Calibri"/>
+              </a:defRPr>
+            </a:pPr>
+            <a:r>
+              <a:t>Propositional Logic Specialist</a:t>
+            </a:r>
+          </a:p>
+          <a:p>
+            <a:pPr algn="l">
+              <a:spcBef>
+                <a:spcPts val="800"/>
+              </a:spcBef>
+              <a:defRPr sz="850" b="1">
+                <a:solidFill>
+                  <a:srgbClr val="10B981"/>
+                </a:solidFill>
                 <a:latin typeface="Arial"/>
               </a:defRPr>
             </a:pPr>
             <a:r>
-              <a:t>Propositional Logic Specialist</a:t>
-            </a:r>
-          </a:p>
-          <a:p>
-            <a:pPr>
+              <a:t>CORE DELIVERABLES</a:t>
+            </a:r>
+          </a:p>
+          <a:p>
+            <a:pPr algn="l">
+              <a:spcBef>
+                <a:spcPts val="600"/>
+              </a:spcBef>
+            </a:pPr>
+            <a:r>
+              <a:rPr sz="950" b="1">
+                <a:solidFill>
+                  <a:srgbClr val="FFFFFF"/>
+                </a:solidFill>
+                <a:latin typeface="Calibri"/>
+              </a:rPr>
+              <a:t>• Logic Gate Canvas: </a:t>
+            </a:r>
+            <a:r>
+              <a:rPr sz="900">
+                <a:solidFill>
+                  <a:srgbClr val="CBD5E1"/>
+                </a:solidFill>
+                <a:latin typeface="Calibri"/>
+              </a:rPr>
+              <a:t>AND, OR, NOT, IMPLIES, and IFF gates with signal flow.</a:t>
+            </a:r>
+          </a:p>
+          <a:p>
+            <a:pPr algn="l">
+              <a:spcBef>
+                <a:spcPts val="600"/>
+              </a:spcBef>
+            </a:pPr>
+            <a:r>
+              <a:rPr sz="950" b="1">
+                <a:solidFill>
+                  <a:srgbClr val="FFFFFF"/>
+                </a:solidFill>
+                <a:latin typeface="Calibri"/>
+              </a:rPr>
+              <a:t>• Truth Table Engine: </a:t>
+            </a:r>
+            <a:r>
+              <a:rPr sz="900">
+                <a:solidFill>
+                  <a:srgbClr val="CBD5E1"/>
+                </a:solidFill>
+                <a:latin typeface="Calibri"/>
+              </a:rPr>
+              <a:t>Exhaustive 2^n valuation tables for up to 16 boolean variables.</a:t>
+            </a:r>
+          </a:p>
+          <a:p>
+            <a:pPr algn="l">
+              <a:spcBef>
+                <a:spcPts val="600"/>
+              </a:spcBef>
+            </a:pPr>
+            <a:r>
+              <a:rPr sz="950" b="1">
+                <a:solidFill>
+                  <a:srgbClr val="FFFFFF"/>
+                </a:solidFill>
+                <a:latin typeface="Calibri"/>
+              </a:rPr>
+              <a:t>• Normal Forms: </a:t>
+            </a:r>
+            <a:r>
+              <a:rPr sz="900">
+                <a:solidFill>
+                  <a:srgbClr val="CBD5E1"/>
+                </a:solidFill>
+                <a:latin typeface="Calibri"/>
+              </a:rPr>
+              <a:t>Automated DNF, CNF, and formal Tautology / Contradiction verification.</a:t>
+            </a:r>
+          </a:p>
+          <a:p>
+            <a:pPr algn="l">
+              <a:spcBef>
+                <a:spcPts val="600"/>
+              </a:spcBef>
+            </a:pPr>
+            <a:r>
+              <a:rPr sz="950" b="1">
+                <a:solidFill>
+                  <a:srgbClr val="FFFFFF"/>
+                </a:solidFill>
+                <a:latin typeface="Calibri"/>
+              </a:rPr>
+              <a:t>• LaTeX Export: </a:t>
+            </a:r>
+            <a:r>
+              <a:rPr sz="900">
+                <a:solidFill>
+                  <a:srgbClr val="CBD5E1"/>
+                </a:solidFill>
+                <a:latin typeface="Calibri"/>
+              </a:rPr>
+              <a:t>Mathematical formula synthesis into publication LaTeX.</a:t>
+            </a:r>
+          </a:p>
+          <a:p>
+            <a:pPr algn="l">
               <a:spcBef>
                 <a:spcPts val="1000"/>
               </a:spcBef>
-              <a:defRPr sz="1050">
-                <a:solidFill>
-                  <a:srgbClr val="CBD5E1"/>
-                </a:solidFill>
-                <a:latin typeface="Calibri"/>
-              </a:defRPr>
-            </a:pPr>
-            <a:r>
-              <a:t>Logic Gate DAG Canvas (AND, OR, NOT, IMPLIES) + 16-variable Truth Table generator + DNF/CNF canonical forms &amp; Tautology checker.</a:t>
-            </a:r>
-          </a:p>
-        </p:txBody>
-      </p:sp>
-      <p:sp>
-        <p:nvSpPr>
-          <p:cNvPr id="8" name="Rounded Rectangle 7"/>
+              <a:defRPr sz="850" b="1">
+                <a:solidFill>
+                  <a:srgbClr val="FCD34D"/>
+                </a:solidFill>
+                <a:latin typeface="Calibri"/>
+              </a:defRPr>
+            </a:pPr>
+            <a:r>
+              <a:t>Stack: Boolean AST • Formal Logic • Proofs</a:t>
+            </a:r>
+            <a:br/>
+            <a:r>
+              <a:t>Status: ✓ Verified &amp; Tested</a:t>
+            </a:r>
+          </a:p>
+        </p:txBody>
+      </p:sp>
+      <p:sp>
+        <p:nvSpPr>
+          <p:cNvPr id="9" name="Rounded Rectangle 8"/>
           <p:cNvSpPr/>
           <p:nvPr/>
         </p:nvSpPr>
         <p:spPr>
           <a:xfrm>
-            <a:off x="7315199" y="1645920"/>
-            <a:ext cx="1993392" cy="4663440"/>
+            <a:off x="7268565" y="1508760"/>
+            <a:ext cx="2011680" cy="4892040"/>
           </a:xfrm>
           <a:prstGeom prst="roundRect">
-            <a:avLst/>
+            <a:avLst>
+              <a:gd name="adj" fmla="val 4000"/>
+            </a:avLst>
           </a:prstGeom>
           <a:solidFill>
             <a:srgbClr val="191E2A"/>
           </a:solidFill>
-          <a:ln w="19050">
+          <a:ln w="22225">
             <a:solidFill>
               <a:srgbClr val="A855F7"/>
             </a:solidFill>
@@ -4204,10 +4867,10 @@
           </a:fontRef>
         </p:style>
         <p:txBody>
-          <a:bodyPr rtlCol="0" anchor="ctr" wrap="square" lIns="164592" rIns="164592" tIns="228600"/>
+          <a:bodyPr rtlCol="0" anchor="t" wrap="square" lIns="146304" rIns="146304" tIns="182880" bIns="137160"/>
           <a:lstStyle/>
           <a:p>
-            <a:pPr algn="ctr">
+            <a:pPr algn="l">
               <a:defRPr sz="1300" b="1">
                 <a:solidFill>
                   <a:srgbClr val="A855F7"/>
@@ -4220,57 +4883,179 @@
             </a:r>
           </a:p>
           <a:p>
-            <a:pPr>
-              <a:spcBef>
-                <a:spcPts val="300"/>
+            <a:pPr algn="l">
+              <a:spcBef>
+                <a:spcPts val="200"/>
               </a:spcBef>
               <a:defRPr sz="950" b="1">
                 <a:solidFill>
                   <a:srgbClr val="FFFFFF"/>
                 </a:solidFill>
+                <a:latin typeface="Calibri"/>
+              </a:defRPr>
+            </a:pPr>
+            <a:r>
+              <a:t>Proof &amp; Verification Specialist</a:t>
+            </a:r>
+          </a:p>
+          <a:p>
+            <a:pPr algn="l">
+              <a:spcBef>
+                <a:spcPts val="800"/>
+              </a:spcBef>
+              <a:defRPr sz="850" b="1">
+                <a:solidFill>
+                  <a:srgbClr val="A855F7"/>
+                </a:solidFill>
                 <a:latin typeface="Arial"/>
               </a:defRPr>
             </a:pPr>
             <a:r>
-              <a:t>Proof &amp; Verification Specialist</a:t>
-            </a:r>
-          </a:p>
-          <a:p>
-            <a:pPr>
+              <a:t>CORE DELIVERABLES</a:t>
+            </a:r>
+          </a:p>
+          <a:p>
+            <a:pPr algn="l">
+              <a:spcBef>
+                <a:spcPts val="600"/>
+              </a:spcBef>
+            </a:pPr>
+            <a:r>
+              <a:rPr sz="950" b="1">
+                <a:solidFill>
+                  <a:srgbClr val="FFFFFF"/>
+                </a:solidFill>
+                <a:latin typeface="Calibri"/>
+              </a:rPr>
+              <a:t>• PIE Counting Solver: </a:t>
+            </a:r>
+            <a:r>
+              <a:rPr sz="900">
+                <a:solidFill>
+                  <a:srgbClr val="CBD5E1"/>
+                </a:solidFill>
+                <a:latin typeface="Calibri"/>
+              </a:rPr>
+              <a:t>Step-by-step arithmetic solver for Inclusion-Exclusion problems.</a:t>
+            </a:r>
+          </a:p>
+          <a:p>
+            <a:pPr algn="l">
+              <a:spcBef>
+                <a:spcPts val="600"/>
+              </a:spcBef>
+            </a:pPr>
+            <a:r>
+              <a:rPr sz="950" b="1">
+                <a:solidFill>
+                  <a:srgbClr val="FFFFFF"/>
+                </a:solidFill>
+                <a:latin typeface="Calibri"/>
+              </a:rPr>
+              <a:t>• Cantor Visualizer: </a:t>
+            </a:r>
+            <a:r>
+              <a:rPr sz="900">
+                <a:solidFill>
+                  <a:srgbClr val="CBD5E1"/>
+                </a:solidFill>
+                <a:latin typeface="Calibri"/>
+              </a:rPr>
+              <a:t>Uncountability proof of R with interactive anti-diagonal inversion.</a:t>
+            </a:r>
+          </a:p>
+          <a:p>
+            <a:pPr algn="l">
+              <a:spcBef>
+                <a:spcPts val="600"/>
+              </a:spcBef>
+            </a:pPr>
+            <a:r>
+              <a:rPr sz="950" b="1">
+                <a:solidFill>
+                  <a:srgbClr val="FFFFFF"/>
+                </a:solidFill>
+                <a:latin typeface="Calibri"/>
+              </a:rPr>
+              <a:t>• Snake Path Engine: </a:t>
+            </a:r>
+            <a:r>
+              <a:rPr sz="900">
+                <a:solidFill>
+                  <a:srgbClr val="CBD5E1"/>
+                </a:solidFill>
+                <a:latin typeface="Calibri"/>
+              </a:rPr>
+              <a:t>Countability of positive rational numbers ℚ⁺ via snake grid.</a:t>
+            </a:r>
+          </a:p>
+          <a:p>
+            <a:pPr algn="l">
+              <a:spcBef>
+                <a:spcPts val="600"/>
+              </a:spcBef>
+            </a:pPr>
+            <a:r>
+              <a:rPr sz="950" b="1">
+                <a:solidFill>
+                  <a:srgbClr val="FFFFFF"/>
+                </a:solidFill>
+                <a:latin typeface="Calibri"/>
+              </a:rPr>
+              <a:t>• Induction Pipeline: </a:t>
+            </a:r>
+            <a:r>
+              <a:rPr sz="900">
+                <a:solidFill>
+                  <a:srgbClr val="CBD5E1"/>
+                </a:solidFill>
+                <a:latin typeface="Calibri"/>
+              </a:rPr>
+              <a:t>Base step, hypothesis, and inductive step proof derivations.</a:t>
+            </a:r>
+          </a:p>
+          <a:p>
+            <a:pPr algn="l">
               <a:spcBef>
                 <a:spcPts val="1000"/>
               </a:spcBef>
-              <a:defRPr sz="1050">
-                <a:solidFill>
-                  <a:srgbClr val="CBD5E1"/>
-                </a:solidFill>
-                <a:latin typeface="Calibri"/>
-              </a:defRPr>
-            </a:pPr>
-            <a:r>
-              <a:t>Principle of Inclusion-Exclusion (PIE) Solver + Cantor's Diagonalization proof visualizer + Mathematical Induction steps.</a:t>
-            </a:r>
-          </a:p>
-        </p:txBody>
-      </p:sp>
-      <p:sp>
-        <p:nvSpPr>
-          <p:cNvPr id="9" name="Rounded Rectangle 8"/>
+              <a:defRPr sz="850" b="1">
+                <a:solidFill>
+                  <a:srgbClr val="FCD34D"/>
+                </a:solidFill>
+                <a:latin typeface="Calibri"/>
+              </a:defRPr>
+            </a:pPr>
+            <a:r>
+              <a:t>Stack: Proof Theory • Number Theory • Algorithms</a:t>
+            </a:r>
+            <a:br/>
+            <a:r>
+              <a:t>Status: ✓ Verified &amp; Tested</a:t>
+            </a:r>
+          </a:p>
+        </p:txBody>
+      </p:sp>
+      <p:sp>
+        <p:nvSpPr>
+          <p:cNvPr id="10" name="Rounded Rectangle 9"/>
           <p:cNvSpPr/>
           <p:nvPr/>
         </p:nvSpPr>
         <p:spPr>
           <a:xfrm>
-            <a:off x="9509760" y="1645920"/>
-            <a:ext cx="1993392" cy="4663440"/>
+            <a:off x="9447580" y="1508760"/>
+            <a:ext cx="2011680" cy="4892040"/>
           </a:xfrm>
           <a:prstGeom prst="roundRect">
-            <a:avLst/>
+            <a:avLst>
+              <a:gd name="adj" fmla="val 4000"/>
+            </a:avLst>
           </a:prstGeom>
           <a:solidFill>
             <a:srgbClr val="191E2A"/>
           </a:solidFill>
-          <a:ln w="19050">
+          <a:ln w="22225">
             <a:solidFill>
               <a:srgbClr val="EB3C3C"/>
             </a:solidFill>
@@ -4291,10 +5076,10 @@
           </a:fontRef>
         </p:style>
         <p:txBody>
-          <a:bodyPr rtlCol="0" anchor="ctr" wrap="square" lIns="164592" rIns="164592" tIns="228600"/>
+          <a:bodyPr rtlCol="0" anchor="t" wrap="square" lIns="146304" rIns="146304" tIns="182880" bIns="137160"/>
           <a:lstStyle/>
           <a:p>
-            <a:pPr algn="ctr">
+            <a:pPr algn="l">
               <a:defRPr sz="1300" b="1">
                 <a:solidFill>
                   <a:srgbClr val="EB3C3C"/>
@@ -4307,35 +5092,155 @@
             </a:r>
           </a:p>
           <a:p>
-            <a:pPr>
-              <a:spcBef>
-                <a:spcPts val="300"/>
+            <a:pPr algn="l">
+              <a:spcBef>
+                <a:spcPts val="200"/>
               </a:spcBef>
               <a:defRPr sz="950" b="1">
                 <a:solidFill>
                   <a:srgbClr val="FFFFFF"/>
                 </a:solidFill>
+                <a:latin typeface="Calibri"/>
+              </a:defRPr>
+            </a:pPr>
+            <a:r>
+              <a:t>Relations &amp; Order Specialist</a:t>
+            </a:r>
+          </a:p>
+          <a:p>
+            <a:pPr algn="l">
+              <a:spcBef>
+                <a:spcPts val="800"/>
+              </a:spcBef>
+              <a:defRPr sz="850" b="1">
+                <a:solidFill>
+                  <a:srgbClr val="EB3C3C"/>
+                </a:solidFill>
                 <a:latin typeface="Arial"/>
               </a:defRPr>
             </a:pPr>
             <a:r>
-              <a:t>Relations &amp; Order Theory Specialist</a:t>
-            </a:r>
-          </a:p>
-          <a:p>
-            <a:pPr>
+              <a:t>CORE DELIVERABLES</a:t>
+            </a:r>
+          </a:p>
+          <a:p>
+            <a:pPr algn="l">
+              <a:spcBef>
+                <a:spcPts val="600"/>
+              </a:spcBef>
+            </a:pPr>
+            <a:r>
+              <a:rPr sz="950" b="1">
+                <a:solidFill>
+                  <a:srgbClr val="FFFFFF"/>
+                </a:solidFill>
+                <a:latin typeface="Calibri"/>
+              </a:rPr>
+              <a:t>• Relation Matrix: </a:t>
+            </a:r>
+            <a:r>
+              <a:rPr sz="900">
+                <a:solidFill>
+                  <a:srgbClr val="CBD5E1"/>
+                </a:solidFill>
+                <a:latin typeface="Calibri"/>
+              </a:rPr>
+              <a:t>Interactive matrix checking Reflexive, Symmetric, and Transitive rules.</a:t>
+            </a:r>
+          </a:p>
+          <a:p>
+            <a:pPr algn="l">
+              <a:spcBef>
+                <a:spcPts val="600"/>
+              </a:spcBef>
+            </a:pPr>
+            <a:r>
+              <a:rPr sz="950" b="1">
+                <a:solidFill>
+                  <a:srgbClr val="FFFFFF"/>
+                </a:solidFill>
+                <a:latin typeface="Calibri"/>
+              </a:rPr>
+              <a:t>• Warshall's Algorithm: </a:t>
+            </a:r>
+            <a:r>
+              <a:rPr sz="900">
+                <a:solidFill>
+                  <a:srgbClr val="CBD5E1"/>
+                </a:solidFill>
+                <a:latin typeface="Calibri"/>
+              </a:rPr>
+              <a:t>Step-by-step matrix derivation computing transitive closure R+.</a:t>
+            </a:r>
+          </a:p>
+          <a:p>
+            <a:pPr algn="l">
+              <a:spcBef>
+                <a:spcPts val="600"/>
+              </a:spcBef>
+            </a:pPr>
+            <a:r>
+              <a:rPr sz="950" b="1">
+                <a:solidFill>
+                  <a:srgbClr val="FFFFFF"/>
+                </a:solidFill>
+                <a:latin typeface="Calibri"/>
+              </a:rPr>
+              <a:t>• Hasse Diagrams: </a:t>
+            </a:r>
+            <a:r>
+              <a:rPr sz="900">
+                <a:solidFill>
+                  <a:srgbClr val="CBD5E1"/>
+                </a:solidFill>
+                <a:latin typeface="Calibri"/>
+              </a:rPr>
+              <a:t>Automated poset trees stripping reflexive and transitive edges.</a:t>
+            </a:r>
+          </a:p>
+          <a:p>
+            <a:pPr algn="l">
+              <a:spcBef>
+                <a:spcPts val="600"/>
+              </a:spcBef>
+            </a:pPr>
+            <a:r>
+              <a:rPr sz="950" b="1">
+                <a:solidFill>
+                  <a:srgbClr val="FFFFFF"/>
+                </a:solidFill>
+                <a:latin typeface="Calibri"/>
+              </a:rPr>
+              <a:t>• Function Analyzer: </a:t>
+            </a:r>
+            <a:r>
+              <a:rPr sz="900">
+                <a:solidFill>
+                  <a:srgbClr val="CBD5E1"/>
+                </a:solidFill>
+                <a:latin typeface="Calibri"/>
+              </a:rPr>
+              <a:t>Arrow mapping vectors with Injective / Surjective classification.</a:t>
+            </a:r>
+          </a:p>
+          <a:p>
+            <a:pPr algn="l">
               <a:spcBef>
                 <a:spcPts val="1000"/>
               </a:spcBef>
-              <a:defRPr sz="1050">
-                <a:solidFill>
-                  <a:srgbClr val="CBD5E1"/>
-                </a:solidFill>
-                <a:latin typeface="Calibri"/>
-              </a:defRPr>
-            </a:pPr>
-            <a:r>
-              <a:t>Binary Relation Matrix (Reflexive/Symmetric/Transitive) + Warshall's Algorithm transitive closure + Hasse Diagrams &amp; Function Mapper.</a:t>
+              <a:defRPr sz="850" b="1">
+                <a:solidFill>
+                  <a:srgbClr val="FCD34D"/>
+                </a:solidFill>
+                <a:latin typeface="Calibri"/>
+              </a:defRPr>
+            </a:pPr>
+            <a:r>
+              <a:t>Stack: Matrix Ops • Order Theory • Graph Math</a:t>
+            </a:r>
+            <a:br/>
+            <a:r>
+              <a:t>Status: ✓ Verified &amp; Tested</a:t>
             </a:r>
           </a:p>
         </p:txBody>
@@ -4409,8 +5314,8 @@
         </p:nvSpPr>
         <p:spPr>
           <a:xfrm>
-            <a:off x="731520" y="365760"/>
-            <a:ext cx="10725912" cy="1005840"/>
+            <a:off x="731520" y="320040"/>
+            <a:ext cx="10725912" cy="274320"/>
           </a:xfrm>
           <a:prstGeom prst="rect">
             <a:avLst/>
@@ -4418,13 +5323,13 @@
           <a:noFill/>
         </p:spPr>
         <p:txBody>
-          <a:bodyPr wrap="square" lIns="0" tIns="0" rIns="0" bIns="0">
+          <a:bodyPr wrap="square" anchor="t" lIns="0" rIns="0" tIns="0" bIns="0">
             <a:spAutoFit/>
           </a:bodyPr>
           <a:lstStyle/>
           <a:p>
-            <a:pPr>
-              <a:defRPr sz="1100" b="1">
+            <a:pPr algn="l">
+              <a:defRPr sz="1000" b="1">
                 <a:solidFill>
                   <a:srgbClr val="EB3C3C"/>
                 </a:solidFill>
@@ -4432,14 +5337,34 @@
               </a:defRPr>
             </a:pPr>
             <a:r>
-              <a:t>UPCOMING EXPANSIONS</a:t>
-            </a:r>
-          </a:p>
-          <a:p>
-            <a:pPr>
-              <a:spcBef>
-                <a:spcPts val="300"/>
-              </a:spcBef>
+              <a:t>FUTURE EXPANSION ROADMAP</a:t>
+            </a:r>
+          </a:p>
+        </p:txBody>
+      </p:sp>
+      <p:sp>
+        <p:nvSpPr>
+          <p:cNvPr id="4" name="TextBox 3"/>
+          <p:cNvSpPr txBox="1"/>
+          <p:nvPr/>
+        </p:nvSpPr>
+        <p:spPr>
+          <a:xfrm>
+            <a:off x="731520" y="594360"/>
+            <a:ext cx="10725912" cy="594360"/>
+          </a:xfrm>
+          <a:prstGeom prst="rect">
+            <a:avLst/>
+          </a:prstGeom>
+          <a:noFill/>
+        </p:spPr>
+        <p:txBody>
+          <a:bodyPr wrap="square" anchor="t" lIns="0" rIns="0" tIns="0" bIns="0">
+            <a:spAutoFit/>
+          </a:bodyPr>
+          <a:lstStyle/>
+          <a:p>
+            <a:pPr algn="l">
               <a:defRPr sz="2200" b="1">
                 <a:solidFill>
                   <a:srgbClr val="FFFFFF"/>
@@ -4455,14 +5380,14 @@
       </p:sp>
       <p:sp>
         <p:nvSpPr>
-          <p:cNvPr id="4" name="Rectangle 3"/>
+          <p:cNvPr id="5" name="Rectangle 4"/>
           <p:cNvSpPr/>
           <p:nvPr/>
         </p:nvSpPr>
         <p:spPr>
           <a:xfrm>
-            <a:off x="731520" y="1353312"/>
-            <a:ext cx="10725912" cy="36576"/>
+            <a:off x="731520" y="1234440"/>
+            <a:ext cx="10725912" cy="32004"/>
           </a:xfrm>
           <a:prstGeom prst="rect">
             <a:avLst/>
@@ -4498,22 +5423,24 @@
       </p:sp>
       <p:sp>
         <p:nvSpPr>
-          <p:cNvPr id="5" name="Rounded Rectangle 4"/>
+          <p:cNvPr id="6" name="Rounded Rectangle 5"/>
           <p:cNvSpPr/>
           <p:nvPr/>
         </p:nvSpPr>
         <p:spPr>
           <a:xfrm>
-            <a:off x="731520" y="1645920"/>
-            <a:ext cx="5212080" cy="4663440"/>
+            <a:off x="731520" y="1508760"/>
+            <a:ext cx="5212080" cy="4892040"/>
           </a:xfrm>
           <a:prstGeom prst="roundRect">
-            <a:avLst/>
+            <a:avLst>
+              <a:gd name="adj" fmla="val 4000"/>
+            </a:avLst>
           </a:prstGeom>
           <a:solidFill>
             <a:srgbClr val="191E2A"/>
           </a:solidFill>
-          <a:ln w="19050">
+          <a:ln w="22225">
             <a:solidFill>
               <a:srgbClr val="F59E0B"/>
             </a:solidFill>
@@ -4534,11 +5461,11 @@
           </a:fontRef>
         </p:style>
         <p:txBody>
-          <a:bodyPr rtlCol="0" anchor="ctr" wrap="square" lIns="320040" rIns="320040" tIns="274320"/>
+          <a:bodyPr rtlCol="0" anchor="t" wrap="square" lIns="256032" rIns="256032" tIns="228600" bIns="182880"/>
           <a:lstStyle/>
           <a:p>
-            <a:pPr algn="ctr">
-              <a:defRPr sz="1200" b="1">
+            <a:pPr algn="l">
+              <a:defRPr sz="1400" b="1">
                 <a:solidFill>
                   <a:srgbClr val="F59E0B"/>
                 </a:solidFill>
@@ -4546,93 +5473,203 @@
               </a:defRPr>
             </a:pPr>
             <a:r>
-              <a:t>MODULE 6: CONTEXT-FREE GRAMMAR (CFG) [NEXT PHASE]</a:t>
-            </a:r>
-          </a:p>
-          <a:p>
-            <a:pPr>
-              <a:spcBef>
-                <a:spcPts val="800"/>
-              </a:spcBef>
-              <a:defRPr sz="1100">
-                <a:solidFill>
-                  <a:srgbClr val="CBD5E1"/>
-                </a:solidFill>
-                <a:latin typeface="Calibri"/>
-              </a:defRPr>
-            </a:pPr>
-            <a:r>
-              <a:t>• Grammar Rule Builder: Interactive UI to define production rules like S -&gt; aSb | ε.</a:t>
-            </a:r>
-          </a:p>
-          <a:p>
-            <a:pPr>
-              <a:spcBef>
-                <a:spcPts val="800"/>
-              </a:spcBef>
-              <a:defRPr sz="1100">
-                <a:solidFill>
-                  <a:srgbClr val="CBD5E1"/>
-                </a:solidFill>
-                <a:latin typeface="Calibri"/>
-              </a:defRPr>
-            </a:pPr>
-            <a:r>
-              <a:t>• Dynamic Parse Trees: Visual hierarchical syntax tree generation showing string derivations.</a:t>
-            </a:r>
-          </a:p>
-          <a:p>
-            <a:pPr>
-              <a:spcBef>
-                <a:spcPts val="800"/>
-              </a:spcBef>
-              <a:defRPr sz="1100">
-                <a:solidFill>
-                  <a:srgbClr val="CBD5E1"/>
-                </a:solidFill>
-                <a:latin typeface="Calibri"/>
-              </a:defRPr>
-            </a:pPr>
-            <a:r>
-              <a:t>• Chomsky Normal Form (CNF): Automated 4-step converter eliminating ε-rules and unit rules.</a:t>
-            </a:r>
-          </a:p>
-          <a:p>
-            <a:pPr>
-              <a:spcBef>
-                <a:spcPts val="800"/>
-              </a:spcBef>
-              <a:defRPr sz="1100">
-                <a:solidFill>
-                  <a:srgbClr val="CBD5E1"/>
-                </a:solidFill>
-                <a:latin typeface="Calibri"/>
-              </a:defRPr>
-            </a:pPr>
-            <a:r>
-              <a:t>• CYK Parsing Algorithm: Dynamic programming triangular parsing table in O(n^3) time.</a:t>
-            </a:r>
-          </a:p>
-        </p:txBody>
-      </p:sp>
-      <p:sp>
-        <p:nvSpPr>
-          <p:cNvPr id="6" name="Rounded Rectangle 5"/>
+              <a:t>MODULE 6: CONTEXT-FREE GRAMMAR (CFG) [PHASE 2]</a:t>
+            </a:r>
+          </a:p>
+          <a:p>
+            <a:pPr algn="l">
+              <a:spcBef>
+                <a:spcPts val="200"/>
+              </a:spcBef>
+              <a:defRPr sz="1050" b="1">
+                <a:solidFill>
+                  <a:srgbClr val="FCD34D"/>
+                </a:solidFill>
+                <a:latin typeface="Calibri"/>
+              </a:defRPr>
+            </a:pPr>
+            <a:r>
+              <a:t>Grammar Rules, Parse Trees &amp; Chomsky Normal Form</a:t>
+            </a:r>
+          </a:p>
+          <a:p>
+            <a:pPr algn="l">
+              <a:spcBef>
+                <a:spcPts val="1000"/>
+              </a:spcBef>
+              <a:spcAft>
+                <a:spcPts val="100"/>
+              </a:spcAft>
+            </a:pPr>
+            <a:r>
+              <a:rPr sz="1200" b="1">
+                <a:solidFill>
+                  <a:srgbClr val="FCD34D"/>
+                </a:solidFill>
+                <a:latin typeface="Calibri"/>
+              </a:rPr>
+              <a:t>• Grammar Rule Builder: </a:t>
+            </a:r>
+            <a:r>
+              <a:rPr sz="1100">
+                <a:solidFill>
+                  <a:srgbClr val="CBD5E1"/>
+                </a:solidFill>
+                <a:latin typeface="Calibri"/>
+              </a:rPr>
+              <a:t>Interactive editor to type production rules like S -&gt; aSb | ε.</a:t>
+            </a:r>
+          </a:p>
+          <a:p>
+            <a:pPr algn="l">
+              <a:spcBef>
+                <a:spcPts val="1000"/>
+              </a:spcBef>
+              <a:spcAft>
+                <a:spcPts val="100"/>
+              </a:spcAft>
+            </a:pPr>
+            <a:r>
+              <a:rPr sz="1200" b="1">
+                <a:solidFill>
+                  <a:srgbClr val="FCD34D"/>
+                </a:solidFill>
+                <a:latin typeface="Calibri"/>
+              </a:rPr>
+              <a:t>• Dynamic Parse Trees: </a:t>
+            </a:r>
+            <a:r>
+              <a:rPr sz="1100">
+                <a:solidFill>
+                  <a:srgbClr val="CBD5E1"/>
+                </a:solidFill>
+                <a:latin typeface="Calibri"/>
+              </a:rPr>
+              <a:t>Visual syntax tree generation showing exact leftmost and rightmost derivation steps.</a:t>
+            </a:r>
+          </a:p>
+          <a:p>
+            <a:pPr algn="l">
+              <a:spcBef>
+                <a:spcPts val="1000"/>
+              </a:spcBef>
+              <a:spcAft>
+                <a:spcPts val="100"/>
+              </a:spcAft>
+            </a:pPr>
+            <a:r>
+              <a:rPr sz="1200" b="1">
+                <a:solidFill>
+                  <a:srgbClr val="FCD34D"/>
+                </a:solidFill>
+                <a:latin typeface="Calibri"/>
+              </a:rPr>
+              <a:t>• Chomsky Normal Form (CNF): </a:t>
+            </a:r>
+            <a:r>
+              <a:rPr sz="1100">
+                <a:solidFill>
+                  <a:srgbClr val="CBD5E1"/>
+                </a:solidFill>
+                <a:latin typeface="Calibri"/>
+              </a:rPr>
+              <a:t>Automated 4-step converter eliminating ε-rules, unit rules, and useless symbols.</a:t>
+            </a:r>
+          </a:p>
+          <a:p>
+            <a:pPr algn="l">
+              <a:spcBef>
+                <a:spcPts val="1000"/>
+              </a:spcBef>
+              <a:spcAft>
+                <a:spcPts val="100"/>
+              </a:spcAft>
+            </a:pPr>
+            <a:r>
+              <a:rPr sz="1200" b="1">
+                <a:solidFill>
+                  <a:srgbClr val="FCD34D"/>
+                </a:solidFill>
+                <a:latin typeface="Calibri"/>
+              </a:rPr>
+              <a:t>• CYK Parsing Algorithm: </a:t>
+            </a:r>
+            <a:r>
+              <a:rPr sz="1100">
+                <a:solidFill>
+                  <a:srgbClr val="CBD5E1"/>
+                </a:solidFill>
+                <a:latin typeface="Calibri"/>
+              </a:rPr>
+              <a:t>Dynamic programming triangular parsing table verifying string membership in O(n^3).</a:t>
+            </a:r>
+          </a:p>
+          <a:p>
+            <a:pPr algn="l">
+              <a:spcBef>
+                <a:spcPts val="1000"/>
+              </a:spcBef>
+              <a:spcAft>
+                <a:spcPts val="100"/>
+              </a:spcAft>
+            </a:pPr>
+            <a:r>
+              <a:rPr sz="1200" b="1">
+                <a:solidFill>
+                  <a:srgbClr val="FCD34D"/>
+                </a:solidFill>
+                <a:latin typeface="Calibri"/>
+              </a:rPr>
+              <a:t>• Ambiguity Detection: </a:t>
+            </a:r>
+            <a:r>
+              <a:rPr sz="1100">
+                <a:solidFill>
+                  <a:srgbClr val="CBD5E1"/>
+                </a:solidFill>
+                <a:latin typeface="Calibri"/>
+              </a:rPr>
+              <a:t>Highlights ambiguous grammars that produce multiple distinct parse trees for one string.</a:t>
+            </a:r>
+          </a:p>
+          <a:p>
+            <a:pPr algn="l">
+              <a:spcBef>
+                <a:spcPts val="1400"/>
+              </a:spcBef>
+              <a:defRPr sz="1000" b="1">
+                <a:solidFill>
+                  <a:srgbClr val="FCD34D"/>
+                </a:solidFill>
+                <a:latin typeface="Calibri"/>
+              </a:defRPr>
+            </a:pPr>
+            <a:r>
+              <a:t>Phase 2 Target: Visual CFG Syntax Trees &amp; CYK Parsing Grid</a:t>
+            </a:r>
+          </a:p>
+        </p:txBody>
+      </p:sp>
+      <p:sp>
+        <p:nvSpPr>
+          <p:cNvPr id="7" name="Rounded Rectangle 6"/>
           <p:cNvSpPr/>
           <p:nvPr/>
         </p:nvSpPr>
         <p:spPr>
           <a:xfrm>
-            <a:off x="6217920" y="1645920"/>
-            <a:ext cx="5212080" cy="4663440"/>
+            <a:off x="6245352" y="1508760"/>
+            <a:ext cx="5212080" cy="4892040"/>
           </a:xfrm>
           <a:prstGeom prst="roundRect">
-            <a:avLst/>
+            <a:avLst>
+              <a:gd name="adj" fmla="val 4000"/>
+            </a:avLst>
           </a:prstGeom>
           <a:solidFill>
             <a:srgbClr val="191E2A"/>
           </a:solidFill>
-          <a:ln w="19050">
+          <a:ln w="22225">
             <a:solidFill>
               <a:srgbClr val="A855F7"/>
             </a:solidFill>
@@ -4653,11 +5690,11 @@
           </a:fontRef>
         </p:style>
         <p:txBody>
-          <a:bodyPr rtlCol="0" anchor="ctr" wrap="square" lIns="320040" rIns="320040" tIns="274320"/>
+          <a:bodyPr rtlCol="0" anchor="t" wrap="square" lIns="256032" rIns="256032" tIns="228600" bIns="182880"/>
           <a:lstStyle/>
           <a:p>
-            <a:pPr algn="ctr">
-              <a:defRPr sz="1200" b="1">
+            <a:pPr algn="l">
+              <a:defRPr sz="1400" b="1">
                 <a:solidFill>
                   <a:srgbClr val="A855F7"/>
                 </a:solidFill>
@@ -4665,71 +5702,179 @@
               </a:defRPr>
             </a:pPr>
             <a:r>
-              <a:t>MODULE 7: PDA &amp; TURING MACHINES [NEXT PHASE]</a:t>
-            </a:r>
-          </a:p>
-          <a:p>
-            <a:pPr>
-              <a:spcBef>
-                <a:spcPts val="800"/>
-              </a:spcBef>
-              <a:defRPr sz="1100">
-                <a:solidFill>
-                  <a:srgbClr val="CBD5E1"/>
-                </a:solidFill>
-                <a:latin typeface="Calibri"/>
-              </a:defRPr>
-            </a:pPr>
-            <a:r>
-              <a:t>• Pushdown Automata (PDA): Interactive LIFO stack animator showing push and pop transitions.</a:t>
-            </a:r>
-          </a:p>
-          <a:p>
-            <a:pPr>
-              <a:spcBef>
-                <a:spcPts val="800"/>
-              </a:spcBef>
-              <a:defRPr sz="1100">
-                <a:solidFill>
-                  <a:srgbClr val="CBD5E1"/>
-                </a:solidFill>
-                <a:latin typeface="Calibri"/>
-              </a:defRPr>
-            </a:pPr>
-            <a:r>
-              <a:t>• Acceptance Criteria: Visualize acceptance by Final State vs Empty Stack.</a:t>
-            </a:r>
-          </a:p>
-          <a:p>
-            <a:pPr>
-              <a:spcBef>
-                <a:spcPts val="800"/>
-              </a:spcBef>
-              <a:defRPr sz="1100">
-                <a:solidFill>
-                  <a:srgbClr val="CBD5E1"/>
-                </a:solidFill>
-                <a:latin typeface="Calibri"/>
-              </a:defRPr>
-            </a:pPr>
-            <a:r>
-              <a:t>• Turing Machine Infinite Tape: Interactive 2-way tape with head movements (Left, Right, Stay).</a:t>
-            </a:r>
-          </a:p>
-          <a:p>
-            <a:pPr>
-              <a:spcBef>
-                <a:spcPts val="800"/>
-              </a:spcBef>
-              <a:defRPr sz="1100">
-                <a:solidFill>
-                  <a:srgbClr val="CBD5E1"/>
-                </a:solidFill>
-                <a:latin typeface="Calibri"/>
-              </a:defRPr>
-            </a:pPr>
-            <a:r>
-              <a:t>• Halting Problem Proofs: Visual explanations of computability limits and undecidable languages.</a:t>
+              <a:t>MODULE 7: PDA &amp; TURING MACHINES [PHASE 2]</a:t>
+            </a:r>
+          </a:p>
+          <a:p>
+            <a:pPr algn="l">
+              <a:spcBef>
+                <a:spcPts val="200"/>
+              </a:spcBef>
+              <a:defRPr sz="1050" b="1">
+                <a:solidFill>
+                  <a:srgbClr val="FCD34D"/>
+                </a:solidFill>
+                <a:latin typeface="Calibri"/>
+              </a:defRPr>
+            </a:pPr>
+            <a:r>
+              <a:t>Pushdown Automata, Stack Memory &amp; Infinite Tape</a:t>
+            </a:r>
+          </a:p>
+          <a:p>
+            <a:pPr algn="l">
+              <a:spcBef>
+                <a:spcPts val="1000"/>
+              </a:spcBef>
+              <a:spcAft>
+                <a:spcPts val="100"/>
+              </a:spcAft>
+            </a:pPr>
+            <a:r>
+              <a:rPr sz="1200" b="1">
+                <a:solidFill>
+                  <a:srgbClr val="E9D5FF"/>
+                </a:solidFill>
+                <a:latin typeface="Calibri"/>
+              </a:rPr>
+              <a:t>• Pushdown Automata (PDA): </a:t>
+            </a:r>
+            <a:r>
+              <a:rPr sz="1100">
+                <a:solidFill>
+                  <a:srgbClr val="CBD5E1"/>
+                </a:solidFill>
+                <a:latin typeface="Calibri"/>
+              </a:rPr>
+              <a:t>Interactive LIFO stack animator showing real-time push and pop transitions.</a:t>
+            </a:r>
+          </a:p>
+          <a:p>
+            <a:pPr algn="l">
+              <a:spcBef>
+                <a:spcPts val="1000"/>
+              </a:spcBef>
+              <a:spcAft>
+                <a:spcPts val="100"/>
+              </a:spcAft>
+            </a:pPr>
+            <a:r>
+              <a:rPr sz="1200" b="1">
+                <a:solidFill>
+                  <a:srgbClr val="E9D5FF"/>
+                </a:solidFill>
+                <a:latin typeface="Calibri"/>
+              </a:rPr>
+              <a:t>• Dual Acceptance Modes: </a:t>
+            </a:r>
+            <a:r>
+              <a:rPr sz="1100">
+                <a:solidFill>
+                  <a:srgbClr val="CBD5E1"/>
+                </a:solidFill>
+                <a:latin typeface="Calibri"/>
+              </a:rPr>
+              <a:t>Visualize acceptance by Final State vs Empty Stack criteria.</a:t>
+            </a:r>
+          </a:p>
+          <a:p>
+            <a:pPr algn="l">
+              <a:spcBef>
+                <a:spcPts val="1000"/>
+              </a:spcBef>
+              <a:spcAft>
+                <a:spcPts val="100"/>
+              </a:spcAft>
+            </a:pPr>
+            <a:r>
+              <a:rPr sz="1200" b="1">
+                <a:solidFill>
+                  <a:srgbClr val="E9D5FF"/>
+                </a:solidFill>
+                <a:latin typeface="Calibri"/>
+              </a:rPr>
+              <a:t>• Turing Machine Infinite Tape: </a:t>
+            </a:r>
+            <a:r>
+              <a:rPr sz="1100">
+                <a:solidFill>
+                  <a:srgbClr val="CBD5E1"/>
+                </a:solidFill>
+                <a:latin typeface="Calibri"/>
+              </a:rPr>
+              <a:t>Interactive 2-way tape with head movements (Left, Right, Stay).</a:t>
+            </a:r>
+          </a:p>
+          <a:p>
+            <a:pPr algn="l">
+              <a:spcBef>
+                <a:spcPts val="1000"/>
+              </a:spcBef>
+              <a:spcAft>
+                <a:spcPts val="100"/>
+              </a:spcAft>
+            </a:pPr>
+            <a:r>
+              <a:rPr sz="1200" b="1">
+                <a:solidFill>
+                  <a:srgbClr val="E9D5FF"/>
+                </a:solidFill>
+                <a:latin typeface="Calibri"/>
+              </a:rPr>
+              <a:t>• Multi-Tape Simulation: </a:t>
+            </a:r>
+            <a:r>
+              <a:rPr sz="1100">
+                <a:solidFill>
+                  <a:srgbClr val="CBD5E1"/>
+                </a:solidFill>
+                <a:latin typeface="Calibri"/>
+              </a:rPr>
+              <a:t>Visual execution of multi-tape Turing machines for complex computational problems.</a:t>
+            </a:r>
+          </a:p>
+          <a:p>
+            <a:pPr algn="l">
+              <a:spcBef>
+                <a:spcPts val="1000"/>
+              </a:spcBef>
+              <a:spcAft>
+                <a:spcPts val="100"/>
+              </a:spcAft>
+            </a:pPr>
+            <a:r>
+              <a:rPr sz="1200" b="1">
+                <a:solidFill>
+                  <a:srgbClr val="E9D5FF"/>
+                </a:solidFill>
+                <a:latin typeface="Calibri"/>
+              </a:rPr>
+              <a:t>• Halting Problem Proofs: </a:t>
+            </a:r>
+            <a:r>
+              <a:rPr sz="1100">
+                <a:solidFill>
+                  <a:srgbClr val="CBD5E1"/>
+                </a:solidFill>
+                <a:latin typeface="Calibri"/>
+              </a:rPr>
+              <a:t>Visual explanations of computability limits and undecidable languages.</a:t>
+            </a:r>
+          </a:p>
+          <a:p>
+            <a:pPr algn="l">
+              <a:spcBef>
+                <a:spcPts val="1400"/>
+              </a:spcBef>
+              <a:defRPr sz="1000" b="1">
+                <a:solidFill>
+                  <a:srgbClr val="E9D5FF"/>
+                </a:solidFill>
+                <a:latin typeface="Calibri"/>
+              </a:defRPr>
+            </a:pPr>
+            <a:r>
+              <a:t>Phase 2 Target: LIFO Stack Visualizer &amp; Turing Halting Proofs</a:t>
             </a:r>
           </a:p>
         </p:txBody>
@@ -4803,8 +5948,8 @@
         </p:nvSpPr>
         <p:spPr>
           <a:xfrm>
-            <a:off x="731520" y="365760"/>
-            <a:ext cx="10725912" cy="1005840"/>
+            <a:off x="731520" y="320040"/>
+            <a:ext cx="10725912" cy="274320"/>
           </a:xfrm>
           <a:prstGeom prst="rect">
             <a:avLst/>
@@ -4812,13 +5957,13 @@
           <a:noFill/>
         </p:spPr>
         <p:txBody>
-          <a:bodyPr wrap="square" lIns="0" tIns="0" rIns="0" bIns="0">
+          <a:bodyPr wrap="square" anchor="t" lIns="0" rIns="0" tIns="0" bIns="0">
             <a:spAutoFit/>
           </a:bodyPr>
           <a:lstStyle/>
           <a:p>
-            <a:pPr>
-              <a:defRPr sz="1100" b="1">
+            <a:pPr algn="l">
+              <a:defRPr sz="1000" b="1">
                 <a:solidFill>
                   <a:srgbClr val="EB3C3C"/>
                 </a:solidFill>
@@ -4829,11 +5974,31 @@
               <a:t>SUMMARY &amp; IMPACT</a:t>
             </a:r>
           </a:p>
-          <a:p>
-            <a:pPr>
-              <a:spcBef>
-                <a:spcPts val="300"/>
-              </a:spcBef>
+        </p:txBody>
+      </p:sp>
+      <p:sp>
+        <p:nvSpPr>
+          <p:cNvPr id="4" name="TextBox 3"/>
+          <p:cNvSpPr txBox="1"/>
+          <p:nvPr/>
+        </p:nvSpPr>
+        <p:spPr>
+          <a:xfrm>
+            <a:off x="731520" y="594360"/>
+            <a:ext cx="10725912" cy="594360"/>
+          </a:xfrm>
+          <a:prstGeom prst="rect">
+            <a:avLst/>
+          </a:prstGeom>
+          <a:noFill/>
+        </p:spPr>
+        <p:txBody>
+          <a:bodyPr wrap="square" anchor="t" lIns="0" rIns="0" tIns="0" bIns="0">
+            <a:spAutoFit/>
+          </a:bodyPr>
+          <a:lstStyle/>
+          <a:p>
+            <a:pPr algn="l">
               <a:defRPr sz="2200" b="1">
                 <a:solidFill>
                   <a:srgbClr val="FFFFFF"/>
@@ -4849,14 +6014,14 @@
       </p:sp>
       <p:sp>
         <p:nvSpPr>
-          <p:cNvPr id="4" name="Rectangle 3"/>
+          <p:cNvPr id="5" name="Rectangle 4"/>
           <p:cNvSpPr/>
           <p:nvPr/>
         </p:nvSpPr>
         <p:spPr>
           <a:xfrm>
-            <a:off x="731520" y="1353312"/>
-            <a:ext cx="10725912" cy="36576"/>
+            <a:off x="731520" y="1234440"/>
+            <a:ext cx="10725912" cy="32004"/>
           </a:xfrm>
           <a:prstGeom prst="rect">
             <a:avLst/>
@@ -4892,22 +6057,24 @@
       </p:sp>
       <p:sp>
         <p:nvSpPr>
-          <p:cNvPr id="5" name="Rounded Rectangle 4"/>
+          <p:cNvPr id="6" name="Rounded Rectangle 5"/>
           <p:cNvSpPr/>
           <p:nvPr/>
         </p:nvSpPr>
         <p:spPr>
           <a:xfrm>
-            <a:off x="731520" y="1645920"/>
-            <a:ext cx="10725912" cy="4663440"/>
+            <a:off x="731520" y="1508760"/>
+            <a:ext cx="10725912" cy="4892040"/>
           </a:xfrm>
           <a:prstGeom prst="roundRect">
-            <a:avLst/>
+            <a:avLst>
+              <a:gd name="adj" fmla="val 4000"/>
+            </a:avLst>
           </a:prstGeom>
           <a:solidFill>
             <a:srgbClr val="191E2A"/>
           </a:solidFill>
-          <a:ln w="19050">
+          <a:ln w="22225">
             <a:solidFill>
               <a:srgbClr val="10B981"/>
             </a:solidFill>
@@ -4928,10 +6095,10 @@
           </a:fontRef>
         </p:style>
         <p:txBody>
-          <a:bodyPr rtlCol="0" anchor="ctr" wrap="square" lIns="411480" rIns="411480" tIns="365760"/>
+          <a:bodyPr rtlCol="0" anchor="t" wrap="square" lIns="365760" rIns="365760" tIns="274320" bIns="228600"/>
           <a:lstStyle/>
           <a:p>
-            <a:pPr algn="ctr">
+            <a:pPr algn="l">
               <a:defRPr sz="1500" b="1">
                 <a:solidFill>
                   <a:srgbClr val="10B981"/>
@@ -4940,79 +6107,171 @@
               </a:defRPr>
             </a:pPr>
             <a:r>
-              <a:t>LOGICVERSE IMPACT SUMMARY</a:t>
-            </a:r>
-          </a:p>
-          <a:p>
-            <a:pPr>
-              <a:spcBef>
-                <a:spcPts val="1200"/>
-              </a:spcBef>
-              <a:defRPr sz="1200">
+              <a:t>LOGICVERSE IMPACT SUMMARY &amp; KEY TAKEAWAYS</a:t>
+            </a:r>
+          </a:p>
+          <a:p>
+            <a:pPr algn="l">
+              <a:spcBef>
+                <a:spcPts val="200"/>
+              </a:spcBef>
+              <a:defRPr sz="1100" b="1">
+                <a:solidFill>
+                  <a:srgbClr val="FCD34D"/>
+                </a:solidFill>
+                <a:latin typeface="Calibri"/>
+              </a:defRPr>
+            </a:pPr>
+            <a:r>
+              <a:t>Transforming Theoretical Computer Science Education</a:t>
+            </a:r>
+          </a:p>
+          <a:p>
+            <a:pPr algn="l">
+              <a:spcBef>
+                <a:spcPts val="1100"/>
+              </a:spcBef>
+              <a:spcAft>
+                <a:spcPts val="200"/>
+              </a:spcAft>
+            </a:pPr>
+            <a:r>
+              <a:rPr sz="1200" b="1">
                 <a:solidFill>
                   <a:srgbClr val="FFFFFF"/>
                 </a:solidFill>
                 <a:latin typeface="Calibri"/>
-              </a:defRPr>
-            </a:pPr>
-            <a:r>
-              <a:t>✓  Replaces Static Textbooks with Interactive Simulation: Students learn math by building graphs, testing strings, and watching state transitions live.</a:t>
-            </a:r>
-          </a:p>
-          <a:p>
-            <a:pPr>
-              <a:spcBef>
-                <a:spcPts val="1200"/>
-              </a:spcBef>
-              <a:defRPr sz="1200">
+              </a:rPr>
+              <a:t>✓  Interactive Learning Paradigm: </a:t>
+            </a:r>
+            <a:r>
+              <a:rPr sz="1150">
+                <a:solidFill>
+                  <a:srgbClr val="CBD5E1"/>
+                </a:solidFill>
+                <a:latin typeface="Calibri"/>
+              </a:rPr>
+              <a:t>Replaces static equations and dry paper proofs with hands-on visual canvas simulation.</a:t>
+            </a:r>
+          </a:p>
+          <a:p>
+            <a:pPr algn="l">
+              <a:spcBef>
+                <a:spcPts val="1100"/>
+              </a:spcBef>
+              <a:spcAft>
+                <a:spcPts val="200"/>
+              </a:spcAft>
+            </a:pPr>
+            <a:r>
+              <a:rPr sz="1200" b="1">
                 <a:solidFill>
                   <a:srgbClr val="FFFFFF"/>
                 </a:solidFill>
                 <a:latin typeface="Calibri"/>
-              </a:defRPr>
-            </a:pPr>
-            <a:r>
-              <a:t>✓  5 Core Disciplines Fully Operational: Set Theory, Propositional Logic, Proof Solvers, Relations/Functions, and Finite Automata working with 51 passing automated tests.</a:t>
-            </a:r>
-          </a:p>
-          <a:p>
-            <a:pPr>
-              <a:spcBef>
-                <a:spcPts val="1200"/>
-              </a:spcBef>
-              <a:defRPr sz="1200">
+              </a:rPr>
+              <a:t>✓  5 Core Disciplines Fully Operational: </a:t>
+            </a:r>
+            <a:r>
+              <a:rPr sz="1150">
+                <a:solidFill>
+                  <a:srgbClr val="CBD5E1"/>
+                </a:solidFill>
+                <a:latin typeface="Calibri"/>
+              </a:rPr>
+              <a:t>Set Theory, Propositional Logic, Proof Solvers, Relations/Functions, and Finite Automata running with 51 passing automated tests.</a:t>
+            </a:r>
+          </a:p>
+          <a:p>
+            <a:pPr algn="l">
+              <a:spcBef>
+                <a:spcPts val="1100"/>
+              </a:spcBef>
+              <a:spcAft>
+                <a:spcPts val="200"/>
+              </a:spcAft>
+            </a:pPr>
+            <a:r>
+              <a:rPr sz="1200" b="1">
                 <a:solidFill>
                   <a:srgbClr val="FFFFFF"/>
                 </a:solidFill>
                 <a:latin typeface="Calibri"/>
-              </a:defRPr>
-            </a:pPr>
-            <a:r>
-              <a:t>✓  Real AI Context Integration: LogicAI is not a generic chatbot; it has direct visibility into canvas nodes and gives personalized pedagogical guidance.</a:t>
-            </a:r>
-          </a:p>
-          <a:p>
-            <a:pPr>
-              <a:spcBef>
-                <a:spcPts val="1200"/>
-              </a:spcBef>
-              <a:defRPr sz="1200">
+              </a:rPr>
+              <a:t>✓  Real AI Context Integration: </a:t>
+            </a:r>
+            <a:r>
+              <a:rPr sz="1150">
+                <a:solidFill>
+                  <a:srgbClr val="CBD5E1"/>
+                </a:solidFill>
+                <a:latin typeface="Calibri"/>
+              </a:rPr>
+              <a:t>LogicAI is not a generic chatbot; it has direct visibility into canvas nodes and gives personalized pedagogical guidance.</a:t>
+            </a:r>
+          </a:p>
+          <a:p>
+            <a:pPr algn="l">
+              <a:spcBef>
+                <a:spcPts val="1100"/>
+              </a:spcBef>
+              <a:spcAft>
+                <a:spcPts val="200"/>
+              </a:spcAft>
+            </a:pPr>
+            <a:r>
+              <a:rPr sz="1200" b="1">
                 <a:solidFill>
                   <a:srgbClr val="FFFFFF"/>
                 </a:solidFill>
                 <a:latin typeface="Calibri"/>
-              </a:defRPr>
-            </a:pPr>
-            <a:r>
-              <a:t>✓  Production Quality Engineering: Built on Next.js 16, React Flow, TypeScript, and Tailwind CSS with instant load times and zero compilation errors.</a:t>
-            </a:r>
-          </a:p>
-          <a:p>
-            <a:pPr>
-              <a:spcBef>
-                <a:spcPts val="2000"/>
-              </a:spcBef>
-              <a:defRPr sz="1300" b="1">
+              </a:rPr>
+              <a:t>✓  Production-Grade Engineering: </a:t>
+            </a:r>
+            <a:r>
+              <a:rPr sz="1150">
+                <a:solidFill>
+                  <a:srgbClr val="CBD5E1"/>
+                </a:solidFill>
+                <a:latin typeface="Calibri"/>
+              </a:rPr>
+              <a:t>Built on Next.js 16, React Flow, TypeScript, and Zustand with instant load times and zero compilation errors.</a:t>
+            </a:r>
+          </a:p>
+          <a:p>
+            <a:pPr algn="l">
+              <a:spcBef>
+                <a:spcPts val="1100"/>
+              </a:spcBef>
+              <a:spcAft>
+                <a:spcPts val="200"/>
+              </a:spcAft>
+            </a:pPr>
+            <a:r>
+              <a:rPr sz="1200" b="1">
+                <a:solidFill>
+                  <a:srgbClr val="FFFFFF"/>
+                </a:solidFill>
+                <a:latin typeface="Calibri"/>
+              </a:rPr>
+              <a:t>✓  Extensible Architecture Ready for Phase 2: </a:t>
+            </a:r>
+            <a:r>
+              <a:rPr sz="1150">
+                <a:solidFill>
+                  <a:srgbClr val="CBD5E1"/>
+                </a:solidFill>
+                <a:latin typeface="Calibri"/>
+              </a:rPr>
+              <a:t>Modular design enables seamless plug-and-play addition of Context-Free Grammars and Turing Machines.</a:t>
+            </a:r>
+          </a:p>
+          <a:p>
+            <a:pPr algn="l">
+              <a:spcBef>
+                <a:spcPts val="1800"/>
+              </a:spcBef>
+              <a:defRPr sz="1350" b="1">
                 <a:solidFill>
                   <a:srgbClr val="FCD34D"/>
                 </a:solidFill>
@@ -5021,6 +6280,22 @@
             </a:pPr>
             <a:r>
               <a:t>Thank You! • Open for Live Demonstration &amp; Questions</a:t>
+            </a:r>
+          </a:p>
+          <a:p>
+            <a:pPr algn="l">
+              <a:spcBef>
+                <a:spcPts val="400"/>
+              </a:spcBef>
+              <a:defRPr sz="1100">
+                <a:solidFill>
+                  <a:srgbClr val="BAE6FD"/>
+                </a:solidFill>
+                <a:latin typeface="Calibri"/>
+              </a:defRPr>
+            </a:pPr>
+            <a:r>
+              <a:t>GitHub Repository: https://github.com/akash20065ray-sys/Logic_verse</a:t>
             </a:r>
           </a:p>
         </p:txBody>
@@ -5094,8 +6369,8 @@
         </p:nvSpPr>
         <p:spPr>
           <a:xfrm>
-            <a:off x="731520" y="365760"/>
-            <a:ext cx="10725912" cy="1005840"/>
+            <a:off x="731520" y="320040"/>
+            <a:ext cx="10725912" cy="274320"/>
           </a:xfrm>
           <a:prstGeom prst="rect">
             <a:avLst/>
@@ -5103,13 +6378,13 @@
           <a:noFill/>
         </p:spPr>
         <p:txBody>
-          <a:bodyPr wrap="square" lIns="0" tIns="0" rIns="0" bIns="0">
+          <a:bodyPr wrap="square" anchor="t" lIns="0" rIns="0" tIns="0" bIns="0">
             <a:spAutoFit/>
           </a:bodyPr>
           <a:lstStyle/>
           <a:p>
-            <a:pPr>
-              <a:defRPr sz="1100" b="1">
+            <a:pPr algn="l">
+              <a:defRPr sz="1000" b="1">
                 <a:solidFill>
                   <a:srgbClr val="EB3C3C"/>
                 </a:solidFill>
@@ -5117,14 +6392,34 @@
               </a:defRPr>
             </a:pPr>
             <a:r>
-              <a:t>WHY WE BUILT LOGICVERSE</a:t>
-            </a:r>
-          </a:p>
-          <a:p>
-            <a:pPr>
-              <a:spcBef>
-                <a:spcPts val="300"/>
-              </a:spcBef>
+              <a:t>PROBLEM STATEMENT &amp; SOLUTION</a:t>
+            </a:r>
+          </a:p>
+        </p:txBody>
+      </p:sp>
+      <p:sp>
+        <p:nvSpPr>
+          <p:cNvPr id="4" name="TextBox 3"/>
+          <p:cNvSpPr txBox="1"/>
+          <p:nvPr/>
+        </p:nvSpPr>
+        <p:spPr>
+          <a:xfrm>
+            <a:off x="731520" y="594360"/>
+            <a:ext cx="10725912" cy="594360"/>
+          </a:xfrm>
+          <a:prstGeom prst="rect">
+            <a:avLst/>
+          </a:prstGeom>
+          <a:noFill/>
+        </p:spPr>
+        <p:txBody>
+          <a:bodyPr wrap="square" anchor="t" lIns="0" rIns="0" tIns="0" bIns="0">
+            <a:spAutoFit/>
+          </a:bodyPr>
+          <a:lstStyle/>
+          <a:p>
+            <a:pPr algn="l">
               <a:defRPr sz="2200" b="1">
                 <a:solidFill>
                   <a:srgbClr val="FFFFFF"/>
@@ -5140,14 +6435,14 @@
       </p:sp>
       <p:sp>
         <p:nvSpPr>
-          <p:cNvPr id="4" name="Rectangle 3"/>
+          <p:cNvPr id="5" name="Rectangle 4"/>
           <p:cNvSpPr/>
           <p:nvPr/>
         </p:nvSpPr>
         <p:spPr>
           <a:xfrm>
-            <a:off x="731520" y="1353312"/>
-            <a:ext cx="10725912" cy="36576"/>
+            <a:off x="731520" y="1234440"/>
+            <a:ext cx="10725912" cy="32004"/>
           </a:xfrm>
           <a:prstGeom prst="rect">
             <a:avLst/>
@@ -5183,22 +6478,24 @@
       </p:sp>
       <p:sp>
         <p:nvSpPr>
-          <p:cNvPr id="5" name="Rounded Rectangle 4"/>
+          <p:cNvPr id="6" name="Rounded Rectangle 5"/>
           <p:cNvSpPr/>
           <p:nvPr/>
         </p:nvSpPr>
         <p:spPr>
           <a:xfrm>
-            <a:off x="731520" y="1645920"/>
-            <a:ext cx="5212080" cy="4663440"/>
+            <a:off x="731520" y="1508760"/>
+            <a:ext cx="5212080" cy="4892040"/>
           </a:xfrm>
           <a:prstGeom prst="roundRect">
-            <a:avLst/>
+            <a:avLst>
+              <a:gd name="adj" fmla="val 4000"/>
+            </a:avLst>
           </a:prstGeom>
           <a:solidFill>
             <a:srgbClr val="191E2A"/>
           </a:solidFill>
-          <a:ln w="19050">
+          <a:ln w="22225">
             <a:solidFill>
               <a:srgbClr val="EB3C3C"/>
             </a:solidFill>
@@ -5219,11 +6516,11 @@
           </a:fontRef>
         </p:style>
         <p:txBody>
-          <a:bodyPr rtlCol="0" anchor="ctr" wrap="square" lIns="320040" rIns="320040" tIns="274320"/>
+          <a:bodyPr rtlCol="0" anchor="t" wrap="square" lIns="256032" rIns="256032" tIns="228600" bIns="182880"/>
           <a:lstStyle/>
           <a:p>
-            <a:pPr algn="ctr">
-              <a:defRPr sz="1300" b="1">
+            <a:pPr algn="l">
+              <a:defRPr sz="1400" b="1">
                 <a:solidFill>
                   <a:srgbClr val="EB3C3C"/>
                 </a:solidFill>
@@ -5231,93 +6528,203 @@
               </a:defRPr>
             </a:pPr>
             <a:r>
-              <a:t>THE PROBLEM: ABSTRACT &amp; HARD TO SEE</a:t>
-            </a:r>
-          </a:p>
-          <a:p>
-            <a:pPr>
-              <a:spcBef>
-                <a:spcPts val="800"/>
-              </a:spcBef>
-              <a:defRPr sz="1100">
-                <a:solidFill>
-                  <a:srgbClr val="CBD5E1"/>
-                </a:solidFill>
-                <a:latin typeface="Calibri"/>
-              </a:defRPr>
-            </a:pPr>
-            <a:r>
-              <a:t>• Static Textbooks: Students only read formulas on paper with no way to interact or test variations.</a:t>
-            </a:r>
-          </a:p>
-          <a:p>
-            <a:pPr>
-              <a:spcBef>
-                <a:spcPts val="800"/>
-              </a:spcBef>
-              <a:defRPr sz="1100">
-                <a:solidFill>
-                  <a:srgbClr val="CBD5E1"/>
-                </a:solidFill>
-                <a:latin typeface="Calibri"/>
-              </a:defRPr>
-            </a:pPr>
-            <a:r>
-              <a:t>• Invisible State Changes: Tracing automata transitions (q0 -&gt; q1) or Warshall's algorithm by hand causes mistakes.</a:t>
-            </a:r>
-          </a:p>
-          <a:p>
-            <a:pPr>
-              <a:spcBef>
-                <a:spcPts val="800"/>
-              </a:spcBef>
-              <a:defRPr sz="1100">
-                <a:solidFill>
-                  <a:srgbClr val="CBD5E1"/>
-                </a:solidFill>
-                <a:latin typeface="Calibri"/>
-              </a:defRPr>
-            </a:pPr>
-            <a:r>
-              <a:t>• No Step-by-Step Feedback: When students get an answer wrong, textbook solutions do not explain the exact step where things went wrong.</a:t>
-            </a:r>
-          </a:p>
-          <a:p>
-            <a:pPr>
-              <a:spcBef>
-                <a:spcPts val="800"/>
-              </a:spcBef>
-              <a:defRPr sz="1100">
-                <a:solidFill>
-                  <a:srgbClr val="CBD5E1"/>
-                </a:solidFill>
-                <a:latin typeface="Calibri"/>
-              </a:defRPr>
-            </a:pPr>
-            <a:r>
-              <a:t>• Fragmented Tools: Venn diagrams, truth tables, and state machines are taught in separate, disconnected apps.</a:t>
-            </a:r>
-          </a:p>
-        </p:txBody>
-      </p:sp>
-      <p:sp>
-        <p:nvSpPr>
-          <p:cNvPr id="6" name="Rounded Rectangle 5"/>
+              <a:t>THE PROBLEM: INVISIBLE &amp; ABSTRACT THEORY</a:t>
+            </a:r>
+          </a:p>
+          <a:p>
+            <a:pPr algn="l">
+              <a:spcBef>
+                <a:spcPts val="200"/>
+              </a:spcBef>
+              <a:defRPr sz="1050" b="1">
+                <a:solidFill>
+                  <a:srgbClr val="FCD34D"/>
+                </a:solidFill>
+                <a:latin typeface="Calibri"/>
+              </a:defRPr>
+            </a:pPr>
+            <a:r>
+              <a:t>Traditional Textbook Pedagogical Limitations</a:t>
+            </a:r>
+          </a:p>
+          <a:p>
+            <a:pPr algn="l">
+              <a:spcBef>
+                <a:spcPts val="1000"/>
+              </a:spcBef>
+              <a:spcAft>
+                <a:spcPts val="100"/>
+              </a:spcAft>
+            </a:pPr>
+            <a:r>
+              <a:rPr sz="1200" b="1">
+                <a:solidFill>
+                  <a:srgbClr val="FECACA"/>
+                </a:solidFill>
+                <a:latin typeface="Calibri"/>
+              </a:rPr>
+              <a:t>• Static Equations: </a:t>
+            </a:r>
+            <a:r>
+              <a:rPr sz="1100">
+                <a:solidFill>
+                  <a:srgbClr val="CBD5E1"/>
+                </a:solidFill>
+                <a:latin typeface="Calibri"/>
+              </a:rPr>
+              <a:t>Students only read static formulas on paper with no interactive way to test variations.</a:t>
+            </a:r>
+          </a:p>
+          <a:p>
+            <a:pPr algn="l">
+              <a:spcBef>
+                <a:spcPts val="1000"/>
+              </a:spcBef>
+              <a:spcAft>
+                <a:spcPts val="100"/>
+              </a:spcAft>
+            </a:pPr>
+            <a:r>
+              <a:rPr sz="1200" b="1">
+                <a:solidFill>
+                  <a:srgbClr val="FECACA"/>
+                </a:solidFill>
+                <a:latin typeface="Calibri"/>
+              </a:rPr>
+              <a:t>• Invisible State Changes: </a:t>
+            </a:r>
+            <a:r>
+              <a:rPr sz="1100">
+                <a:solidFill>
+                  <a:srgbClr val="CBD5E1"/>
+                </a:solidFill>
+                <a:latin typeface="Calibri"/>
+              </a:rPr>
+              <a:t>Tracing automata transitions (q0 -&gt; q1) or matrix closures by hand leads to frequent mistakes.</a:t>
+            </a:r>
+          </a:p>
+          <a:p>
+            <a:pPr algn="l">
+              <a:spcBef>
+                <a:spcPts val="1000"/>
+              </a:spcBef>
+              <a:spcAft>
+                <a:spcPts val="100"/>
+              </a:spcAft>
+            </a:pPr>
+            <a:r>
+              <a:rPr sz="1200" b="1">
+                <a:solidFill>
+                  <a:srgbClr val="FECACA"/>
+                </a:solidFill>
+                <a:latin typeface="Calibri"/>
+              </a:rPr>
+              <a:t>• No Step-by-Step Guidance: </a:t>
+            </a:r>
+            <a:r>
+              <a:rPr sz="1100">
+                <a:solidFill>
+                  <a:srgbClr val="CBD5E1"/>
+                </a:solidFill>
+                <a:latin typeface="Calibri"/>
+              </a:rPr>
+              <a:t>Textbooks provide final answers without explaining the intermediate logical deductions.</a:t>
+            </a:r>
+          </a:p>
+          <a:p>
+            <a:pPr algn="l">
+              <a:spcBef>
+                <a:spcPts val="1000"/>
+              </a:spcBef>
+              <a:spcAft>
+                <a:spcPts val="100"/>
+              </a:spcAft>
+            </a:pPr>
+            <a:r>
+              <a:rPr sz="1200" b="1">
+                <a:solidFill>
+                  <a:srgbClr val="FECACA"/>
+                </a:solidFill>
+                <a:latin typeface="Calibri"/>
+              </a:rPr>
+              <a:t>• Disconnected Tools: </a:t>
+            </a:r>
+            <a:r>
+              <a:rPr sz="1100">
+                <a:solidFill>
+                  <a:srgbClr val="CBD5E1"/>
+                </a:solidFill>
+                <a:latin typeface="Calibri"/>
+              </a:rPr>
+              <a:t>Venn diagrams, truth tables, and state diagrams are taught in fragmented, single-purpose apps.</a:t>
+            </a:r>
+          </a:p>
+          <a:p>
+            <a:pPr algn="l">
+              <a:spcBef>
+                <a:spcPts val="1000"/>
+              </a:spcBef>
+              <a:spcAft>
+                <a:spcPts val="100"/>
+              </a:spcAft>
+            </a:pPr>
+            <a:r>
+              <a:rPr sz="1200" b="1">
+                <a:solidFill>
+                  <a:srgbClr val="FECACA"/>
+                </a:solidFill>
+                <a:latin typeface="Calibri"/>
+              </a:rPr>
+              <a:t>• High Cognitive Barrier: </a:t>
+            </a:r>
+            <a:r>
+              <a:rPr sz="1100">
+                <a:solidFill>
+                  <a:srgbClr val="CBD5E1"/>
+                </a:solidFill>
+                <a:latin typeface="Calibri"/>
+              </a:rPr>
+              <a:t>Abstract mathematical formalism discourages beginners and makes debugging proofs difficult.</a:t>
+            </a:r>
+          </a:p>
+          <a:p>
+            <a:pPr algn="l">
+              <a:spcBef>
+                <a:spcPts val="1400"/>
+              </a:spcBef>
+              <a:defRPr sz="1000" b="1">
+                <a:solidFill>
+                  <a:srgbClr val="FECACA"/>
+                </a:solidFill>
+                <a:latin typeface="Calibri"/>
+              </a:defRPr>
+            </a:pPr>
+            <a:r>
+              <a:t>Impact: Causes high confusion, lost marks, and cognitive fatigue.</a:t>
+            </a:r>
+          </a:p>
+        </p:txBody>
+      </p:sp>
+      <p:sp>
+        <p:nvSpPr>
+          <p:cNvPr id="7" name="Rounded Rectangle 6"/>
           <p:cNvSpPr/>
           <p:nvPr/>
         </p:nvSpPr>
         <p:spPr>
           <a:xfrm>
-            <a:off x="6217920" y="1645920"/>
-            <a:ext cx="5212080" cy="4663440"/>
+            <a:off x="6245352" y="1508760"/>
+            <a:ext cx="5212080" cy="4892040"/>
           </a:xfrm>
           <a:prstGeom prst="roundRect">
-            <a:avLst/>
+            <a:avLst>
+              <a:gd name="adj" fmla="val 4000"/>
+            </a:avLst>
           </a:prstGeom>
           <a:solidFill>
             <a:srgbClr val="191E2A"/>
           </a:solidFill>
-          <a:ln w="19050">
+          <a:ln w="22225">
             <a:solidFill>
               <a:srgbClr val="38BDF8"/>
             </a:solidFill>
@@ -5338,11 +6745,11 @@
           </a:fontRef>
         </p:style>
         <p:txBody>
-          <a:bodyPr rtlCol="0" anchor="ctr" wrap="square" lIns="320040" rIns="320040" tIns="274320"/>
+          <a:bodyPr rtlCol="0" anchor="t" wrap="square" lIns="256032" rIns="256032" tIns="228600" bIns="182880"/>
           <a:lstStyle/>
           <a:p>
-            <a:pPr algn="ctr">
-              <a:defRPr sz="1300" b="1">
+            <a:pPr algn="l">
+              <a:defRPr sz="1400" b="1">
                 <a:solidFill>
                   <a:srgbClr val="38BDF8"/>
                 </a:solidFill>
@@ -5350,71 +6757,179 @@
               </a:defRPr>
             </a:pPr>
             <a:r>
-              <a:t>OUR SOLUTION: LOGICVERSE VISUAL IDE</a:t>
-            </a:r>
-          </a:p>
-          <a:p>
-            <a:pPr>
-              <a:spcBef>
-                <a:spcPts val="800"/>
-              </a:spcBef>
-              <a:defRPr sz="1100">
-                <a:solidFill>
-                  <a:srgbClr val="FFFFFF"/>
-                </a:solidFill>
-                <a:latin typeface="Calibri"/>
-              </a:defRPr>
-            </a:pPr>
-            <a:r>
-              <a:t>• Drag-and-Drop Canvas: Students build mathematical sets, logic gates, and state machines like building blocks.</a:t>
-            </a:r>
-          </a:p>
-          <a:p>
-            <a:pPr>
-              <a:spcBef>
-                <a:spcPts val="800"/>
-              </a:spcBef>
-              <a:defRPr sz="1100">
-                <a:solidFill>
-                  <a:srgbClr val="FFFFFF"/>
-                </a:solidFill>
-                <a:latin typeface="Calibri"/>
-              </a:defRPr>
-            </a:pPr>
-            <a:r>
-              <a:t>• Live Glowing Simulation: Watch states and arrows light up step-by-step as test strings are processed in real time.</a:t>
-            </a:r>
-          </a:p>
-          <a:p>
-            <a:pPr>
-              <a:spcBef>
-                <a:spcPts val="800"/>
-              </a:spcBef>
-              <a:defRPr sz="1100">
-                <a:solidFill>
-                  <a:srgbClr val="FFFFFF"/>
-                </a:solidFill>
-                <a:latin typeface="Calibri"/>
-              </a:defRPr>
-            </a:pPr>
-            <a:r>
-              <a:t>• Instant Formal Math: Every visual graph automatically outputs Venn diagrams, truth tables, and formal LaTeX notation.</a:t>
-            </a:r>
-          </a:p>
-          <a:p>
-            <a:pPr>
-              <a:spcBef>
-                <a:spcPts val="800"/>
-              </a:spcBef>
-              <a:defRPr sz="1100">
-                <a:solidFill>
-                  <a:srgbClr val="FFFFFF"/>
-                </a:solidFill>
-                <a:latin typeface="Calibri"/>
-              </a:defRPr>
-            </a:pPr>
-            <a:r>
-              <a:t>• Built-in LogicAI Tutor: An AI tutor that can see your canvas, explain your steps, and answer any discrete math question.</a:t>
+              <a:t>OUR SOLUTION: THE LOGICVERSE VISUAL IDE</a:t>
+            </a:r>
+          </a:p>
+          <a:p>
+            <a:pPr algn="l">
+              <a:spcBef>
+                <a:spcPts val="200"/>
+              </a:spcBef>
+              <a:defRPr sz="1050" b="1">
+                <a:solidFill>
+                  <a:srgbClr val="FCD34D"/>
+                </a:solidFill>
+                <a:latin typeface="Calibri"/>
+              </a:defRPr>
+            </a:pPr>
+            <a:r>
+              <a:t>Unified Interactive Computer Science Laboratory</a:t>
+            </a:r>
+          </a:p>
+          <a:p>
+            <a:pPr algn="l">
+              <a:spcBef>
+                <a:spcPts val="1000"/>
+              </a:spcBef>
+              <a:spcAft>
+                <a:spcPts val="100"/>
+              </a:spcAft>
+            </a:pPr>
+            <a:r>
+              <a:rPr sz="1200" b="1">
+                <a:solidFill>
+                  <a:srgbClr val="BAE6FD"/>
+                </a:solidFill>
+                <a:latin typeface="Calibri"/>
+              </a:rPr>
+              <a:t>• Visual Graph Canvas: </a:t>
+            </a:r>
+            <a:r>
+              <a:rPr sz="1100">
+                <a:solidFill>
+                  <a:srgbClr val="CBD5E1"/>
+                </a:solidFill>
+                <a:latin typeface="Calibri"/>
+              </a:rPr>
+              <a:t>Build mathematical sets, logic gates, and state machines like modular building blocks.</a:t>
+            </a:r>
+          </a:p>
+          <a:p>
+            <a:pPr algn="l">
+              <a:spcBef>
+                <a:spcPts val="1000"/>
+              </a:spcBef>
+              <a:spcAft>
+                <a:spcPts val="100"/>
+              </a:spcAft>
+            </a:pPr>
+            <a:r>
+              <a:rPr sz="1200" b="1">
+                <a:solidFill>
+                  <a:srgbClr val="BAE6FD"/>
+                </a:solidFill>
+                <a:latin typeface="Calibri"/>
+              </a:rPr>
+              <a:t>• Live Glowing Simulation: </a:t>
+            </a:r>
+            <a:r>
+              <a:rPr sz="1100">
+                <a:solidFill>
+                  <a:srgbClr val="CBD5E1"/>
+                </a:solidFill>
+                <a:latin typeface="Calibri"/>
+              </a:rPr>
+              <a:t>Watch states and arrows light up step-by-step in real time as test strings are processed.</a:t>
+            </a:r>
+          </a:p>
+          <a:p>
+            <a:pPr algn="l">
+              <a:spcBef>
+                <a:spcPts val="1000"/>
+              </a:spcBef>
+              <a:spcAft>
+                <a:spcPts val="100"/>
+              </a:spcAft>
+            </a:pPr>
+            <a:r>
+              <a:rPr sz="1200" b="1">
+                <a:solidFill>
+                  <a:srgbClr val="BAE6FD"/>
+                </a:solidFill>
+                <a:latin typeface="Calibri"/>
+              </a:rPr>
+              <a:t>• Instant Formal Math: </a:t>
+            </a:r>
+            <a:r>
+              <a:rPr sz="1100">
+                <a:solidFill>
+                  <a:srgbClr val="CBD5E1"/>
+                </a:solidFill>
+                <a:latin typeface="Calibri"/>
+              </a:rPr>
+              <a:t>Every visual graph automatically outputs Venn diagrams, truth tables, and LaTeX equations.</a:t>
+            </a:r>
+          </a:p>
+          <a:p>
+            <a:pPr algn="l">
+              <a:spcBef>
+                <a:spcPts val="1000"/>
+              </a:spcBef>
+              <a:spcAft>
+                <a:spcPts val="100"/>
+              </a:spcAft>
+            </a:pPr>
+            <a:r>
+              <a:rPr sz="1200" b="1">
+                <a:solidFill>
+                  <a:srgbClr val="BAE6FD"/>
+                </a:solidFill>
+                <a:latin typeface="Calibri"/>
+              </a:rPr>
+              <a:t>• Context-Aware LogicAI: </a:t>
+            </a:r>
+            <a:r>
+              <a:rPr sz="1100">
+                <a:solidFill>
+                  <a:srgbClr val="CBD5E1"/>
+                </a:solidFill>
+                <a:latin typeface="Calibri"/>
+              </a:rPr>
+              <a:t>An embedded AI tutor that sees your canvas, explains each step, and diagnoses mistakes.</a:t>
+            </a:r>
+          </a:p>
+          <a:p>
+            <a:pPr algn="l">
+              <a:spcBef>
+                <a:spcPts val="1000"/>
+              </a:spcBef>
+              <a:spcAft>
+                <a:spcPts val="100"/>
+              </a:spcAft>
+            </a:pPr>
+            <a:r>
+              <a:rPr sz="1200" b="1">
+                <a:solidFill>
+                  <a:srgbClr val="BAE6FD"/>
+                </a:solidFill>
+                <a:latin typeface="Calibri"/>
+              </a:rPr>
+              <a:t>• Automated Test Suites: </a:t>
+            </a:r>
+            <a:r>
+              <a:rPr sz="1100">
+                <a:solidFill>
+                  <a:srgbClr val="CBD5E1"/>
+                </a:solidFill>
+                <a:latin typeface="Calibri"/>
+              </a:rPr>
+              <a:t>Run multiple test cases with green accepted and red rejected tags plus step counter logs.</a:t>
+            </a:r>
+          </a:p>
+          <a:p>
+            <a:pPr algn="l">
+              <a:spcBef>
+                <a:spcPts val="1400"/>
+              </a:spcBef>
+              <a:defRPr sz="1000" b="1">
+                <a:solidFill>
+                  <a:srgbClr val="BAE6FD"/>
+                </a:solidFill>
+                <a:latin typeface="Calibri"/>
+              </a:defRPr>
+            </a:pPr>
+            <a:r>
+              <a:t>Outcome: 100% interactive, visual, and beginner-friendly learning.</a:t>
             </a:r>
           </a:p>
         </p:txBody>
@@ -5488,8 +7003,8 @@
         </p:nvSpPr>
         <p:spPr>
           <a:xfrm>
-            <a:off x="731520" y="365760"/>
-            <a:ext cx="10725912" cy="1005840"/>
+            <a:off x="731520" y="320040"/>
+            <a:ext cx="10725912" cy="274320"/>
           </a:xfrm>
           <a:prstGeom prst="rect">
             <a:avLst/>
@@ -5497,13 +7012,13 @@
           <a:noFill/>
         </p:spPr>
         <p:txBody>
-          <a:bodyPr wrap="square" lIns="0" tIns="0" rIns="0" bIns="0">
+          <a:bodyPr wrap="square" anchor="t" lIns="0" rIns="0" tIns="0" bIns="0">
             <a:spAutoFit/>
           </a:bodyPr>
           <a:lstStyle/>
           <a:p>
-            <a:pPr>
-              <a:defRPr sz="1100" b="1">
+            <a:pPr algn="l">
+              <a:defRPr sz="1000" b="1">
                 <a:solidFill>
                   <a:srgbClr val="EB3C3C"/>
                 </a:solidFill>
@@ -5511,14 +7026,34 @@
               </a:defRPr>
             </a:pPr>
             <a:r>
-              <a:t>HOW LOGICVERSE WORKS</a:t>
-            </a:r>
-          </a:p>
-          <a:p>
-            <a:pPr>
-              <a:spcBef>
-                <a:spcPts val="300"/>
-              </a:spcBef>
+              <a:t>SYSTEM ARCHITECTURE</a:t>
+            </a:r>
+          </a:p>
+        </p:txBody>
+      </p:sp>
+      <p:sp>
+        <p:nvSpPr>
+          <p:cNvPr id="4" name="TextBox 3"/>
+          <p:cNvSpPr txBox="1"/>
+          <p:nvPr/>
+        </p:nvSpPr>
+        <p:spPr>
+          <a:xfrm>
+            <a:off x="731520" y="594360"/>
+            <a:ext cx="10725912" cy="594360"/>
+          </a:xfrm>
+          <a:prstGeom prst="rect">
+            <a:avLst/>
+          </a:prstGeom>
+          <a:noFill/>
+        </p:spPr>
+        <p:txBody>
+          <a:bodyPr wrap="square" anchor="t" lIns="0" rIns="0" tIns="0" bIns="0">
+            <a:spAutoFit/>
+          </a:bodyPr>
+          <a:lstStyle/>
+          <a:p>
+            <a:pPr algn="l">
               <a:defRPr sz="2200" b="1">
                 <a:solidFill>
                   <a:srgbClr val="FFFFFF"/>
@@ -5527,21 +7062,21 @@
               </a:defRPr>
             </a:pPr>
             <a:r>
-              <a:t>System Architecture: From Visual Canvas to Mathematical Solvers</a:t>
-            </a:r>
-          </a:p>
-        </p:txBody>
-      </p:sp>
-      <p:sp>
-        <p:nvSpPr>
-          <p:cNvPr id="4" name="Rectangle 3"/>
+              <a:t>System Architecture: End-to-End Mathematical Pipeline</a:t>
+            </a:r>
+          </a:p>
+        </p:txBody>
+      </p:sp>
+      <p:sp>
+        <p:nvSpPr>
+          <p:cNvPr id="5" name="Rectangle 4"/>
           <p:cNvSpPr/>
           <p:nvPr/>
         </p:nvSpPr>
         <p:spPr>
           <a:xfrm>
-            <a:off x="731520" y="1353312"/>
-            <a:ext cx="10725912" cy="36576"/>
+            <a:off x="731520" y="1234440"/>
+            <a:ext cx="10725912" cy="32004"/>
           </a:xfrm>
           <a:prstGeom prst="rect">
             <a:avLst/>
@@ -5577,22 +7112,24 @@
       </p:sp>
       <p:sp>
         <p:nvSpPr>
-          <p:cNvPr id="5" name="Rounded Rectangle 4"/>
+          <p:cNvPr id="6" name="Rounded Rectangle 5"/>
           <p:cNvSpPr/>
           <p:nvPr/>
         </p:nvSpPr>
         <p:spPr>
           <a:xfrm>
-            <a:off x="731520" y="1645920"/>
-            <a:ext cx="1993392" cy="4663440"/>
+            <a:off x="731520" y="1508760"/>
+            <a:ext cx="2011680" cy="4892040"/>
           </a:xfrm>
           <a:prstGeom prst="roundRect">
-            <a:avLst/>
+            <a:avLst>
+              <a:gd name="adj" fmla="val 4000"/>
+            </a:avLst>
           </a:prstGeom>
           <a:solidFill>
             <a:srgbClr val="191E2A"/>
           </a:solidFill>
-          <a:ln w="19050">
+          <a:ln w="22225">
             <a:solidFill>
               <a:srgbClr val="38BDF8"/>
             </a:solidFill>
@@ -5613,11 +7150,11 @@
           </a:fontRef>
         </p:style>
         <p:txBody>
-          <a:bodyPr rtlCol="0" anchor="ctr" wrap="square" lIns="164592" rIns="164592" tIns="228600"/>
+          <a:bodyPr rtlCol="0" anchor="t" wrap="square" lIns="146304" rIns="146304" tIns="182880" bIns="137160"/>
           <a:lstStyle/>
           <a:p>
-            <a:pPr algn="ctr">
-              <a:defRPr sz="1150" b="1">
+            <a:pPr algn="l">
+              <a:defRPr sz="950" b="1">
                 <a:solidFill>
                   <a:srgbClr val="38BDF8"/>
                 </a:solidFill>
@@ -5625,61 +7162,194 @@
               </a:defRPr>
             </a:pPr>
             <a:r>
-              <a:t>1. Visual Canvas Layer</a:t>
-            </a:r>
-          </a:p>
-          <a:p>
-            <a:pPr>
-              <a:spcBef>
-                <a:spcPts val="400"/>
+              <a:t>STAGE 01</a:t>
+            </a:r>
+          </a:p>
+          <a:p>
+            <a:pPr algn="l">
+              <a:spcBef>
+                <a:spcPts val="200"/>
+              </a:spcBef>
+              <a:defRPr sz="1250" b="1">
+                <a:solidFill>
+                  <a:srgbClr val="FFFFFF"/>
+                </a:solidFill>
+                <a:latin typeface="Arial"/>
+              </a:defRPr>
+            </a:pPr>
+            <a:r>
+              <a:t>Visual Canvas</a:t>
+            </a:r>
+          </a:p>
+          <a:p>
+            <a:pPr algn="l">
+              <a:spcBef>
+                <a:spcPts val="200"/>
               </a:spcBef>
               <a:defRPr sz="1000" b="1">
                 <a:solidFill>
+                  <a:srgbClr val="FCD34D"/>
+                </a:solidFill>
+                <a:latin typeface="Calibri"/>
+              </a:defRPr>
+            </a:pPr>
+            <a:r>
+              <a:t>React Flow DAG</a:t>
+            </a:r>
+          </a:p>
+          <a:p>
+            <a:pPr algn="l">
+              <a:spcBef>
+                <a:spcPts val="600"/>
+              </a:spcBef>
+              <a:defRPr sz="850">
+                <a:solidFill>
+                  <a:srgbClr val="BAE6FD"/>
+                </a:solidFill>
+                <a:latin typeface="Calibri"/>
+              </a:defRPr>
+            </a:pPr>
+            <a:r>
+              <a:t>In: User Mouse &amp; Drag</a:t>
+            </a:r>
+            <a:br/>
+            <a:r>
+              <a:t>Out: Visual Graph DAG</a:t>
+            </a:r>
+          </a:p>
+          <a:p>
+            <a:pPr algn="l">
+              <a:spcBef>
+                <a:spcPts val="600"/>
+              </a:spcBef>
+              <a:defRPr sz="850" b="1">
+                <a:solidFill>
+                  <a:srgbClr val="38BDF8"/>
+                </a:solidFill>
+                <a:latin typeface="Arial"/>
+              </a:defRPr>
+            </a:pPr>
+            <a:r>
+              <a:t>KEY CAPABILITIES</a:t>
+            </a:r>
+          </a:p>
+          <a:p>
+            <a:pPr algn="l">
+              <a:spcBef>
+                <a:spcPts val="500"/>
+              </a:spcBef>
+            </a:pPr>
+            <a:r>
+              <a:rPr sz="950" b="1">
+                <a:solidFill>
                   <a:srgbClr val="FFFFFF"/>
                 </a:solidFill>
-                <a:latin typeface="Arial"/>
-              </a:defRPr>
-            </a:pPr>
-            <a:r>
-              <a:t>React Flow DAG Engine</a:t>
-            </a:r>
-          </a:p>
-          <a:p>
-            <a:pPr>
+                <a:latin typeface="Calibri"/>
+              </a:rPr>
+              <a:t>• Custom SVG Nodes: </a:t>
+            </a:r>
+            <a:r>
+              <a:rPr sz="900">
+                <a:solidFill>
+                  <a:srgbClr val="CBD5E1"/>
+                </a:solidFill>
+                <a:latin typeface="Calibri"/>
+              </a:rPr>
+              <a:t>Circular states, double rings, and gate shapes.</a:t>
+            </a:r>
+          </a:p>
+          <a:p>
+            <a:pPr algn="l">
+              <a:spcBef>
+                <a:spcPts val="500"/>
+              </a:spcBef>
+            </a:pPr>
+            <a:r>
+              <a:rPr sz="950" b="1">
+                <a:solidFill>
+                  <a:srgbClr val="FFFFFF"/>
+                </a:solidFill>
+                <a:latin typeface="Calibri"/>
+              </a:rPr>
+              <a:t>• Animated Bezier Edges: </a:t>
+            </a:r>
+            <a:r>
+              <a:rPr sz="900">
+                <a:solidFill>
+                  <a:srgbClr val="CBD5E1"/>
+                </a:solidFill>
+                <a:latin typeface="Calibri"/>
+              </a:rPr>
+              <a:t>Curved transition arrows with symbol labels.</a:t>
+            </a:r>
+          </a:p>
+          <a:p>
+            <a:pPr algn="l">
+              <a:spcBef>
+                <a:spcPts val="500"/>
+              </a:spcBef>
+            </a:pPr>
+            <a:r>
+              <a:rPr sz="950" b="1">
+                <a:solidFill>
+                  <a:srgbClr val="FFFFFF"/>
+                </a:solidFill>
+                <a:latin typeface="Calibri"/>
+              </a:rPr>
+              <a:t>• Canvas Viewport: </a:t>
+            </a:r>
+            <a:r>
+              <a:rPr sz="900">
+                <a:solidFill>
+                  <a:srgbClr val="CBD5E1"/>
+                </a:solidFill>
+                <a:latin typeface="Calibri"/>
+              </a:rPr>
+              <a:t>Smooth panning, zooming, and snap-to-grid.</a:t>
+            </a:r>
+          </a:p>
+          <a:p>
+            <a:pPr algn="l">
               <a:spcBef>
                 <a:spcPts val="1000"/>
               </a:spcBef>
-              <a:defRPr sz="1050">
-                <a:solidFill>
-                  <a:srgbClr val="CBD5E1"/>
-                </a:solidFill>
-                <a:latin typeface="Calibri"/>
-              </a:defRPr>
-            </a:pPr>
-            <a:r>
-              <a:t>User drags states, sets, or logic gates and connects them with animated arrows on screen.</a:t>
-            </a:r>
-          </a:p>
-        </p:txBody>
-      </p:sp>
-      <p:sp>
-        <p:nvSpPr>
-          <p:cNvPr id="6" name="Rounded Rectangle 5"/>
+              <a:defRPr sz="850" b="1">
+                <a:solidFill>
+                  <a:srgbClr val="A7F3D0"/>
+                </a:solidFill>
+                <a:latin typeface="Calibri"/>
+              </a:defRPr>
+            </a:pPr>
+            <a:r>
+              <a:t>Tech: React Flow 11</a:t>
+            </a:r>
+            <a:br/>
+            <a:r>
+              <a:t>Status: ✓ 100% Operational</a:t>
+            </a:r>
+          </a:p>
+        </p:txBody>
+      </p:sp>
+      <p:sp>
+        <p:nvSpPr>
+          <p:cNvPr id="7" name="Rounded Rectangle 6"/>
           <p:cNvSpPr/>
           <p:nvPr/>
         </p:nvSpPr>
         <p:spPr>
           <a:xfrm>
-            <a:off x="2926080" y="1645920"/>
-            <a:ext cx="1993392" cy="4663440"/>
+            <a:off x="2910535" y="1508760"/>
+            <a:ext cx="2011680" cy="4892040"/>
           </a:xfrm>
           <a:prstGeom prst="roundRect">
-            <a:avLst/>
+            <a:avLst>
+              <a:gd name="adj" fmla="val 4000"/>
+            </a:avLst>
           </a:prstGeom>
           <a:solidFill>
             <a:srgbClr val="191E2A"/>
           </a:solidFill>
-          <a:ln w="19050">
+          <a:ln w="22225">
             <a:solidFill>
               <a:srgbClr val="F59E0B"/>
             </a:solidFill>
@@ -5700,11 +7370,11 @@
           </a:fontRef>
         </p:style>
         <p:txBody>
-          <a:bodyPr rtlCol="0" anchor="ctr" wrap="square" lIns="164592" rIns="164592" tIns="228600"/>
+          <a:bodyPr rtlCol="0" anchor="t" wrap="square" lIns="146304" rIns="146304" tIns="182880" bIns="137160"/>
           <a:lstStyle/>
           <a:p>
-            <a:pPr algn="ctr">
-              <a:defRPr sz="1150" b="1">
+            <a:pPr algn="l">
+              <a:defRPr sz="950" b="1">
                 <a:solidFill>
                   <a:srgbClr val="F59E0B"/>
                 </a:solidFill>
@@ -5712,61 +7382,194 @@
               </a:defRPr>
             </a:pPr>
             <a:r>
-              <a:t>2. Graph Parser &amp; Store</a:t>
-            </a:r>
-          </a:p>
-          <a:p>
-            <a:pPr>
-              <a:spcBef>
-                <a:spcPts val="400"/>
+              <a:t>STAGE 02</a:t>
+            </a:r>
+          </a:p>
+          <a:p>
+            <a:pPr algn="l">
+              <a:spcBef>
+                <a:spcPts val="200"/>
+              </a:spcBef>
+              <a:defRPr sz="1250" b="1">
+                <a:solidFill>
+                  <a:srgbClr val="FFFFFF"/>
+                </a:solidFill>
+                <a:latin typeface="Arial"/>
+              </a:defRPr>
+            </a:pPr>
+            <a:r>
+              <a:t>Graph Parser</a:t>
+            </a:r>
+          </a:p>
+          <a:p>
+            <a:pPr algn="l">
+              <a:spcBef>
+                <a:spcPts val="200"/>
               </a:spcBef>
               <a:defRPr sz="1000" b="1">
                 <a:solidFill>
+                  <a:srgbClr val="FCD34D"/>
+                </a:solidFill>
+                <a:latin typeface="Calibri"/>
+              </a:defRPr>
+            </a:pPr>
+            <a:r>
+              <a:t>Zustand Store</a:t>
+            </a:r>
+          </a:p>
+          <a:p>
+            <a:pPr algn="l">
+              <a:spcBef>
+                <a:spcPts val="600"/>
+              </a:spcBef>
+              <a:defRPr sz="850">
+                <a:solidFill>
+                  <a:srgbClr val="BAE6FD"/>
+                </a:solidFill>
+                <a:latin typeface="Calibri"/>
+              </a:defRPr>
+            </a:pPr>
+            <a:r>
+              <a:t>In: Canvas Nodes &amp; Edges</a:t>
+            </a:r>
+            <a:br/>
+            <a:r>
+              <a:t>Out: Mathematical AST</a:t>
+            </a:r>
+          </a:p>
+          <a:p>
+            <a:pPr algn="l">
+              <a:spcBef>
+                <a:spcPts val="600"/>
+              </a:spcBef>
+              <a:defRPr sz="850" b="1">
+                <a:solidFill>
+                  <a:srgbClr val="F59E0B"/>
+                </a:solidFill>
+                <a:latin typeface="Arial"/>
+              </a:defRPr>
+            </a:pPr>
+            <a:r>
+              <a:t>KEY CAPABILITIES</a:t>
+            </a:r>
+          </a:p>
+          <a:p>
+            <a:pPr algn="l">
+              <a:spcBef>
+                <a:spcPts val="500"/>
+              </a:spcBef>
+            </a:pPr>
+            <a:r>
+              <a:rPr sz="950" b="1">
+                <a:solidFill>
                   <a:srgbClr val="FFFFFF"/>
                 </a:solidFill>
-                <a:latin typeface="Arial"/>
-              </a:defRPr>
-            </a:pPr>
-            <a:r>
-              <a:t>Zustand State Manager</a:t>
-            </a:r>
-          </a:p>
-          <a:p>
-            <a:pPr>
+                <a:latin typeface="Calibri"/>
+              </a:rPr>
+              <a:t>• AST Generation: </a:t>
+            </a:r>
+            <a:r>
+              <a:rPr sz="900">
+                <a:solidFill>
+                  <a:srgbClr val="CBD5E1"/>
+                </a:solidFill>
+                <a:latin typeface="Calibri"/>
+              </a:rPr>
+              <a:t>Parses visual connections into formal models.</a:t>
+            </a:r>
+          </a:p>
+          <a:p>
+            <a:pPr algn="l">
+              <a:spcBef>
+                <a:spcPts val="500"/>
+              </a:spcBef>
+            </a:pPr>
+            <a:r>
+              <a:rPr sz="950" b="1">
+                <a:solidFill>
+                  <a:srgbClr val="FFFFFF"/>
+                </a:solidFill>
+                <a:latin typeface="Calibri"/>
+              </a:rPr>
+              <a:t>• State Isolation: </a:t>
+            </a:r>
+            <a:r>
+              <a:rPr sz="900">
+                <a:solidFill>
+                  <a:srgbClr val="CBD5E1"/>
+                </a:solidFill>
+                <a:latin typeface="Calibri"/>
+              </a:rPr>
+              <a:t>Zero re-render latency across dock panels.</a:t>
+            </a:r>
+          </a:p>
+          <a:p>
+            <a:pPr algn="l">
+              <a:spcBef>
+                <a:spcPts val="500"/>
+              </a:spcBef>
+            </a:pPr>
+            <a:r>
+              <a:rPr sz="950" b="1">
+                <a:solidFill>
+                  <a:srgbClr val="FFFFFF"/>
+                </a:solidFill>
+                <a:latin typeface="Calibri"/>
+              </a:rPr>
+              <a:t>• Schema Validation: </a:t>
+            </a:r>
+            <a:r>
+              <a:rPr sz="900">
+                <a:solidFill>
+                  <a:srgbClr val="CBD5E1"/>
+                </a:solidFill>
+                <a:latin typeface="Calibri"/>
+              </a:rPr>
+              <a:t>Strict TypeScript runtime verification.</a:t>
+            </a:r>
+          </a:p>
+          <a:p>
+            <a:pPr algn="l">
               <a:spcBef>
                 <a:spcPts val="1000"/>
               </a:spcBef>
-              <a:defRPr sz="1050">
-                <a:solidFill>
-                  <a:srgbClr val="CBD5E1"/>
-                </a:solidFill>
-                <a:latin typeface="Calibri"/>
-              </a:defRPr>
-            </a:pPr>
-            <a:r>
-              <a:t>Extracts nodes, edges, and symbols into clean mathematical models in milliseconds.</a:t>
-            </a:r>
-          </a:p>
-        </p:txBody>
-      </p:sp>
-      <p:sp>
-        <p:nvSpPr>
-          <p:cNvPr id="7" name="Rounded Rectangle 6"/>
+              <a:defRPr sz="850" b="1">
+                <a:solidFill>
+                  <a:srgbClr val="A7F3D0"/>
+                </a:solidFill>
+                <a:latin typeface="Calibri"/>
+              </a:defRPr>
+            </a:pPr>
+            <a:r>
+              <a:t>Tech: Zustand v5 Store</a:t>
+            </a:r>
+            <a:br/>
+            <a:r>
+              <a:t>Status: ✓ 100% Operational</a:t>
+            </a:r>
+          </a:p>
+        </p:txBody>
+      </p:sp>
+      <p:sp>
+        <p:nvSpPr>
+          <p:cNvPr id="8" name="Rounded Rectangle 7"/>
           <p:cNvSpPr/>
           <p:nvPr/>
         </p:nvSpPr>
         <p:spPr>
           <a:xfrm>
-            <a:off x="5120640" y="1645920"/>
-            <a:ext cx="1993392" cy="4663440"/>
+            <a:off x="5089550" y="1508760"/>
+            <a:ext cx="2011680" cy="4892040"/>
           </a:xfrm>
           <a:prstGeom prst="roundRect">
-            <a:avLst/>
+            <a:avLst>
+              <a:gd name="adj" fmla="val 4000"/>
+            </a:avLst>
           </a:prstGeom>
           <a:solidFill>
             <a:srgbClr val="191E2A"/>
           </a:solidFill>
-          <a:ln w="19050">
+          <a:ln w="22225">
             <a:solidFill>
               <a:srgbClr val="EB3C3C"/>
             </a:solidFill>
@@ -5787,11 +7590,11 @@
           </a:fontRef>
         </p:style>
         <p:txBody>
-          <a:bodyPr rtlCol="0" anchor="ctr" wrap="square" lIns="164592" rIns="164592" tIns="228600"/>
+          <a:bodyPr rtlCol="0" anchor="t" wrap="square" lIns="146304" rIns="146304" tIns="182880" bIns="137160"/>
           <a:lstStyle/>
           <a:p>
-            <a:pPr algn="ctr">
-              <a:defRPr sz="1150" b="1">
+            <a:pPr algn="l">
+              <a:defRPr sz="950" b="1">
                 <a:solidFill>
                   <a:srgbClr val="EB3C3C"/>
                 </a:solidFill>
@@ -5799,61 +7602,194 @@
               </a:defRPr>
             </a:pPr>
             <a:r>
-              <a:t>3. Mathematical Solvers</a:t>
-            </a:r>
-          </a:p>
-          <a:p>
-            <a:pPr>
-              <a:spcBef>
-                <a:spcPts val="400"/>
+              <a:t>STAGE 03</a:t>
+            </a:r>
+          </a:p>
+          <a:p>
+            <a:pPr algn="l">
+              <a:spcBef>
+                <a:spcPts val="200"/>
+              </a:spcBef>
+              <a:defRPr sz="1250" b="1">
+                <a:solidFill>
+                  <a:srgbClr val="FFFFFF"/>
+                </a:solidFill>
+                <a:latin typeface="Arial"/>
+              </a:defRPr>
+            </a:pPr>
+            <a:r>
+              <a:t>Math Engines</a:t>
+            </a:r>
+          </a:p>
+          <a:p>
+            <a:pPr algn="l">
+              <a:spcBef>
+                <a:spcPts val="200"/>
               </a:spcBef>
               <a:defRPr sz="1000" b="1">
                 <a:solidFill>
+                  <a:srgbClr val="FCD34D"/>
+                </a:solidFill>
+                <a:latin typeface="Calibri"/>
+              </a:defRPr>
+            </a:pPr>
+            <a:r>
+              <a:t>Core Solvers</a:t>
+            </a:r>
+          </a:p>
+          <a:p>
+            <a:pPr algn="l">
+              <a:spcBef>
+                <a:spcPts val="600"/>
+              </a:spcBef>
+              <a:defRPr sz="850">
+                <a:solidFill>
+                  <a:srgbClr val="BAE6FD"/>
+                </a:solidFill>
+                <a:latin typeface="Calibri"/>
+              </a:defRPr>
+            </a:pPr>
+            <a:r>
+              <a:t>In: Mathematical AST</a:t>
+            </a:r>
+            <a:br/>
+            <a:r>
+              <a:t>Out: Exact Solution Data</a:t>
+            </a:r>
+          </a:p>
+          <a:p>
+            <a:pPr algn="l">
+              <a:spcBef>
+                <a:spcPts val="600"/>
+              </a:spcBef>
+              <a:defRPr sz="850" b="1">
+                <a:solidFill>
+                  <a:srgbClr val="EB3C3C"/>
+                </a:solidFill>
+                <a:latin typeface="Arial"/>
+              </a:defRPr>
+            </a:pPr>
+            <a:r>
+              <a:t>KEY CAPABILITIES</a:t>
+            </a:r>
+          </a:p>
+          <a:p>
+            <a:pPr algn="l">
+              <a:spcBef>
+                <a:spcPts val="500"/>
+              </a:spcBef>
+            </a:pPr>
+            <a:r>
+              <a:rPr sz="950" b="1">
+                <a:solidFill>
                   <a:srgbClr val="FFFFFF"/>
                 </a:solidFill>
-                <a:latin typeface="Arial"/>
-              </a:defRPr>
-            </a:pPr>
-            <a:r>
-              <a:t>Algorithmic Engine</a:t>
-            </a:r>
-          </a:p>
-          <a:p>
-            <a:pPr>
+                <a:latin typeface="Calibri"/>
+              </a:rPr>
+              <a:t>• Automata Solver: </a:t>
+            </a:r>
+            <a:r>
+              <a:rPr sz="900">
+                <a:solidFill>
+                  <a:srgbClr val="CBD5E1"/>
+                </a:solidFill>
+                <a:latin typeface="Calibri"/>
+              </a:rPr>
+              <a:t>Hopcroft minimization &amp; NFA subset construction.</a:t>
+            </a:r>
+          </a:p>
+          <a:p>
+            <a:pPr algn="l">
+              <a:spcBef>
+                <a:spcPts val="500"/>
+              </a:spcBef>
+            </a:pPr>
+            <a:r>
+              <a:rPr sz="950" b="1">
+                <a:solidFill>
+                  <a:srgbClr val="FFFFFF"/>
+                </a:solidFill>
+                <a:latin typeface="Calibri"/>
+              </a:rPr>
+              <a:t>• Matrix Engine: </a:t>
+            </a:r>
+            <a:r>
+              <a:rPr sz="900">
+                <a:solidFill>
+                  <a:srgbClr val="CBD5E1"/>
+                </a:solidFill>
+                <a:latin typeface="Calibri"/>
+              </a:rPr>
+              <a:t>Warshall's transitive closure derivation in O(n³).</a:t>
+            </a:r>
+          </a:p>
+          <a:p>
+            <a:pPr algn="l">
+              <a:spcBef>
+                <a:spcPts val="500"/>
+              </a:spcBef>
+            </a:pPr>
+            <a:r>
+              <a:rPr sz="950" b="1">
+                <a:solidFill>
+                  <a:srgbClr val="FFFFFF"/>
+                </a:solidFill>
+                <a:latin typeface="Calibri"/>
+              </a:rPr>
+              <a:t>• Logic Solver: </a:t>
+            </a:r>
+            <a:r>
+              <a:rPr sz="900">
+                <a:solidFill>
+                  <a:srgbClr val="CBD5E1"/>
+                </a:solidFill>
+                <a:latin typeface="Calibri"/>
+              </a:rPr>
+              <a:t>Full truth tables &amp; canonical DNF/CNF synthesis.</a:t>
+            </a:r>
+          </a:p>
+          <a:p>
+            <a:pPr algn="l">
               <a:spcBef>
                 <a:spcPts val="1000"/>
               </a:spcBef>
-              <a:defRPr sz="1050">
-                <a:solidFill>
-                  <a:srgbClr val="CBD5E1"/>
-                </a:solidFill>
-                <a:latin typeface="Calibri"/>
-              </a:defRPr>
-            </a:pPr>
-            <a:r>
-              <a:t>Runs DFA simulation, Hopcroft minimization, Warshall's algorithm, and truth tables.</a:t>
-            </a:r>
-          </a:p>
-        </p:txBody>
-      </p:sp>
-      <p:sp>
-        <p:nvSpPr>
-          <p:cNvPr id="8" name="Rounded Rectangle 7"/>
+              <a:defRPr sz="850" b="1">
+                <a:solidFill>
+                  <a:srgbClr val="A7F3D0"/>
+                </a:solidFill>
+                <a:latin typeface="Calibri"/>
+              </a:defRPr>
+            </a:pPr>
+            <a:r>
+              <a:t>Tech: Core Algorithms</a:t>
+            </a:r>
+            <a:br/>
+            <a:r>
+              <a:t>Status: ✓ 100% Operational</a:t>
+            </a:r>
+          </a:p>
+        </p:txBody>
+      </p:sp>
+      <p:sp>
+        <p:nvSpPr>
+          <p:cNvPr id="9" name="Rounded Rectangle 8"/>
           <p:cNvSpPr/>
           <p:nvPr/>
         </p:nvSpPr>
         <p:spPr>
           <a:xfrm>
-            <a:off x="7315199" y="1645920"/>
-            <a:ext cx="1993392" cy="4663440"/>
+            <a:off x="7268565" y="1508760"/>
+            <a:ext cx="2011680" cy="4892040"/>
           </a:xfrm>
           <a:prstGeom prst="roundRect">
-            <a:avLst/>
+            <a:avLst>
+              <a:gd name="adj" fmla="val 4000"/>
+            </a:avLst>
           </a:prstGeom>
           <a:solidFill>
             <a:srgbClr val="191E2A"/>
           </a:solidFill>
-          <a:ln w="19050">
+          <a:ln w="22225">
             <a:solidFill>
               <a:srgbClr val="10B981"/>
             </a:solidFill>
@@ -5874,11 +7810,11 @@
           </a:fontRef>
         </p:style>
         <p:txBody>
-          <a:bodyPr rtlCol="0" anchor="ctr" wrap="square" lIns="164592" rIns="164592" tIns="228600"/>
+          <a:bodyPr rtlCol="0" anchor="t" wrap="square" lIns="146304" rIns="146304" tIns="182880" bIns="137160"/>
           <a:lstStyle/>
           <a:p>
-            <a:pPr algn="ctr">
-              <a:defRPr sz="1150" b="1">
+            <a:pPr algn="l">
+              <a:defRPr sz="950" b="1">
                 <a:solidFill>
                   <a:srgbClr val="10B981"/>
                 </a:solidFill>
@@ -5886,61 +7822,194 @@
               </a:defRPr>
             </a:pPr>
             <a:r>
-              <a:t>4. Visual Output Panels</a:t>
-            </a:r>
-          </a:p>
-          <a:p>
-            <a:pPr>
-              <a:spcBef>
-                <a:spcPts val="400"/>
+              <a:t>STAGE 04</a:t>
+            </a:r>
+          </a:p>
+          <a:p>
+            <a:pPr algn="l">
+              <a:spcBef>
+                <a:spcPts val="200"/>
+              </a:spcBef>
+              <a:defRPr sz="1250" b="1">
+                <a:solidFill>
+                  <a:srgbClr val="FFFFFF"/>
+                </a:solidFill>
+                <a:latin typeface="Arial"/>
+              </a:defRPr>
+            </a:pPr>
+            <a:r>
+              <a:t>Output Dock</a:t>
+            </a:r>
+          </a:p>
+          <a:p>
+            <a:pPr algn="l">
+              <a:spcBef>
+                <a:spcPts val="200"/>
               </a:spcBef>
               <a:defRPr sz="1000" b="1">
                 <a:solidFill>
+                  <a:srgbClr val="FCD34D"/>
+                </a:solidFill>
+                <a:latin typeface="Calibri"/>
+              </a:defRPr>
+            </a:pPr>
+            <a:r>
+              <a:t>Visual Panels</a:t>
+            </a:r>
+          </a:p>
+          <a:p>
+            <a:pPr algn="l">
+              <a:spcBef>
+                <a:spcPts val="600"/>
+              </a:spcBef>
+              <a:defRPr sz="850">
+                <a:solidFill>
+                  <a:srgbClr val="BAE6FD"/>
+                </a:solidFill>
+                <a:latin typeface="Calibri"/>
+              </a:defRPr>
+            </a:pPr>
+            <a:r>
+              <a:t>In: Computed Data Models</a:t>
+            </a:r>
+            <a:br/>
+            <a:r>
+              <a:t>Out: Interactive UI Views</a:t>
+            </a:r>
+          </a:p>
+          <a:p>
+            <a:pPr algn="l">
+              <a:spcBef>
+                <a:spcPts val="600"/>
+              </a:spcBef>
+              <a:defRPr sz="850" b="1">
+                <a:solidFill>
+                  <a:srgbClr val="10B981"/>
+                </a:solidFill>
+                <a:latin typeface="Arial"/>
+              </a:defRPr>
+            </a:pPr>
+            <a:r>
+              <a:t>KEY CAPABILITIES</a:t>
+            </a:r>
+          </a:p>
+          <a:p>
+            <a:pPr algn="l">
+              <a:spcBef>
+                <a:spcPts val="500"/>
+              </a:spcBef>
+            </a:pPr>
+            <a:r>
+              <a:rPr sz="950" b="1">
+                <a:solidFill>
                   <a:srgbClr val="FFFFFF"/>
                 </a:solidFill>
-                <a:latin typeface="Arial"/>
-              </a:defRPr>
-            </a:pPr>
-            <a:r>
-              <a:t>Interactive Dock Views</a:t>
-            </a:r>
-          </a:p>
-          <a:p>
-            <a:pPr>
+                <a:latin typeface="Calibri"/>
+              </a:rPr>
+              <a:t>• Dynamic SVG Venn: </a:t>
+            </a:r>
+            <a:r>
+              <a:rPr sz="900">
+                <a:solidFill>
+                  <a:srgbClr val="CBD5E1"/>
+                </a:solidFill>
+                <a:latin typeface="Calibri"/>
+              </a:rPr>
+              <a:t>2-set &amp; 3-set interactive spatial regions.</a:t>
+            </a:r>
+          </a:p>
+          <a:p>
+            <a:pPr algn="l">
+              <a:spcBef>
+                <a:spcPts val="500"/>
+              </a:spcBef>
+            </a:pPr>
+            <a:r>
+              <a:rPr sz="950" b="1">
+                <a:solidFill>
+                  <a:srgbClr val="FFFFFF"/>
+                </a:solidFill>
+                <a:latin typeface="Calibri"/>
+              </a:rPr>
+              <a:t>• Live Step Stepper: </a:t>
+            </a:r>
+            <a:r>
+              <a:rPr sz="900">
+                <a:solidFill>
+                  <a:srgbClr val="CBD5E1"/>
+                </a:solidFill>
+                <a:latin typeface="Calibri"/>
+              </a:rPr>
+              <a:t>Animated glowing states and pulsing edges.</a:t>
+            </a:r>
+          </a:p>
+          <a:p>
+            <a:pPr algn="l">
+              <a:spcBef>
+                <a:spcPts val="500"/>
+              </a:spcBef>
+            </a:pPr>
+            <a:r>
+              <a:rPr sz="950" b="1">
+                <a:solidFill>
+                  <a:srgbClr val="FFFFFF"/>
+                </a:solidFill>
+                <a:latin typeface="Calibri"/>
+              </a:rPr>
+              <a:t>• Batch Test Suite: </a:t>
+            </a:r>
+            <a:r>
+              <a:rPr sz="900">
+                <a:solidFill>
+                  <a:srgbClr val="CBD5E1"/>
+                </a:solidFill>
+                <a:latin typeface="Calibri"/>
+              </a:rPr>
+              <a:t>Instant green accepted and red rejected tags.</a:t>
+            </a:r>
+          </a:p>
+          <a:p>
+            <a:pPr algn="l">
               <a:spcBef>
                 <a:spcPts val="1000"/>
               </a:spcBef>
-              <a:defRPr sz="1050">
-                <a:solidFill>
-                  <a:srgbClr val="CBD5E1"/>
-                </a:solidFill>
-                <a:latin typeface="Calibri"/>
-              </a:defRPr>
-            </a:pPr>
-            <a:r>
-              <a:t>Displays dynamic Venn diagrams, step logs, test suite badges, and matrix tables.</a:t>
-            </a:r>
-          </a:p>
-        </p:txBody>
-      </p:sp>
-      <p:sp>
-        <p:nvSpPr>
-          <p:cNvPr id="9" name="Rounded Rectangle 8"/>
+              <a:defRPr sz="850" b="1">
+                <a:solidFill>
+                  <a:srgbClr val="A7F3D0"/>
+                </a:solidFill>
+                <a:latin typeface="Calibri"/>
+              </a:defRPr>
+            </a:pPr>
+            <a:r>
+              <a:t>Tech: SVG Path &amp; Lucide</a:t>
+            </a:r>
+            <a:br/>
+            <a:r>
+              <a:t>Status: ✓ 100% Operational</a:t>
+            </a:r>
+          </a:p>
+        </p:txBody>
+      </p:sp>
+      <p:sp>
+        <p:nvSpPr>
+          <p:cNvPr id="10" name="Rounded Rectangle 9"/>
           <p:cNvSpPr/>
           <p:nvPr/>
         </p:nvSpPr>
         <p:spPr>
           <a:xfrm>
-            <a:off x="9509760" y="1645920"/>
-            <a:ext cx="1993392" cy="4663440"/>
+            <a:off x="9447580" y="1508760"/>
+            <a:ext cx="2011680" cy="4892040"/>
           </a:xfrm>
           <a:prstGeom prst="roundRect">
-            <a:avLst/>
+            <a:avLst>
+              <a:gd name="adj" fmla="val 4000"/>
+            </a:avLst>
           </a:prstGeom>
           <a:solidFill>
             <a:srgbClr val="191E2A"/>
           </a:solidFill>
-          <a:ln w="19050">
+          <a:ln w="22225">
             <a:solidFill>
               <a:srgbClr val="A855F7"/>
             </a:solidFill>
@@ -5961,11 +8030,11 @@
           </a:fontRef>
         </p:style>
         <p:txBody>
-          <a:bodyPr rtlCol="0" anchor="ctr" wrap="square" lIns="164592" rIns="164592" tIns="228600"/>
+          <a:bodyPr rtlCol="0" anchor="t" wrap="square" lIns="146304" rIns="146304" tIns="182880" bIns="137160"/>
           <a:lstStyle/>
           <a:p>
-            <a:pPr algn="ctr">
-              <a:defRPr sz="1150" b="1">
+            <a:pPr algn="l">
+              <a:defRPr sz="950" b="1">
                 <a:solidFill>
                   <a:srgbClr val="A855F7"/>
                 </a:solidFill>
@@ -5973,39 +8042,170 @@
               </a:defRPr>
             </a:pPr>
             <a:r>
-              <a:t>5. LogicAI Tutor</a:t>
-            </a:r>
-          </a:p>
-          <a:p>
-            <a:pPr>
-              <a:spcBef>
-                <a:spcPts val="400"/>
+              <a:t>STAGE 05</a:t>
+            </a:r>
+          </a:p>
+          <a:p>
+            <a:pPr algn="l">
+              <a:spcBef>
+                <a:spcPts val="200"/>
+              </a:spcBef>
+              <a:defRPr sz="1250" b="1">
+                <a:solidFill>
+                  <a:srgbClr val="FFFFFF"/>
+                </a:solidFill>
+                <a:latin typeface="Arial"/>
+              </a:defRPr>
+            </a:pPr>
+            <a:r>
+              <a:t>LogicAI Tutor</a:t>
+            </a:r>
+          </a:p>
+          <a:p>
+            <a:pPr algn="l">
+              <a:spcBef>
+                <a:spcPts val="200"/>
               </a:spcBef>
               <a:defRPr sz="1000" b="1">
                 <a:solidFill>
+                  <a:srgbClr val="FCD34D"/>
+                </a:solidFill>
+                <a:latin typeface="Calibri"/>
+              </a:defRPr>
+            </a:pPr>
+            <a:r>
+              <a:t>Hybrid AI Engine</a:t>
+            </a:r>
+          </a:p>
+          <a:p>
+            <a:pPr algn="l">
+              <a:spcBef>
+                <a:spcPts val="600"/>
+              </a:spcBef>
+              <a:defRPr sz="850">
+                <a:solidFill>
+                  <a:srgbClr val="BAE6FD"/>
+                </a:solidFill>
+                <a:latin typeface="Calibri"/>
+              </a:defRPr>
+            </a:pPr>
+            <a:r>
+              <a:t>In: Canvas State + Prompt</a:t>
+            </a:r>
+            <a:br/>
+            <a:r>
+              <a:t>Out: Socratic Guidance</a:t>
+            </a:r>
+          </a:p>
+          <a:p>
+            <a:pPr algn="l">
+              <a:spcBef>
+                <a:spcPts val="600"/>
+              </a:spcBef>
+              <a:defRPr sz="850" b="1">
+                <a:solidFill>
+                  <a:srgbClr val="A855F7"/>
+                </a:solidFill>
+                <a:latin typeface="Arial"/>
+              </a:defRPr>
+            </a:pPr>
+            <a:r>
+              <a:t>KEY CAPABILITIES</a:t>
+            </a:r>
+          </a:p>
+          <a:p>
+            <a:pPr algn="l">
+              <a:spcBef>
+                <a:spcPts val="500"/>
+              </a:spcBef>
+            </a:pPr>
+            <a:r>
+              <a:rPr sz="950" b="1">
+                <a:solidFill>
                   <a:srgbClr val="FFFFFF"/>
                 </a:solidFill>
-                <a:latin typeface="Arial"/>
-              </a:defRPr>
-            </a:pPr>
-            <a:r>
-              <a:t>Live LLM + Local AST</a:t>
-            </a:r>
-          </a:p>
-          <a:p>
-            <a:pPr>
+                <a:latin typeface="Calibri"/>
+              </a:rPr>
+              <a:t>• Canvas Perception: </a:t>
+            </a:r>
+            <a:r>
+              <a:rPr sz="900">
+                <a:solidFill>
+                  <a:srgbClr val="CBD5E1"/>
+                </a:solidFill>
+                <a:latin typeface="Calibri"/>
+              </a:rPr>
+              <a:t>Reads live nodes directly from store.</a:t>
+            </a:r>
+          </a:p>
+          <a:p>
+            <a:pPr algn="l">
+              <a:spcBef>
+                <a:spcPts val="500"/>
+              </a:spcBef>
+            </a:pPr>
+            <a:r>
+              <a:rPr sz="950" b="1">
+                <a:solidFill>
+                  <a:srgbClr val="FFFFFF"/>
+                </a:solidFill>
+                <a:latin typeface="Calibri"/>
+              </a:rPr>
+              <a:t>• Live LLM API: </a:t>
+            </a:r>
+            <a:r>
+              <a:rPr sz="900">
+                <a:solidFill>
+                  <a:srgbClr val="CBD5E1"/>
+                </a:solidFill>
+                <a:latin typeface="Calibri"/>
+              </a:rPr>
+              <a:t>Streams explanations via Gemini or Groq.</a:t>
+            </a:r>
+          </a:p>
+          <a:p>
+            <a:pPr algn="l">
+              <a:spcBef>
+                <a:spcPts val="500"/>
+              </a:spcBef>
+            </a:pPr>
+            <a:r>
+              <a:rPr sz="950" b="1">
+                <a:solidFill>
+                  <a:srgbClr val="FFFFFF"/>
+                </a:solidFill>
+                <a:latin typeface="Calibri"/>
+              </a:rPr>
+              <a:t>• Offline Fallback: </a:t>
+            </a:r>
+            <a:r>
+              <a:rPr sz="900">
+                <a:solidFill>
+                  <a:srgbClr val="CBD5E1"/>
+                </a:solidFill>
+                <a:latin typeface="Calibri"/>
+              </a:rPr>
+              <a:t>Deterministic AST rules when offline.</a:t>
+            </a:r>
+          </a:p>
+          <a:p>
+            <a:pPr algn="l">
               <a:spcBef>
                 <a:spcPts val="1000"/>
               </a:spcBef>
-              <a:defRPr sz="1050">
-                <a:solidFill>
-                  <a:srgbClr val="CBD5E1"/>
-                </a:solidFill>
-                <a:latin typeface="Calibri"/>
-              </a:defRPr>
-            </a:pPr>
-            <a:r>
-              <a:t>Reads live canvas state and gives step-by-step explanations via Gemini API or local rules.</a:t>
+              <a:defRPr sz="850" b="1">
+                <a:solidFill>
+                  <a:srgbClr val="A7F3D0"/>
+                </a:solidFill>
+                <a:latin typeface="Calibri"/>
+              </a:defRPr>
+            </a:pPr>
+            <a:r>
+              <a:t>Tech: Gemini 2.5 Flash</a:t>
+            </a:r>
+            <a:br/>
+            <a:r>
+              <a:t>Status: ✓ 100% Operational</a:t>
             </a:r>
           </a:p>
         </p:txBody>
@@ -6079,8 +8279,8 @@
         </p:nvSpPr>
         <p:spPr>
           <a:xfrm>
-            <a:off x="731520" y="365760"/>
-            <a:ext cx="10725912" cy="1005840"/>
+            <a:off x="731520" y="320040"/>
+            <a:ext cx="10725912" cy="274320"/>
           </a:xfrm>
           <a:prstGeom prst="rect">
             <a:avLst/>
@@ -6088,13 +8288,13 @@
           <a:noFill/>
         </p:spPr>
         <p:txBody>
-          <a:bodyPr wrap="square" lIns="0" tIns="0" rIns="0" bIns="0">
+          <a:bodyPr wrap="square" anchor="t" lIns="0" rIns="0" tIns="0" bIns="0">
             <a:spAutoFit/>
           </a:bodyPr>
           <a:lstStyle/>
           <a:p>
-            <a:pPr>
-              <a:defRPr sz="1100" b="1">
+            <a:pPr algn="l">
+              <a:defRPr sz="1000" b="1">
                 <a:solidFill>
                   <a:srgbClr val="EB3C3C"/>
                 </a:solidFill>
@@ -6105,11 +8305,31 @@
               <a:t>TECHNOLOGY CHOICES</a:t>
             </a:r>
           </a:p>
-          <a:p>
-            <a:pPr>
-              <a:spcBef>
-                <a:spcPts val="300"/>
-              </a:spcBef>
+        </p:txBody>
+      </p:sp>
+      <p:sp>
+        <p:nvSpPr>
+          <p:cNvPr id="4" name="TextBox 3"/>
+          <p:cNvSpPr txBox="1"/>
+          <p:nvPr/>
+        </p:nvSpPr>
+        <p:spPr>
+          <a:xfrm>
+            <a:off x="731520" y="594360"/>
+            <a:ext cx="10725912" cy="594360"/>
+          </a:xfrm>
+          <a:prstGeom prst="rect">
+            <a:avLst/>
+          </a:prstGeom>
+          <a:noFill/>
+        </p:spPr>
+        <p:txBody>
+          <a:bodyPr wrap="square" anchor="t" lIns="0" rIns="0" tIns="0" bIns="0">
+            <a:spAutoFit/>
+          </a:bodyPr>
+          <a:lstStyle/>
+          <a:p>
+            <a:pPr algn="l">
               <a:defRPr sz="2200" b="1">
                 <a:solidFill>
                   <a:srgbClr val="FFFFFF"/>
@@ -6118,21 +8338,21 @@
               </a:defRPr>
             </a:pPr>
             <a:r>
-              <a:t>Modern Tech Stack Built for Performance and Speed</a:t>
-            </a:r>
-          </a:p>
-        </p:txBody>
-      </p:sp>
-      <p:sp>
-        <p:nvSpPr>
-          <p:cNvPr id="4" name="Rectangle 3"/>
+              <a:t>Modern Tech Stack Built for Real-Time Performance</a:t>
+            </a:r>
+          </a:p>
+        </p:txBody>
+      </p:sp>
+      <p:sp>
+        <p:nvSpPr>
+          <p:cNvPr id="5" name="Rectangle 4"/>
           <p:cNvSpPr/>
           <p:nvPr/>
         </p:nvSpPr>
         <p:spPr>
           <a:xfrm>
-            <a:off x="731520" y="1353312"/>
-            <a:ext cx="10725912" cy="36576"/>
+            <a:off x="731520" y="1234440"/>
+            <a:ext cx="10725912" cy="32004"/>
           </a:xfrm>
           <a:prstGeom prst="rect">
             <a:avLst/>
@@ -6168,22 +8388,24 @@
       </p:sp>
       <p:sp>
         <p:nvSpPr>
-          <p:cNvPr id="5" name="Rounded Rectangle 4"/>
+          <p:cNvPr id="6" name="Rounded Rectangle 5"/>
           <p:cNvSpPr/>
           <p:nvPr/>
         </p:nvSpPr>
         <p:spPr>
           <a:xfrm>
-            <a:off x="731520" y="1645920"/>
-            <a:ext cx="3410712" cy="2148840"/>
+            <a:off x="731520" y="1508760"/>
+            <a:ext cx="3410712" cy="2331720"/>
           </a:xfrm>
           <a:prstGeom prst="roundRect">
-            <a:avLst/>
+            <a:avLst>
+              <a:gd name="adj" fmla="val 4000"/>
+            </a:avLst>
           </a:prstGeom>
           <a:solidFill>
             <a:srgbClr val="191E2A"/>
           </a:solidFill>
-          <a:ln w="19050">
+          <a:ln w="22225">
             <a:solidFill>
               <a:srgbClr val="38BDF8"/>
             </a:solidFill>
@@ -6204,11 +8426,11 @@
           </a:fontRef>
         </p:style>
         <p:txBody>
-          <a:bodyPr rtlCol="0" anchor="ctr" wrap="square" lIns="228600" rIns="228600" tIns="182880"/>
+          <a:bodyPr rtlCol="0" anchor="t" wrap="square" lIns="201168" rIns="201168" tIns="164592" bIns="137160"/>
           <a:lstStyle/>
           <a:p>
-            <a:pPr algn="ctr">
-              <a:defRPr sz="1200" b="1">
+            <a:pPr algn="l">
+              <a:defRPr sz="1250" b="1">
                 <a:solidFill>
                   <a:srgbClr val="38BDF8"/>
                 </a:solidFill>
@@ -6220,15 +8442,15 @@
             </a:r>
           </a:p>
           <a:p>
-            <a:pPr>
+            <a:pPr algn="l">
               <a:spcBef>
                 <a:spcPts val="200"/>
               </a:spcBef>
-              <a:defRPr sz="1000">
+              <a:defRPr sz="1000" b="1">
                 <a:solidFill>
                   <a:srgbClr val="FCD34D"/>
                 </a:solidFill>
-                <a:latin typeface="Arial"/>
+                <a:latin typeface="Calibri"/>
               </a:defRPr>
             </a:pPr>
             <a:r>
@@ -6236,41 +8458,118 @@
             </a:r>
           </a:p>
           <a:p>
-            <a:pPr>
-              <a:spcBef>
-                <a:spcPts val="600"/>
-              </a:spcBef>
-              <a:defRPr sz="1050">
-                <a:solidFill>
-                  <a:srgbClr val="CBD5E1"/>
-                </a:solidFill>
-                <a:latin typeface="Calibri"/>
-              </a:defRPr>
-            </a:pPr>
-            <a:r>
-              <a:t>Provides server-side rendering, App Router, and lightning-fast page loading with zero lag.</a:t>
-            </a:r>
-          </a:p>
-        </p:txBody>
-      </p:sp>
-      <p:sp>
-        <p:nvSpPr>
-          <p:cNvPr id="6" name="Rounded Rectangle 5"/>
+            <a:pPr algn="l">
+              <a:spcBef>
+                <a:spcPts val="500"/>
+              </a:spcBef>
+            </a:pPr>
+            <a:r>
+              <a:rPr sz="950" b="1">
+                <a:solidFill>
+                  <a:srgbClr val="FFFFFF"/>
+                </a:solidFill>
+                <a:latin typeface="Calibri"/>
+              </a:rPr>
+              <a:t>• App Router: </a:t>
+            </a:r>
+            <a:r>
+              <a:rPr sz="900">
+                <a:solidFill>
+                  <a:srgbClr val="CBD5E1"/>
+                </a:solidFill>
+                <a:latin typeface="Calibri"/>
+              </a:rPr>
+              <a:t>High-performance server &amp; client components.</a:t>
+            </a:r>
+          </a:p>
+          <a:p>
+            <a:pPr algn="l">
+              <a:spcBef>
+                <a:spcPts val="500"/>
+              </a:spcBef>
+            </a:pPr>
+            <a:r>
+              <a:rPr sz="950" b="1">
+                <a:solidFill>
+                  <a:srgbClr val="FFFFFF"/>
+                </a:solidFill>
+                <a:latin typeface="Calibri"/>
+              </a:rPr>
+              <a:t>• Zero Latency: </a:t>
+            </a:r>
+            <a:r>
+              <a:rPr sz="900">
+                <a:solidFill>
+                  <a:srgbClr val="CBD5E1"/>
+                </a:solidFill>
+                <a:latin typeface="Calibri"/>
+              </a:rPr>
+              <a:t>Instant page loads with no client lag.</a:t>
+            </a:r>
+          </a:p>
+          <a:p>
+            <a:pPr algn="l">
+              <a:spcBef>
+                <a:spcPts val="500"/>
+              </a:spcBef>
+            </a:pPr>
+            <a:r>
+              <a:rPr sz="950" b="1">
+                <a:solidFill>
+                  <a:srgbClr val="FFFFFF"/>
+                </a:solidFill>
+                <a:latin typeface="Calibri"/>
+              </a:rPr>
+              <a:t>• Production Ready: </a:t>
+            </a:r>
+            <a:r>
+              <a:rPr sz="900">
+                <a:solidFill>
+                  <a:srgbClr val="CBD5E1"/>
+                </a:solidFill>
+                <a:latin typeface="Calibri"/>
+              </a:rPr>
+              <a:t>Modular architecture deployed on Vercel.</a:t>
+            </a:r>
+          </a:p>
+          <a:p>
+            <a:pPr algn="l">
+              <a:spcBef>
+                <a:spcPts val="800"/>
+              </a:spcBef>
+              <a:defRPr sz="850" b="1">
+                <a:solidFill>
+                  <a:srgbClr val="38BDF8"/>
+                </a:solidFill>
+                <a:latin typeface="Calibri"/>
+              </a:defRPr>
+            </a:pPr>
+            <a:r>
+              <a:t>Role: Core Web Shell &amp; API Hosting</a:t>
+            </a:r>
+          </a:p>
+        </p:txBody>
+      </p:sp>
+      <p:sp>
+        <p:nvSpPr>
+          <p:cNvPr id="7" name="Rounded Rectangle 6"/>
           <p:cNvSpPr/>
           <p:nvPr/>
         </p:nvSpPr>
         <p:spPr>
           <a:xfrm>
-            <a:off x="4389120" y="1645920"/>
-            <a:ext cx="3410712" cy="2148840"/>
+            <a:off x="4389120" y="1508760"/>
+            <a:ext cx="3410712" cy="2331720"/>
           </a:xfrm>
           <a:prstGeom prst="roundRect">
-            <a:avLst/>
+            <a:avLst>
+              <a:gd name="adj" fmla="val 4000"/>
+            </a:avLst>
           </a:prstGeom>
           <a:solidFill>
             <a:srgbClr val="191E2A"/>
           </a:solidFill>
-          <a:ln w="19050">
+          <a:ln w="22225">
             <a:solidFill>
               <a:srgbClr val="F59E0B"/>
             </a:solidFill>
@@ -6291,11 +8590,11 @@
           </a:fontRef>
         </p:style>
         <p:txBody>
-          <a:bodyPr rtlCol="0" anchor="ctr" wrap="square" lIns="228600" rIns="228600" tIns="182880"/>
+          <a:bodyPr rtlCol="0" anchor="t" wrap="square" lIns="201168" rIns="201168" tIns="164592" bIns="137160"/>
           <a:lstStyle/>
           <a:p>
-            <a:pPr algn="ctr">
-              <a:defRPr sz="1200" b="1">
+            <a:pPr algn="l">
+              <a:defRPr sz="1250" b="1">
                 <a:solidFill>
                   <a:srgbClr val="F59E0B"/>
                 </a:solidFill>
@@ -6307,15 +8606,15 @@
             </a:r>
           </a:p>
           <a:p>
-            <a:pPr>
+            <a:pPr algn="l">
               <a:spcBef>
                 <a:spcPts val="200"/>
               </a:spcBef>
-              <a:defRPr sz="1000">
+              <a:defRPr sz="1000" b="1">
                 <a:solidFill>
                   <a:srgbClr val="FCD34D"/>
                 </a:solidFill>
-                <a:latin typeface="Arial"/>
+                <a:latin typeface="Calibri"/>
               </a:defRPr>
             </a:pPr>
             <a:r>
@@ -6323,41 +8622,118 @@
             </a:r>
           </a:p>
           <a:p>
-            <a:pPr>
-              <a:spcBef>
-                <a:spcPts val="600"/>
-              </a:spcBef>
-              <a:defRPr sz="1050">
-                <a:solidFill>
-                  <a:srgbClr val="CBD5E1"/>
-                </a:solidFill>
-                <a:latin typeface="Calibri"/>
-              </a:defRPr>
-            </a:pPr>
-            <a:r>
-              <a:t>Renders custom double-ring accept states, glowing nodes, and animated transition lines seamlessly.</a:t>
-            </a:r>
-          </a:p>
-        </p:txBody>
-      </p:sp>
-      <p:sp>
-        <p:nvSpPr>
-          <p:cNvPr id="7" name="Rounded Rectangle 6"/>
+            <a:pPr algn="l">
+              <a:spcBef>
+                <a:spcPts val="500"/>
+              </a:spcBef>
+            </a:pPr>
+            <a:r>
+              <a:rPr sz="950" b="1">
+                <a:solidFill>
+                  <a:srgbClr val="FFFFFF"/>
+                </a:solidFill>
+                <a:latin typeface="Calibri"/>
+              </a:rPr>
+              <a:t>• Custom SVG Nodes: </a:t>
+            </a:r>
+            <a:r>
+              <a:rPr sz="900">
+                <a:solidFill>
+                  <a:srgbClr val="CBD5E1"/>
+                </a:solidFill>
+                <a:latin typeface="Calibri"/>
+              </a:rPr>
+              <a:t>Circular states, double rings, and gate shapes.</a:t>
+            </a:r>
+          </a:p>
+          <a:p>
+            <a:pPr algn="l">
+              <a:spcBef>
+                <a:spcPts val="500"/>
+              </a:spcBef>
+            </a:pPr>
+            <a:r>
+              <a:rPr sz="950" b="1">
+                <a:solidFill>
+                  <a:srgbClr val="FFFFFF"/>
+                </a:solidFill>
+                <a:latin typeface="Calibri"/>
+              </a:rPr>
+              <a:t>• Interactive Edges: </a:t>
+            </a:r>
+            <a:r>
+              <a:rPr sz="900">
+                <a:solidFill>
+                  <a:srgbClr val="CBD5E1"/>
+                </a:solidFill>
+                <a:latin typeface="Calibri"/>
+              </a:rPr>
+              <a:t>Animated bezier lines with symbol labels.</a:t>
+            </a:r>
+          </a:p>
+          <a:p>
+            <a:pPr algn="l">
+              <a:spcBef>
+                <a:spcPts val="500"/>
+              </a:spcBef>
+            </a:pPr>
+            <a:r>
+              <a:rPr sz="950" b="1">
+                <a:solidFill>
+                  <a:srgbClr val="FFFFFF"/>
+                </a:solidFill>
+                <a:latin typeface="Calibri"/>
+              </a:rPr>
+              <a:t>• Viewport Controls: </a:t>
+            </a:r>
+            <a:r>
+              <a:rPr sz="900">
+                <a:solidFill>
+                  <a:srgbClr val="CBD5E1"/>
+                </a:solidFill>
+                <a:latin typeface="Calibri"/>
+              </a:rPr>
+              <a:t>Smooth zooming, panning, and mini-map.</a:t>
+            </a:r>
+          </a:p>
+          <a:p>
+            <a:pPr algn="l">
+              <a:spcBef>
+                <a:spcPts val="800"/>
+              </a:spcBef>
+              <a:defRPr sz="850" b="1">
+                <a:solidFill>
+                  <a:srgbClr val="F59E0B"/>
+                </a:solidFill>
+                <a:latin typeface="Calibri"/>
+              </a:defRPr>
+            </a:pPr>
+            <a:r>
+              <a:t>Role: Interactive Graph Workspace</a:t>
+            </a:r>
+          </a:p>
+        </p:txBody>
+      </p:sp>
+      <p:sp>
+        <p:nvSpPr>
+          <p:cNvPr id="8" name="Rounded Rectangle 7"/>
           <p:cNvSpPr/>
           <p:nvPr/>
         </p:nvSpPr>
         <p:spPr>
           <a:xfrm>
-            <a:off x="8046720" y="1645920"/>
-            <a:ext cx="3410712" cy="2148840"/>
+            <a:off x="8046720" y="1508760"/>
+            <a:ext cx="3410712" cy="2331720"/>
           </a:xfrm>
           <a:prstGeom prst="roundRect">
-            <a:avLst/>
+            <a:avLst>
+              <a:gd name="adj" fmla="val 4000"/>
+            </a:avLst>
           </a:prstGeom>
           <a:solidFill>
             <a:srgbClr val="191E2A"/>
           </a:solidFill>
-          <a:ln w="19050">
+          <a:ln w="22225">
             <a:solidFill>
               <a:srgbClr val="10B981"/>
             </a:solidFill>
@@ -6378,11 +8754,11 @@
           </a:fontRef>
         </p:style>
         <p:txBody>
-          <a:bodyPr rtlCol="0" anchor="ctr" wrap="square" lIns="228600" rIns="228600" tIns="182880"/>
+          <a:bodyPr rtlCol="0" anchor="t" wrap="square" lIns="201168" rIns="201168" tIns="164592" bIns="137160"/>
           <a:lstStyle/>
           <a:p>
-            <a:pPr algn="ctr">
-              <a:defRPr sz="1200" b="1">
+            <a:pPr algn="l">
+              <a:defRPr sz="1250" b="1">
                 <a:solidFill>
                   <a:srgbClr val="10B981"/>
                 </a:solidFill>
@@ -6394,57 +8770,134 @@
             </a:r>
           </a:p>
           <a:p>
-            <a:pPr>
+            <a:pPr algn="l">
               <a:spcBef>
                 <a:spcPts val="200"/>
               </a:spcBef>
-              <a:defRPr sz="1000">
+              <a:defRPr sz="1000" b="1">
                 <a:solidFill>
                   <a:srgbClr val="FCD34D"/>
                 </a:solidFill>
-                <a:latin typeface="Arial"/>
-              </a:defRPr>
-            </a:pPr>
-            <a:r>
-              <a:t>Centralized State</a:t>
-            </a:r>
-          </a:p>
-          <a:p>
-            <a:pPr>
-              <a:spcBef>
-                <a:spcPts val="600"/>
-              </a:spcBef>
-              <a:defRPr sz="1050">
-                <a:solidFill>
-                  <a:srgbClr val="CBD5E1"/>
-                </a:solidFill>
-                <a:latin typeface="Calibri"/>
-              </a:defRPr>
-            </a:pPr>
-            <a:r>
-              <a:t>Ensures immediate canvas re-computation so every click or connection updates tables instantly.</a:t>
-            </a:r>
-          </a:p>
-        </p:txBody>
-      </p:sp>
-      <p:sp>
-        <p:nvSpPr>
-          <p:cNvPr id="8" name="Rounded Rectangle 7"/>
+                <a:latin typeface="Calibri"/>
+              </a:defRPr>
+            </a:pPr>
+            <a:r>
+              <a:t>Centralized State Manager</a:t>
+            </a:r>
+          </a:p>
+          <a:p>
+            <a:pPr algn="l">
+              <a:spcBef>
+                <a:spcPts val="500"/>
+              </a:spcBef>
+            </a:pPr>
+            <a:r>
+              <a:rPr sz="950" b="1">
+                <a:solidFill>
+                  <a:srgbClr val="FFFFFF"/>
+                </a:solidFill>
+                <a:latin typeface="Calibri"/>
+              </a:rPr>
+              <a:t>• Single Source of Truth: </a:t>
+            </a:r>
+            <a:r>
+              <a:rPr sz="900">
+                <a:solidFill>
+                  <a:srgbClr val="CBD5E1"/>
+                </a:solidFill>
+                <a:latin typeface="Calibri"/>
+              </a:rPr>
+              <a:t>Synchronizes canvas nodes and dock panels.</a:t>
+            </a:r>
+          </a:p>
+          <a:p>
+            <a:pPr algn="l">
+              <a:spcBef>
+                <a:spcPts val="500"/>
+              </a:spcBef>
+            </a:pPr>
+            <a:r>
+              <a:rPr sz="950" b="1">
+                <a:solidFill>
+                  <a:srgbClr val="FFFFFF"/>
+                </a:solidFill>
+                <a:latin typeface="Calibri"/>
+              </a:rPr>
+              <a:t>• Instant Recompute: </a:t>
+            </a:r>
+            <a:r>
+              <a:rPr sz="900">
+                <a:solidFill>
+                  <a:srgbClr val="CBD5E1"/>
+                </a:solidFill>
+                <a:latin typeface="Calibri"/>
+              </a:rPr>
+              <a:t>Graph changes update tables immediately.</a:t>
+            </a:r>
+          </a:p>
+          <a:p>
+            <a:pPr algn="l">
+              <a:spcBef>
+                <a:spcPts val="500"/>
+              </a:spcBef>
+            </a:pPr>
+            <a:r>
+              <a:rPr sz="950" b="1">
+                <a:solidFill>
+                  <a:srgbClr val="FFFFFF"/>
+                </a:solidFill>
+                <a:latin typeface="Calibri"/>
+              </a:rPr>
+              <a:t>• Lightweight: </a:t>
+            </a:r>
+            <a:r>
+              <a:rPr sz="900">
+                <a:solidFill>
+                  <a:srgbClr val="CBD5E1"/>
+                </a:solidFill>
+                <a:latin typeface="Calibri"/>
+              </a:rPr>
+              <a:t>Zero boilerplate with extreme speed.</a:t>
+            </a:r>
+          </a:p>
+          <a:p>
+            <a:pPr algn="l">
+              <a:spcBef>
+                <a:spcPts val="800"/>
+              </a:spcBef>
+              <a:defRPr sz="850" b="1">
+                <a:solidFill>
+                  <a:srgbClr val="10B981"/>
+                </a:solidFill>
+                <a:latin typeface="Calibri"/>
+              </a:defRPr>
+            </a:pPr>
+            <a:r>
+              <a:t>Role: Real-Time Global State Flow</a:t>
+            </a:r>
+          </a:p>
+        </p:txBody>
+      </p:sp>
+      <p:sp>
+        <p:nvSpPr>
+          <p:cNvPr id="9" name="Rounded Rectangle 8"/>
           <p:cNvSpPr/>
           <p:nvPr/>
         </p:nvSpPr>
         <p:spPr>
           <a:xfrm>
             <a:off x="731520" y="4023360"/>
-            <a:ext cx="3410712" cy="2148840"/>
+            <a:ext cx="3410712" cy="2331720"/>
           </a:xfrm>
           <a:prstGeom prst="roundRect">
-            <a:avLst/>
+            <a:avLst>
+              <a:gd name="adj" fmla="val 4000"/>
+            </a:avLst>
           </a:prstGeom>
           <a:solidFill>
             <a:srgbClr val="191E2A"/>
           </a:solidFill>
-          <a:ln w="19050">
+          <a:ln w="22225">
             <a:solidFill>
               <a:srgbClr val="EB3C3C"/>
             </a:solidFill>
@@ -6465,11 +8918,11 @@
           </a:fontRef>
         </p:style>
         <p:txBody>
-          <a:bodyPr rtlCol="0" anchor="ctr" wrap="square" lIns="228600" rIns="228600" tIns="182880"/>
+          <a:bodyPr rtlCol="0" anchor="t" wrap="square" lIns="201168" rIns="201168" tIns="164592" bIns="137160"/>
           <a:lstStyle/>
           <a:p>
-            <a:pPr algn="ctr">
-              <a:defRPr sz="1200" b="1">
+            <a:pPr algn="l">
+              <a:defRPr sz="1250" b="1">
                 <a:solidFill>
                   <a:srgbClr val="EB3C3C"/>
                 </a:solidFill>
@@ -6481,57 +8934,134 @@
             </a:r>
           </a:p>
           <a:p>
-            <a:pPr>
+            <a:pPr algn="l">
               <a:spcBef>
                 <a:spcPts val="200"/>
               </a:spcBef>
-              <a:defRPr sz="1000">
+              <a:defRPr sz="1000" b="1">
                 <a:solidFill>
                   <a:srgbClr val="FCD34D"/>
                 </a:solidFill>
-                <a:latin typeface="Arial"/>
-              </a:defRPr>
-            </a:pPr>
-            <a:r>
-              <a:t>Type Safety &amp; Testing</a:t>
-            </a:r>
-          </a:p>
-          <a:p>
-            <a:pPr>
-              <a:spcBef>
-                <a:spcPts val="600"/>
-              </a:spcBef>
-              <a:defRPr sz="1050">
-                <a:solidFill>
-                  <a:srgbClr val="CBD5E1"/>
-                </a:solidFill>
-                <a:latin typeface="Calibri"/>
-              </a:defRPr>
-            </a:pPr>
-            <a:r>
-              <a:t>Strict typing across all math formulas with 51 automated unit tests verifying algorithm correctness.</a:t>
-            </a:r>
-          </a:p>
-        </p:txBody>
-      </p:sp>
-      <p:sp>
-        <p:nvSpPr>
-          <p:cNvPr id="9" name="Rounded Rectangle 8"/>
+                <a:latin typeface="Calibri"/>
+              </a:defRPr>
+            </a:pPr>
+            <a:r>
+              <a:t>Type Safety &amp; Testing Suite</a:t>
+            </a:r>
+          </a:p>
+          <a:p>
+            <a:pPr algn="l">
+              <a:spcBef>
+                <a:spcPts val="500"/>
+              </a:spcBef>
+            </a:pPr>
+            <a:r>
+              <a:rPr sz="950" b="1">
+                <a:solidFill>
+                  <a:srgbClr val="FFFFFF"/>
+                </a:solidFill>
+                <a:latin typeface="Calibri"/>
+              </a:rPr>
+              <a:t>• Strict Types: </a:t>
+            </a:r>
+            <a:r>
+              <a:rPr sz="900">
+                <a:solidFill>
+                  <a:srgbClr val="CBD5E1"/>
+                </a:solidFill>
+                <a:latin typeface="Calibri"/>
+              </a:rPr>
+              <a:t>End-to-end typing across all math formulas.</a:t>
+            </a:r>
+          </a:p>
+          <a:p>
+            <a:pPr algn="l">
+              <a:spcBef>
+                <a:spcPts val="500"/>
+              </a:spcBef>
+            </a:pPr>
+            <a:r>
+              <a:rPr sz="950" b="1">
+                <a:solidFill>
+                  <a:srgbClr val="FFFFFF"/>
+                </a:solidFill>
+                <a:latin typeface="Calibri"/>
+              </a:rPr>
+              <a:t>• 51 Unit Tests: </a:t>
+            </a:r>
+            <a:r>
+              <a:rPr sz="900">
+                <a:solidFill>
+                  <a:srgbClr val="CBD5E1"/>
+                </a:solidFill>
+                <a:latin typeface="Calibri"/>
+              </a:rPr>
+              <a:t>100% pass rate across 9 comprehensive suites.</a:t>
+            </a:r>
+          </a:p>
+          <a:p>
+            <a:pPr algn="l">
+              <a:spcBef>
+                <a:spcPts val="500"/>
+              </a:spcBef>
+            </a:pPr>
+            <a:r>
+              <a:rPr sz="950" b="1">
+                <a:solidFill>
+                  <a:srgbClr val="FFFFFF"/>
+                </a:solidFill>
+                <a:latin typeface="Calibri"/>
+              </a:rPr>
+              <a:t>• Algorithm Assurance: </a:t>
+            </a:r>
+            <a:r>
+              <a:rPr sz="900">
+                <a:solidFill>
+                  <a:srgbClr val="CBD5E1"/>
+                </a:solidFill>
+                <a:latin typeface="Calibri"/>
+              </a:rPr>
+              <a:t>Guarantees formal correctness of all solvers.</a:t>
+            </a:r>
+          </a:p>
+          <a:p>
+            <a:pPr algn="l">
+              <a:spcBef>
+                <a:spcPts val="800"/>
+              </a:spcBef>
+              <a:defRPr sz="850" b="1">
+                <a:solidFill>
+                  <a:srgbClr val="EB3C3C"/>
+                </a:solidFill>
+                <a:latin typeface="Calibri"/>
+              </a:defRPr>
+            </a:pPr>
+            <a:r>
+              <a:t>Role: Algorithmic Verification</a:t>
+            </a:r>
+          </a:p>
+        </p:txBody>
+      </p:sp>
+      <p:sp>
+        <p:nvSpPr>
+          <p:cNvPr id="10" name="Rounded Rectangle 9"/>
           <p:cNvSpPr/>
           <p:nvPr/>
         </p:nvSpPr>
         <p:spPr>
           <a:xfrm>
             <a:off x="4389120" y="4023360"/>
-            <a:ext cx="3410712" cy="2148840"/>
+            <a:ext cx="3410712" cy="2331720"/>
           </a:xfrm>
           <a:prstGeom prst="roundRect">
-            <a:avLst/>
+            <a:avLst>
+              <a:gd name="adj" fmla="val 4000"/>
+            </a:avLst>
           </a:prstGeom>
           <a:solidFill>
             <a:srgbClr val="191E2A"/>
           </a:solidFill>
-          <a:ln w="19050">
+          <a:ln w="22225">
             <a:solidFill>
               <a:srgbClr val="A855F7"/>
             </a:solidFill>
@@ -6552,11 +9082,11 @@
           </a:fontRef>
         </p:style>
         <p:txBody>
-          <a:bodyPr rtlCol="0" anchor="ctr" wrap="square" lIns="228600" rIns="228600" tIns="182880"/>
+          <a:bodyPr rtlCol="0" anchor="t" wrap="square" lIns="201168" rIns="201168" tIns="164592" bIns="137160"/>
           <a:lstStyle/>
           <a:p>
-            <a:pPr algn="ctr">
-              <a:defRPr sz="1200" b="1">
+            <a:pPr algn="l">
+              <a:defRPr sz="1250" b="1">
                 <a:solidFill>
                   <a:srgbClr val="A855F7"/>
                 </a:solidFill>
@@ -6568,57 +9098,134 @@
             </a:r>
           </a:p>
           <a:p>
-            <a:pPr>
+            <a:pPr algn="l">
               <a:spcBef>
                 <a:spcPts val="200"/>
               </a:spcBef>
-              <a:defRPr sz="1000">
+              <a:defRPr sz="1000" b="1">
                 <a:solidFill>
                   <a:srgbClr val="FCD34D"/>
                 </a:solidFill>
-                <a:latin typeface="Arial"/>
-              </a:defRPr>
-            </a:pPr>
-            <a:r>
-              <a:t>AI Reasoning Engine</a:t>
-            </a:r>
-          </a:p>
-          <a:p>
-            <a:pPr>
-              <a:spcBef>
-                <a:spcPts val="600"/>
-              </a:spcBef>
-              <a:defRPr sz="1050">
-                <a:solidFill>
-                  <a:srgbClr val="CBD5E1"/>
-                </a:solidFill>
-                <a:latin typeface="Calibri"/>
-              </a:defRPr>
-            </a:pPr>
-            <a:r>
-              <a:t>Connects LogicAI to frontier language models with live canvas state injected into prompts.</a:t>
-            </a:r>
-          </a:p>
-        </p:txBody>
-      </p:sp>
-      <p:sp>
-        <p:nvSpPr>
-          <p:cNvPr id="10" name="Rounded Rectangle 9"/>
+                <a:latin typeface="Calibri"/>
+              </a:defRPr>
+            </a:pPr>
+            <a:r>
+              <a:t>AI Reasoning Backend</a:t>
+            </a:r>
+          </a:p>
+          <a:p>
+            <a:pPr algn="l">
+              <a:spcBef>
+                <a:spcPts val="500"/>
+              </a:spcBef>
+            </a:pPr>
+            <a:r>
+              <a:rPr sz="950" b="1">
+                <a:solidFill>
+                  <a:srgbClr val="FFFFFF"/>
+                </a:solidFill>
+                <a:latin typeface="Calibri"/>
+              </a:rPr>
+              <a:t>• Live Context Injection: </a:t>
+            </a:r>
+            <a:r>
+              <a:rPr sz="900">
+                <a:solidFill>
+                  <a:srgbClr val="CBD5E1"/>
+                </a:solidFill>
+                <a:latin typeface="Calibri"/>
+              </a:rPr>
+              <a:t>Sends current canvas graph state with prompts.</a:t>
+            </a:r>
+          </a:p>
+          <a:p>
+            <a:pPr algn="l">
+              <a:spcBef>
+                <a:spcPts val="500"/>
+              </a:spcBef>
+            </a:pPr>
+            <a:r>
+              <a:rPr sz="950" b="1">
+                <a:solidFill>
+                  <a:srgbClr val="FFFFFF"/>
+                </a:solidFill>
+                <a:latin typeface="Calibri"/>
+              </a:rPr>
+              <a:t>• Custom API Keys: </a:t>
+            </a:r>
+            <a:r>
+              <a:rPr sz="900">
+                <a:solidFill>
+                  <a:srgbClr val="CBD5E1"/>
+                </a:solidFill>
+                <a:latin typeface="Calibri"/>
+              </a:rPr>
+              <a:t>Supports Gemini, Groq, and OpenAI via UI settings.</a:t>
+            </a:r>
+          </a:p>
+          <a:p>
+            <a:pPr algn="l">
+              <a:spcBef>
+                <a:spcPts val="500"/>
+              </a:spcBef>
+            </a:pPr>
+            <a:r>
+              <a:rPr sz="950" b="1">
+                <a:solidFill>
+                  <a:srgbClr val="FFFFFF"/>
+                </a:solidFill>
+                <a:latin typeface="Calibri"/>
+              </a:rPr>
+              <a:t>• Offline Resilience: </a:t>
+            </a:r>
+            <a:r>
+              <a:rPr sz="900">
+                <a:solidFill>
+                  <a:srgbClr val="CBD5E1"/>
+                </a:solidFill>
+                <a:latin typeface="Calibri"/>
+              </a:rPr>
+              <a:t>Seamless fallback to local AST rules.</a:t>
+            </a:r>
+          </a:p>
+          <a:p>
+            <a:pPr algn="l">
+              <a:spcBef>
+                <a:spcPts val="800"/>
+              </a:spcBef>
+              <a:defRPr sz="850" b="1">
+                <a:solidFill>
+                  <a:srgbClr val="A855F7"/>
+                </a:solidFill>
+                <a:latin typeface="Calibri"/>
+              </a:defRPr>
+            </a:pPr>
+            <a:r>
+              <a:t>Role: Context-Aware Mathematical Tutor</a:t>
+            </a:r>
+          </a:p>
+        </p:txBody>
+      </p:sp>
+      <p:sp>
+        <p:nvSpPr>
+          <p:cNvPr id="11" name="Rounded Rectangle 10"/>
           <p:cNvSpPr/>
           <p:nvPr/>
         </p:nvSpPr>
         <p:spPr>
           <a:xfrm>
             <a:off x="8046720" y="4023360"/>
-            <a:ext cx="3410712" cy="2148840"/>
+            <a:ext cx="3410712" cy="2331720"/>
           </a:xfrm>
           <a:prstGeom prst="roundRect">
-            <a:avLst/>
+            <a:avLst>
+              <a:gd name="adj" fmla="val 4000"/>
+            </a:avLst>
           </a:prstGeom>
           <a:solidFill>
             <a:srgbClr val="191E2A"/>
           </a:solidFill>
-          <a:ln w="19050">
+          <a:ln w="22225">
             <a:solidFill>
               <a:srgbClr val="38BDF8"/>
             </a:solidFill>
@@ -6639,11 +9246,11 @@
           </a:fontRef>
         </p:style>
         <p:txBody>
-          <a:bodyPr rtlCol="0" anchor="ctr" wrap="square" lIns="228600" rIns="228600" tIns="182880"/>
+          <a:bodyPr rtlCol="0" anchor="t" wrap="square" lIns="201168" rIns="201168" tIns="164592" bIns="137160"/>
           <a:lstStyle/>
           <a:p>
-            <a:pPr algn="ctr">
-              <a:defRPr sz="1200" b="1">
+            <a:pPr algn="l">
+              <a:defRPr sz="1250" b="1">
                 <a:solidFill>
                   <a:srgbClr val="38BDF8"/>
                 </a:solidFill>
@@ -6655,35 +9262,110 @@
             </a:r>
           </a:p>
           <a:p>
-            <a:pPr>
+            <a:pPr algn="l">
               <a:spcBef>
                 <a:spcPts val="200"/>
               </a:spcBef>
-              <a:defRPr sz="1000">
+              <a:defRPr sz="1000" b="1">
                 <a:solidFill>
                   <a:srgbClr val="FCD34D"/>
                 </a:solidFill>
-                <a:latin typeface="Arial"/>
-              </a:defRPr>
-            </a:pPr>
-            <a:r>
-              <a:t>Premium Dark Mode Theme</a:t>
-            </a:r>
-          </a:p>
-          <a:p>
-            <a:pPr>
-              <a:spcBef>
-                <a:spcPts val="600"/>
-              </a:spcBef>
-              <a:defRPr sz="1050">
-                <a:solidFill>
-                  <a:srgbClr val="CBD5E1"/>
-                </a:solidFill>
-                <a:latin typeface="Calibri"/>
-              </a:defRPr>
-            </a:pPr>
-            <a:r>
-              <a:t>Custom dark UI with glassmorphism, responsive panels, and smooth micro-animations.</a:t>
+                <a:latin typeface="Calibri"/>
+              </a:defRPr>
+            </a:pPr>
+            <a:r>
+              <a:t>Design System &amp; Theme</a:t>
+            </a:r>
+          </a:p>
+          <a:p>
+            <a:pPr algn="l">
+              <a:spcBef>
+                <a:spcPts val="500"/>
+              </a:spcBef>
+            </a:pPr>
+            <a:r>
+              <a:rPr sz="950" b="1">
+                <a:solidFill>
+                  <a:srgbClr val="FFFFFF"/>
+                </a:solidFill>
+                <a:latin typeface="Calibri"/>
+              </a:rPr>
+              <a:t>• Crimson Orbit: </a:t>
+            </a:r>
+            <a:r>
+              <a:rPr sz="900">
+                <a:solidFill>
+                  <a:srgbClr val="CBD5E1"/>
+                </a:solidFill>
+                <a:latin typeface="Calibri"/>
+              </a:rPr>
+              <a:t>High-contrast dark mode with neon accents.</a:t>
+            </a:r>
+          </a:p>
+          <a:p>
+            <a:pPr algn="l">
+              <a:spcBef>
+                <a:spcPts val="500"/>
+              </a:spcBef>
+            </a:pPr>
+            <a:r>
+              <a:rPr sz="950" b="1">
+                <a:solidFill>
+                  <a:srgbClr val="FFFFFF"/>
+                </a:solidFill>
+                <a:latin typeface="Calibri"/>
+              </a:rPr>
+              <a:t>• Glassmorphism: </a:t>
+            </a:r>
+            <a:r>
+              <a:rPr sz="900">
+                <a:solidFill>
+                  <a:srgbClr val="CBD5E1"/>
+                </a:solidFill>
+                <a:latin typeface="Calibri"/>
+              </a:rPr>
+              <a:t>Translucent floating docks and toolbars.</a:t>
+            </a:r>
+          </a:p>
+          <a:p>
+            <a:pPr algn="l">
+              <a:spcBef>
+                <a:spcPts val="500"/>
+              </a:spcBef>
+            </a:pPr>
+            <a:r>
+              <a:rPr sz="950" b="1">
+                <a:solidFill>
+                  <a:srgbClr val="FFFFFF"/>
+                </a:solidFill>
+                <a:latin typeface="Calibri"/>
+              </a:rPr>
+              <a:t>• Micro-Animations: </a:t>
+            </a:r>
+            <a:r>
+              <a:rPr sz="900">
+                <a:solidFill>
+                  <a:srgbClr val="CBD5E1"/>
+                </a:solidFill>
+                <a:latin typeface="Calibri"/>
+              </a:rPr>
+              <a:t>Glowing state transitions and pulse rings.</a:t>
+            </a:r>
+          </a:p>
+          <a:p>
+            <a:pPr algn="l">
+              <a:spcBef>
+                <a:spcPts val="800"/>
+              </a:spcBef>
+              <a:defRPr sz="850" b="1">
+                <a:solidFill>
+                  <a:srgbClr val="38BDF8"/>
+                </a:solidFill>
+                <a:latin typeface="Calibri"/>
+              </a:defRPr>
+            </a:pPr>
+            <a:r>
+              <a:t>Role: Premium Visual Aesthetics</a:t>
             </a:r>
           </a:p>
         </p:txBody>
@@ -6757,8 +9439,8 @@
         </p:nvSpPr>
         <p:spPr>
           <a:xfrm>
-            <a:off x="731520" y="365760"/>
-            <a:ext cx="10725912" cy="1005840"/>
+            <a:off x="731520" y="320040"/>
+            <a:ext cx="10725912" cy="274320"/>
           </a:xfrm>
           <a:prstGeom prst="rect">
             <a:avLst/>
@@ -6766,13 +9448,13 @@
           <a:noFill/>
         </p:spPr>
         <p:txBody>
-          <a:bodyPr wrap="square" lIns="0" tIns="0" rIns="0" bIns="0">
+          <a:bodyPr wrap="square" anchor="t" lIns="0" rIns="0" tIns="0" bIns="0">
             <a:spAutoFit/>
           </a:bodyPr>
           <a:lstStyle/>
           <a:p>
-            <a:pPr>
-              <a:defRPr sz="1100" b="1">
+            <a:pPr algn="l">
+              <a:defRPr sz="1000" b="1">
                 <a:solidFill>
                   <a:srgbClr val="EB3C3C"/>
                 </a:solidFill>
@@ -6780,14 +9462,34 @@
               </a:defRPr>
             </a:pPr>
             <a:r>
-              <a:t>FOUNDATIONS OF DISCRETE MATH</a:t>
-            </a:r>
-          </a:p>
-          <a:p>
-            <a:pPr>
-              <a:spcBef>
-                <a:spcPts val="300"/>
-              </a:spcBef>
+              <a:t>CORE DOMAIN 1 • SET THEORY</a:t>
+            </a:r>
+          </a:p>
+        </p:txBody>
+      </p:sp>
+      <p:sp>
+        <p:nvSpPr>
+          <p:cNvPr id="4" name="TextBox 3"/>
+          <p:cNvSpPr txBox="1"/>
+          <p:nvPr/>
+        </p:nvSpPr>
+        <p:spPr>
+          <a:xfrm>
+            <a:off x="731520" y="594360"/>
+            <a:ext cx="10725912" cy="594360"/>
+          </a:xfrm>
+          <a:prstGeom prst="rect">
+            <a:avLst/>
+          </a:prstGeom>
+          <a:noFill/>
+        </p:spPr>
+        <p:txBody>
+          <a:bodyPr wrap="square" anchor="t" lIns="0" rIns="0" tIns="0" bIns="0">
+            <a:spAutoFit/>
+          </a:bodyPr>
+          <a:lstStyle/>
+          <a:p>
+            <a:pPr algn="l">
               <a:defRPr sz="2200" b="1">
                 <a:solidFill>
                   <a:srgbClr val="FFFFFF"/>
@@ -6796,21 +9498,21 @@
               </a:defRPr>
             </a:pPr>
             <a:r>
-              <a:t>Module 1: Set Theory &amp; Dynamic Venn Diagrams (Engineered by Sanskar)</a:t>
-            </a:r>
-          </a:p>
-        </p:txBody>
-      </p:sp>
-      <p:sp>
-        <p:nvSpPr>
-          <p:cNvPr id="4" name="Rectangle 3"/>
+              <a:t>Module 1: Set Theory &amp; Dynamic Venn Diagrams (Sanskar's Contribution)</a:t>
+            </a:r>
+          </a:p>
+        </p:txBody>
+      </p:sp>
+      <p:sp>
+        <p:nvSpPr>
+          <p:cNvPr id="5" name="Rectangle 4"/>
           <p:cNvSpPr/>
           <p:nvPr/>
         </p:nvSpPr>
         <p:spPr>
           <a:xfrm>
-            <a:off x="731520" y="1353312"/>
-            <a:ext cx="10725912" cy="36576"/>
+            <a:off x="731520" y="1234440"/>
+            <a:ext cx="10725912" cy="32004"/>
           </a:xfrm>
           <a:prstGeom prst="rect">
             <a:avLst/>
@@ -6846,22 +9548,24 @@
       </p:sp>
       <p:sp>
         <p:nvSpPr>
-          <p:cNvPr id="5" name="Rounded Rectangle 4"/>
+          <p:cNvPr id="6" name="Rounded Rectangle 5"/>
           <p:cNvSpPr/>
           <p:nvPr/>
         </p:nvSpPr>
         <p:spPr>
           <a:xfrm>
-            <a:off x="731520" y="1645920"/>
-            <a:ext cx="5212080" cy="4663440"/>
+            <a:off x="731520" y="1508760"/>
+            <a:ext cx="5212080" cy="4892040"/>
           </a:xfrm>
           <a:prstGeom prst="roundRect">
-            <a:avLst/>
+            <a:avLst>
+              <a:gd name="adj" fmla="val 4000"/>
+            </a:avLst>
           </a:prstGeom>
           <a:solidFill>
             <a:srgbClr val="191E2A"/>
           </a:solidFill>
-          <a:ln w="19050">
+          <a:ln w="22225">
             <a:solidFill>
               <a:srgbClr val="38BDF8"/>
             </a:solidFill>
@@ -6882,11 +9586,11 @@
           </a:fontRef>
         </p:style>
         <p:txBody>
-          <a:bodyPr rtlCol="0" anchor="ctr" wrap="square" lIns="320040" rIns="320040" tIns="274320"/>
+          <a:bodyPr rtlCol="0" anchor="t" wrap="square" lIns="256032" rIns="256032" tIns="228600" bIns="182880"/>
           <a:lstStyle/>
           <a:p>
-            <a:pPr algn="ctr">
-              <a:defRPr sz="1300" b="1">
+            <a:pPr algn="l">
+              <a:defRPr sz="1400" b="1">
                 <a:solidFill>
                   <a:srgbClr val="38BDF8"/>
                 </a:solidFill>
@@ -6894,93 +9598,203 @@
               </a:defRPr>
             </a:pPr>
             <a:r>
-              <a:t>SET OPERATIONS ON CANVAS</a:t>
-            </a:r>
-          </a:p>
-          <a:p>
-            <a:pPr>
-              <a:spcBef>
-                <a:spcPts val="800"/>
-              </a:spcBef>
-              <a:defRPr sz="1100">
-                <a:solidFill>
-                  <a:srgbClr val="FFFFFF"/>
-                </a:solidFill>
-                <a:latin typeface="Calibri"/>
-              </a:defRPr>
-            </a:pPr>
-            <a:r>
-              <a:t>• Visual Set Builder: Create sets like A = {1, 2, 3} and B = {3, 4, 5} with customizable colors.</a:t>
-            </a:r>
-          </a:p>
-          <a:p>
-            <a:pPr>
-              <a:spcBef>
-                <a:spcPts val="800"/>
-              </a:spcBef>
-              <a:defRPr sz="1100">
-                <a:solidFill>
-                  <a:srgbClr val="FFFFFF"/>
-                </a:solidFill>
-                <a:latin typeface="Calibri"/>
-              </a:defRPr>
-            </a:pPr>
-            <a:r>
-              <a:t>• Full Operation Suite: Connect sets into Union (A ∪ B), Intersection (A ∩ B), and Difference (A - B).</a:t>
-            </a:r>
-          </a:p>
-          <a:p>
-            <a:pPr>
-              <a:spcBef>
-                <a:spcPts val="800"/>
-              </a:spcBef>
-              <a:defRPr sz="1100">
-                <a:solidFill>
-                  <a:srgbClr val="FFFFFF"/>
-                </a:solidFill>
-                <a:latin typeface="Calibri"/>
-              </a:defRPr>
-            </a:pPr>
-            <a:r>
-              <a:t>• Advanced Operations: Compute Symmetric Difference (A ⊕ B), Cartesian Product (A × B), and Power Set P(A).</a:t>
-            </a:r>
-          </a:p>
-          <a:p>
-            <a:pPr>
-              <a:spcBef>
-                <a:spcPts val="800"/>
-              </a:spcBef>
-              <a:defRPr sz="1100">
-                <a:solidFill>
-                  <a:srgbClr val="FFFFFF"/>
-                </a:solidFill>
-                <a:latin typeface="Calibri"/>
-              </a:defRPr>
-            </a:pPr>
-            <a:r>
-              <a:t>• Live Cardinality Output: Instantly see size calculations |A ∪ B| and automatic duplicate element removal.</a:t>
-            </a:r>
-          </a:p>
-        </p:txBody>
-      </p:sp>
-      <p:sp>
-        <p:nvSpPr>
-          <p:cNvPr id="6" name="Rounded Rectangle 5"/>
+              <a:t>SET OPERATIONS &amp; EXPRESSION ENGINE</a:t>
+            </a:r>
+          </a:p>
+          <a:p>
+            <a:pPr algn="l">
+              <a:spcBef>
+                <a:spcPts val="200"/>
+              </a:spcBef>
+              <a:defRPr sz="1050" b="1">
+                <a:solidFill>
+                  <a:srgbClr val="FCD34D"/>
+                </a:solidFill>
+                <a:latin typeface="Calibri"/>
+              </a:defRPr>
+            </a:pPr>
+            <a:r>
+              <a:t>Set Builder, Boolean Algebra &amp; Power Sets</a:t>
+            </a:r>
+          </a:p>
+          <a:p>
+            <a:pPr algn="l">
+              <a:spcBef>
+                <a:spcPts val="1000"/>
+              </a:spcBef>
+              <a:spcAft>
+                <a:spcPts val="100"/>
+              </a:spcAft>
+            </a:pPr>
+            <a:r>
+              <a:rPr sz="1200" b="1">
+                <a:solidFill>
+                  <a:srgbClr val="BAE6FD"/>
+                </a:solidFill>
+                <a:latin typeface="Calibri"/>
+              </a:rPr>
+              <a:t>• Visual Set Builder: </a:t>
+            </a:r>
+            <a:r>
+              <a:rPr sz="1100">
+                <a:solidFill>
+                  <a:srgbClr val="CBD5E1"/>
+                </a:solidFill>
+                <a:latin typeface="Calibri"/>
+              </a:rPr>
+              <a:t>Create sets like A = {1, 2, 3} and B = {3, 4, 5} with customized color accents.</a:t>
+            </a:r>
+          </a:p>
+          <a:p>
+            <a:pPr algn="l">
+              <a:spcBef>
+                <a:spcPts val="1000"/>
+              </a:spcBef>
+              <a:spcAft>
+                <a:spcPts val="100"/>
+              </a:spcAft>
+            </a:pPr>
+            <a:r>
+              <a:rPr sz="1200" b="1">
+                <a:solidFill>
+                  <a:srgbClr val="BAE6FD"/>
+                </a:solidFill>
+                <a:latin typeface="Calibri"/>
+              </a:rPr>
+              <a:t>• Fundamental Operations: </a:t>
+            </a:r>
+            <a:r>
+              <a:rPr sz="1100">
+                <a:solidFill>
+                  <a:srgbClr val="CBD5E1"/>
+                </a:solidFill>
+                <a:latin typeface="Calibri"/>
+              </a:rPr>
+              <a:t>Compute Union (A ∪ B), Intersection (A ∩ B), and Difference (A - B) in real time.</a:t>
+            </a:r>
+          </a:p>
+          <a:p>
+            <a:pPr algn="l">
+              <a:spcBef>
+                <a:spcPts val="1000"/>
+              </a:spcBef>
+              <a:spcAft>
+                <a:spcPts val="100"/>
+              </a:spcAft>
+            </a:pPr>
+            <a:r>
+              <a:rPr sz="1200" b="1">
+                <a:solidFill>
+                  <a:srgbClr val="BAE6FD"/>
+                </a:solidFill>
+                <a:latin typeface="Calibri"/>
+              </a:rPr>
+              <a:t>• Advanced Operations: </a:t>
+            </a:r>
+            <a:r>
+              <a:rPr sz="1100">
+                <a:solidFill>
+                  <a:srgbClr val="CBD5E1"/>
+                </a:solidFill>
+                <a:latin typeface="Calibri"/>
+              </a:rPr>
+              <a:t>Compute Symmetric Difference (A ⊕ B), Cartesian Product (A × B), and Power Set P(A).</a:t>
+            </a:r>
+          </a:p>
+          <a:p>
+            <a:pPr algn="l">
+              <a:spcBef>
+                <a:spcPts val="1000"/>
+              </a:spcBef>
+              <a:spcAft>
+                <a:spcPts val="100"/>
+              </a:spcAft>
+            </a:pPr>
+            <a:r>
+              <a:rPr sz="1200" b="1">
+                <a:solidFill>
+                  <a:srgbClr val="BAE6FD"/>
+                </a:solidFill>
+                <a:latin typeface="Calibri"/>
+              </a:rPr>
+              <a:t>• Expression Evaluator: </a:t>
+            </a:r>
+            <a:r>
+              <a:rPr sz="1100">
+                <a:solidFill>
+                  <a:srgbClr val="CBD5E1"/>
+                </a:solidFill>
+                <a:latin typeface="Calibri"/>
+              </a:rPr>
+              <a:t>Parse complex multi-set algebraic formulas with nested brackets and parentheses.</a:t>
+            </a:r>
+          </a:p>
+          <a:p>
+            <a:pPr algn="l">
+              <a:spcBef>
+                <a:spcPts val="1000"/>
+              </a:spcBef>
+              <a:spcAft>
+                <a:spcPts val="100"/>
+              </a:spcAft>
+            </a:pPr>
+            <a:r>
+              <a:rPr sz="1200" b="1">
+                <a:solidFill>
+                  <a:srgbClr val="BAE6FD"/>
+                </a:solidFill>
+                <a:latin typeface="Calibri"/>
+              </a:rPr>
+              <a:t>• Live Cardinality Output: </a:t>
+            </a:r>
+            <a:r>
+              <a:rPr sz="1100">
+                <a:solidFill>
+                  <a:srgbClr val="CBD5E1"/>
+                </a:solidFill>
+                <a:latin typeface="Calibri"/>
+              </a:rPr>
+              <a:t>Instantly observe set size |A ∪ B| calculations and automatic duplicate elimination.</a:t>
+            </a:r>
+          </a:p>
+          <a:p>
+            <a:pPr algn="l">
+              <a:spcBef>
+                <a:spcPts val="1400"/>
+              </a:spcBef>
+              <a:defRPr sz="1000" b="1">
+                <a:solidFill>
+                  <a:srgbClr val="BAE6FD"/>
+                </a:solidFill>
+                <a:latin typeface="Calibri"/>
+              </a:defRPr>
+            </a:pPr>
+            <a:r>
+              <a:t>Coverage: Complete Boolean Set Algebra, Laws &amp; Power Sets</a:t>
+            </a:r>
+          </a:p>
+        </p:txBody>
+      </p:sp>
+      <p:sp>
+        <p:nvSpPr>
+          <p:cNvPr id="7" name="Rounded Rectangle 6"/>
           <p:cNvSpPr/>
           <p:nvPr/>
         </p:nvSpPr>
         <p:spPr>
           <a:xfrm>
-            <a:off x="6217920" y="1645920"/>
-            <a:ext cx="5212080" cy="4663440"/>
+            <a:off x="6245352" y="1508760"/>
+            <a:ext cx="5212080" cy="4892040"/>
           </a:xfrm>
           <a:prstGeom prst="roundRect">
-            <a:avLst/>
+            <a:avLst>
+              <a:gd name="adj" fmla="val 4000"/>
+            </a:avLst>
           </a:prstGeom>
           <a:solidFill>
             <a:srgbClr val="191E2A"/>
           </a:solidFill>
-          <a:ln w="19050">
+          <a:ln w="22225">
             <a:solidFill>
               <a:srgbClr val="F59E0B"/>
             </a:solidFill>
@@ -7001,11 +9815,11 @@
           </a:fontRef>
         </p:style>
         <p:txBody>
-          <a:bodyPr rtlCol="0" anchor="ctr" wrap="square" lIns="320040" rIns="320040" tIns="274320"/>
+          <a:bodyPr rtlCol="0" anchor="t" wrap="square" lIns="256032" rIns="256032" tIns="228600" bIns="182880"/>
           <a:lstStyle/>
           <a:p>
-            <a:pPr algn="ctr">
-              <a:defRPr sz="1300" b="1">
+            <a:pPr algn="l">
+              <a:defRPr sz="1400" b="1">
                 <a:solidFill>
                   <a:srgbClr val="F59E0B"/>
                 </a:solidFill>
@@ -7017,67 +9831,175 @@
             </a:r>
           </a:p>
           <a:p>
-            <a:pPr>
-              <a:spcBef>
-                <a:spcPts val="800"/>
-              </a:spcBef>
-              <a:defRPr sz="1100">
-                <a:solidFill>
-                  <a:srgbClr val="CBD5E1"/>
-                </a:solidFill>
-                <a:latin typeface="Calibri"/>
-              </a:defRPr>
-            </a:pPr>
-            <a:r>
-              <a:t>• 2-Set &amp; 3-Set Support: Switch seamlessly between 2-circle and 3-circle mathematical Venn diagrams.</a:t>
-            </a:r>
-          </a:p>
-          <a:p>
-            <a:pPr>
-              <a:spcBef>
-                <a:spcPts val="800"/>
-              </a:spcBef>
-              <a:defRPr sz="1100">
-                <a:solidFill>
-                  <a:srgbClr val="CBD5E1"/>
-                </a:solidFill>
-                <a:latin typeface="Calibri"/>
-              </a:defRPr>
-            </a:pPr>
-            <a:r>
-              <a:t>• 8-Region Partitioning: Elements are automatically sorted into their exact mathematical intersection zones.</a:t>
-            </a:r>
-          </a:p>
-          <a:p>
-            <a:pPr>
-              <a:spcBef>
-                <a:spcPts val="800"/>
-              </a:spcBef>
-              <a:defRPr sz="1100">
-                <a:solidFill>
-                  <a:srgbClr val="CBD5E1"/>
-                </a:solidFill>
-                <a:latin typeface="Calibri"/>
-              </a:defRPr>
-            </a:pPr>
-            <a:r>
-              <a:t>• Active Region Glow: The region matching your active operation lights up with a colorful visual glow.</a:t>
-            </a:r>
-          </a:p>
-          <a:p>
-            <a:pPr>
-              <a:spcBef>
-                <a:spcPts val="800"/>
-              </a:spcBef>
-              <a:defRPr sz="1100">
-                <a:solidFill>
-                  <a:srgbClr val="CBD5E1"/>
-                </a:solidFill>
-                <a:latin typeface="Calibri"/>
-              </a:defRPr>
-            </a:pPr>
-            <a:r>
-              <a:t>• Roster Notation: Displays clean bracket notation like {1, 2, 4, 5} alongside diagram graphics.</a:t>
+            <a:pPr algn="l">
+              <a:spcBef>
+                <a:spcPts val="200"/>
+              </a:spcBef>
+              <a:defRPr sz="1050" b="1">
+                <a:solidFill>
+                  <a:srgbClr val="FCD34D"/>
+                </a:solidFill>
+                <a:latin typeface="Calibri"/>
+              </a:defRPr>
+            </a:pPr>
+            <a:r>
+              <a:t>2-Set &amp; 3-Set Spatial Partitioning Engine</a:t>
+            </a:r>
+          </a:p>
+          <a:p>
+            <a:pPr algn="l">
+              <a:spcBef>
+                <a:spcPts val="1000"/>
+              </a:spcBef>
+              <a:spcAft>
+                <a:spcPts val="100"/>
+              </a:spcAft>
+            </a:pPr>
+            <a:r>
+              <a:rPr sz="1200" b="1">
+                <a:solidFill>
+                  <a:srgbClr val="FCD34D"/>
+                </a:solidFill>
+                <a:latin typeface="Calibri"/>
+              </a:rPr>
+              <a:t>• 2-Set &amp; 3-Set Support: </a:t>
+            </a:r>
+            <a:r>
+              <a:rPr sz="1100">
+                <a:solidFill>
+                  <a:srgbClr val="CBD5E1"/>
+                </a:solidFill>
+                <a:latin typeface="Calibri"/>
+              </a:rPr>
+              <a:t>Switch seamlessly between dual-circle and triple-circle mathematical Venn diagrams.</a:t>
+            </a:r>
+          </a:p>
+          <a:p>
+            <a:pPr algn="l">
+              <a:spcBef>
+                <a:spcPts val="1000"/>
+              </a:spcBef>
+              <a:spcAft>
+                <a:spcPts val="100"/>
+              </a:spcAft>
+            </a:pPr>
+            <a:r>
+              <a:rPr sz="1200" b="1">
+                <a:solidFill>
+                  <a:srgbClr val="FCD34D"/>
+                </a:solidFill>
+                <a:latin typeface="Calibri"/>
+              </a:rPr>
+              <a:t>• 8-Region Partitioning: </a:t>
+            </a:r>
+            <a:r>
+              <a:rPr sz="1100">
+                <a:solidFill>
+                  <a:srgbClr val="CBD5E1"/>
+                </a:solidFill>
+                <a:latin typeface="Calibri"/>
+              </a:rPr>
+              <a:t>Elements are automatically sorted into their exact mathematical intersection zones.</a:t>
+            </a:r>
+          </a:p>
+          <a:p>
+            <a:pPr algn="l">
+              <a:spcBef>
+                <a:spcPts val="1000"/>
+              </a:spcBef>
+              <a:spcAft>
+                <a:spcPts val="100"/>
+              </a:spcAft>
+            </a:pPr>
+            <a:r>
+              <a:rPr sz="1200" b="1">
+                <a:solidFill>
+                  <a:srgbClr val="FCD34D"/>
+                </a:solidFill>
+                <a:latin typeface="Calibri"/>
+              </a:rPr>
+              <a:t>• Active Region Glow: </a:t>
+            </a:r>
+            <a:r>
+              <a:rPr sz="1100">
+                <a:solidFill>
+                  <a:srgbClr val="CBD5E1"/>
+                </a:solidFill>
+                <a:latin typeface="Calibri"/>
+              </a:rPr>
+              <a:t>The region matching your active operation lights up with a colorful visual glow.</a:t>
+            </a:r>
+          </a:p>
+          <a:p>
+            <a:pPr algn="l">
+              <a:spcBef>
+                <a:spcPts val="1000"/>
+              </a:spcBef>
+              <a:spcAft>
+                <a:spcPts val="100"/>
+              </a:spcAft>
+            </a:pPr>
+            <a:r>
+              <a:rPr sz="1200" b="1">
+                <a:solidFill>
+                  <a:srgbClr val="FCD34D"/>
+                </a:solidFill>
+                <a:latin typeface="Calibri"/>
+              </a:rPr>
+              <a:t>• Dual Notation Views: </a:t>
+            </a:r>
+            <a:r>
+              <a:rPr sz="1100">
+                <a:solidFill>
+                  <a:srgbClr val="CBD5E1"/>
+                </a:solidFill>
+                <a:latin typeface="Calibri"/>
+              </a:rPr>
+              <a:t>Inspect results in formal mathematical set-roster notation alongside visual diagrams.</a:t>
+            </a:r>
+          </a:p>
+          <a:p>
+            <a:pPr algn="l">
+              <a:spcBef>
+                <a:spcPts val="1000"/>
+              </a:spcBef>
+              <a:spcAft>
+                <a:spcPts val="100"/>
+              </a:spcAft>
+            </a:pPr>
+            <a:r>
+              <a:rPr sz="1200" b="1">
+                <a:solidFill>
+                  <a:srgbClr val="FCD34D"/>
+                </a:solidFill>
+                <a:latin typeface="Calibri"/>
+              </a:rPr>
+              <a:t>• Real-Time Reactivity: </a:t>
+            </a:r>
+            <a:r>
+              <a:rPr sz="1100">
+                <a:solidFill>
+                  <a:srgbClr val="CBD5E1"/>
+                </a:solidFill>
+                <a:latin typeface="Calibri"/>
+              </a:rPr>
+              <a:t>Modifying set elements or dragging nodes instantly re-partitions Venn regions.</a:t>
+            </a:r>
+          </a:p>
+          <a:p>
+            <a:pPr algn="l">
+              <a:spcBef>
+                <a:spcPts val="1400"/>
+              </a:spcBef>
+              <a:defRPr sz="1000" b="1">
+                <a:solidFill>
+                  <a:srgbClr val="FCD34D"/>
+                </a:solidFill>
+                <a:latin typeface="Calibri"/>
+              </a:defRPr>
+            </a:pPr>
+            <a:r>
+              <a:t>Engine: Pure SVG Math Partitioning with Zero Client Lag</a:t>
             </a:r>
           </a:p>
         </p:txBody>
@@ -7151,8 +10073,8 @@
         </p:nvSpPr>
         <p:spPr>
           <a:xfrm>
-            <a:off x="731520" y="365760"/>
-            <a:ext cx="10725912" cy="1005840"/>
+            <a:off x="731520" y="320040"/>
+            <a:ext cx="10725912" cy="274320"/>
           </a:xfrm>
           <a:prstGeom prst="rect">
             <a:avLst/>
@@ -7160,13 +10082,13 @@
           <a:noFill/>
         </p:spPr>
         <p:txBody>
-          <a:bodyPr wrap="square" lIns="0" tIns="0" rIns="0" bIns="0">
+          <a:bodyPr wrap="square" anchor="t" lIns="0" rIns="0" tIns="0" bIns="0">
             <a:spAutoFit/>
           </a:bodyPr>
           <a:lstStyle/>
           <a:p>
-            <a:pPr>
-              <a:defRPr sz="1100" b="1">
+            <a:pPr algn="l">
+              <a:defRPr sz="1000" b="1">
                 <a:solidFill>
                   <a:srgbClr val="EB3C3C"/>
                 </a:solidFill>
@@ -7174,14 +10096,34 @@
               </a:defRPr>
             </a:pPr>
             <a:r>
-              <a:t>FORMAL LOGIC &amp; VERIFICATION</a:t>
-            </a:r>
-          </a:p>
-          <a:p>
-            <a:pPr>
-              <a:spcBef>
-                <a:spcPts val="300"/>
-              </a:spcBef>
+              <a:t>CORE DOMAIN 2 • FORMAL LOGIC</a:t>
+            </a:r>
+          </a:p>
+        </p:txBody>
+      </p:sp>
+      <p:sp>
+        <p:nvSpPr>
+          <p:cNvPr id="4" name="TextBox 3"/>
+          <p:cNvSpPr txBox="1"/>
+          <p:nvPr/>
+        </p:nvSpPr>
+        <p:spPr>
+          <a:xfrm>
+            <a:off x="731520" y="594360"/>
+            <a:ext cx="10725912" cy="594360"/>
+          </a:xfrm>
+          <a:prstGeom prst="rect">
+            <a:avLst/>
+          </a:prstGeom>
+          <a:noFill/>
+        </p:spPr>
+        <p:txBody>
+          <a:bodyPr wrap="square" anchor="t" lIns="0" rIns="0" tIns="0" bIns="0">
+            <a:spAutoFit/>
+          </a:bodyPr>
+          <a:lstStyle/>
+          <a:p>
+            <a:pPr algn="l">
               <a:defRPr sz="2200" b="1">
                 <a:solidFill>
                   <a:srgbClr val="FFFFFF"/>
@@ -7190,21 +10132,21 @@
               </a:defRPr>
             </a:pPr>
             <a:r>
-              <a:t>Module 2: Propositional Logic &amp; Truth Tables (Engineered by Ghansham)</a:t>
-            </a:r>
-          </a:p>
-        </p:txBody>
-      </p:sp>
-      <p:sp>
-        <p:nvSpPr>
-          <p:cNvPr id="4" name="Rectangle 3"/>
+              <a:t>Module 2: Propositional Logic &amp; Truth Tables (Ghansham's Contribution)</a:t>
+            </a:r>
+          </a:p>
+        </p:txBody>
+      </p:sp>
+      <p:sp>
+        <p:nvSpPr>
+          <p:cNvPr id="5" name="Rectangle 4"/>
           <p:cNvSpPr/>
           <p:nvPr/>
         </p:nvSpPr>
         <p:spPr>
           <a:xfrm>
-            <a:off x="731520" y="1353312"/>
-            <a:ext cx="10725912" cy="36576"/>
+            <a:off x="731520" y="1234440"/>
+            <a:ext cx="10725912" cy="32004"/>
           </a:xfrm>
           <a:prstGeom prst="rect">
             <a:avLst/>
@@ -7240,22 +10182,24 @@
       </p:sp>
       <p:sp>
         <p:nvSpPr>
-          <p:cNvPr id="5" name="Rounded Rectangle 4"/>
+          <p:cNvPr id="6" name="Rounded Rectangle 5"/>
           <p:cNvSpPr/>
           <p:nvPr/>
         </p:nvSpPr>
         <p:spPr>
           <a:xfrm>
-            <a:off x="731520" y="1645920"/>
-            <a:ext cx="5212080" cy="4663440"/>
+            <a:off x="731520" y="1508760"/>
+            <a:ext cx="5212080" cy="4892040"/>
           </a:xfrm>
           <a:prstGeom prst="roundRect">
-            <a:avLst/>
+            <a:avLst>
+              <a:gd name="adj" fmla="val 4000"/>
+            </a:avLst>
           </a:prstGeom>
           <a:solidFill>
             <a:srgbClr val="191E2A"/>
           </a:solidFill>
-          <a:ln w="19050">
+          <a:ln w="22225">
             <a:solidFill>
               <a:srgbClr val="A855F7"/>
             </a:solidFill>
@@ -7276,11 +10220,11 @@
           </a:fontRef>
         </p:style>
         <p:txBody>
-          <a:bodyPr rtlCol="0" anchor="ctr" wrap="square" lIns="320040" rIns="320040" tIns="274320"/>
+          <a:bodyPr rtlCol="0" anchor="t" wrap="square" lIns="256032" rIns="256032" tIns="228600" bIns="182880"/>
           <a:lstStyle/>
           <a:p>
-            <a:pPr algn="ctr">
-              <a:defRPr sz="1300" b="1">
+            <a:pPr algn="l">
+              <a:defRPr sz="1400" b="1">
                 <a:solidFill>
                   <a:srgbClr val="A855F7"/>
                 </a:solidFill>
@@ -7288,93 +10232,203 @@
               </a:defRPr>
             </a:pPr>
             <a:r>
-              <a:t>LOGIC GATES CANVAS</a:t>
-            </a:r>
-          </a:p>
-          <a:p>
-            <a:pPr>
-              <a:spcBef>
-                <a:spcPts val="800"/>
-              </a:spcBef>
-              <a:defRPr sz="1100">
-                <a:solidFill>
-                  <a:srgbClr val="FFFFFF"/>
-                </a:solidFill>
-                <a:latin typeface="Calibri"/>
-              </a:defRPr>
-            </a:pPr>
-            <a:r>
-              <a:t>• Proposition Variables: Place boolean inputs P, Q, R with simple True / False clickable toggle buttons.</a:t>
-            </a:r>
-          </a:p>
-          <a:p>
-            <a:pPr>
-              <a:spcBef>
-                <a:spcPts val="800"/>
-              </a:spcBef>
-              <a:defRPr sz="1100">
-                <a:solidFill>
-                  <a:srgbClr val="FFFFFF"/>
-                </a:solidFill>
-                <a:latin typeface="Calibri"/>
-              </a:defRPr>
-            </a:pPr>
-            <a:r>
-              <a:t>• Standard Logic Gates: Connect variables through AND (∧), OR (∨), NOT (¬), IMPLIES (→), and IFF (↔).</a:t>
-            </a:r>
-          </a:p>
-          <a:p>
-            <a:pPr>
-              <a:spcBef>
-                <a:spcPts val="800"/>
-              </a:spcBef>
-              <a:defRPr sz="1100">
-                <a:solidFill>
-                  <a:srgbClr val="FFFFFF"/>
-                </a:solidFill>
-                <a:latin typeface="Calibri"/>
-              </a:defRPr>
-            </a:pPr>
-            <a:r>
-              <a:t>• Live Value Propagation: Toggle any variable and watch True/False values travel through the gates immediately.</a:t>
-            </a:r>
-          </a:p>
-          <a:p>
-            <a:pPr>
-              <a:spcBef>
-                <a:spcPts val="800"/>
-              </a:spcBef>
-              <a:defRPr sz="1100">
-                <a:solidFill>
-                  <a:srgbClr val="FFFFFF"/>
-                </a:solidFill>
-                <a:latin typeface="Calibri"/>
-              </a:defRPr>
-            </a:pPr>
-            <a:r>
-              <a:t>• Formula Synthesizer: Automatically generates standard mathematical Well-Formed Formulas (WFF).</a:t>
-            </a:r>
-          </a:p>
-        </p:txBody>
-      </p:sp>
-      <p:sp>
-        <p:nvSpPr>
-          <p:cNvPr id="6" name="Rounded Rectangle 5"/>
+              <a:t>LOGIC GATES CANVAS &amp; AST ENGINE</a:t>
+            </a:r>
+          </a:p>
+          <a:p>
+            <a:pPr algn="l">
+              <a:spcBef>
+                <a:spcPts val="200"/>
+              </a:spcBef>
+              <a:defRPr sz="1050" b="1">
+                <a:solidFill>
+                  <a:srgbClr val="FCD34D"/>
+                </a:solidFill>
+                <a:latin typeface="Calibri"/>
+              </a:defRPr>
+            </a:pPr>
+            <a:r>
+              <a:t>Boolean DAG Signal Propagation &amp; WFF Builder</a:t>
+            </a:r>
+          </a:p>
+          <a:p>
+            <a:pPr algn="l">
+              <a:spcBef>
+                <a:spcPts val="1000"/>
+              </a:spcBef>
+              <a:spcAft>
+                <a:spcPts val="100"/>
+              </a:spcAft>
+            </a:pPr>
+            <a:r>
+              <a:rPr sz="1200" b="1">
+                <a:solidFill>
+                  <a:srgbClr val="E9D5FF"/>
+                </a:solidFill>
+                <a:latin typeface="Calibri"/>
+              </a:rPr>
+              <a:t>• Proposition Variables: </a:t>
+            </a:r>
+            <a:r>
+              <a:rPr sz="1100">
+                <a:solidFill>
+                  <a:srgbClr val="CBD5E1"/>
+                </a:solidFill>
+                <a:latin typeface="Calibri"/>
+              </a:rPr>
+              <a:t>Place boolean inputs (P, Q, R, S) with simple True / False clickable toggle buttons.</a:t>
+            </a:r>
+          </a:p>
+          <a:p>
+            <a:pPr algn="l">
+              <a:spcBef>
+                <a:spcPts val="1000"/>
+              </a:spcBef>
+              <a:spcAft>
+                <a:spcPts val="100"/>
+              </a:spcAft>
+            </a:pPr>
+            <a:r>
+              <a:rPr sz="1200" b="1">
+                <a:solidFill>
+                  <a:srgbClr val="E9D5FF"/>
+                </a:solidFill>
+                <a:latin typeface="Calibri"/>
+              </a:rPr>
+              <a:t>• Complete Operator Library: </a:t>
+            </a:r>
+            <a:r>
+              <a:rPr sz="1100">
+                <a:solidFill>
+                  <a:srgbClr val="CBD5E1"/>
+                </a:solidFill>
+                <a:latin typeface="Calibri"/>
+              </a:rPr>
+              <a:t>Connect variables through AND (∧), OR (∨), NOT (¬), IMPLIES (→), and IFF (↔).</a:t>
+            </a:r>
+          </a:p>
+          <a:p>
+            <a:pPr algn="l">
+              <a:spcBef>
+                <a:spcPts val="1000"/>
+              </a:spcBef>
+              <a:spcAft>
+                <a:spcPts val="100"/>
+              </a:spcAft>
+            </a:pPr>
+            <a:r>
+              <a:rPr sz="1200" b="1">
+                <a:solidFill>
+                  <a:srgbClr val="E9D5FF"/>
+                </a:solidFill>
+                <a:latin typeface="Calibri"/>
+              </a:rPr>
+              <a:t>• Live Signal Propagation: </a:t>
+            </a:r>
+            <a:r>
+              <a:rPr sz="1100">
+                <a:solidFill>
+                  <a:srgbClr val="CBD5E1"/>
+                </a:solidFill>
+                <a:latin typeface="Calibri"/>
+              </a:rPr>
+              <a:t>Toggle any input and watch True/False signals travel through the DAG immediately.</a:t>
+            </a:r>
+          </a:p>
+          <a:p>
+            <a:pPr algn="l">
+              <a:spcBef>
+                <a:spcPts val="1000"/>
+              </a:spcBef>
+              <a:spcAft>
+                <a:spcPts val="100"/>
+              </a:spcAft>
+            </a:pPr>
+            <a:r>
+              <a:rPr sz="1200" b="1">
+                <a:solidFill>
+                  <a:srgbClr val="E9D5FF"/>
+                </a:solidFill>
+                <a:latin typeface="Calibri"/>
+              </a:rPr>
+              <a:t>• Formula Synthesizer: </a:t>
+            </a:r>
+            <a:r>
+              <a:rPr sz="1100">
+                <a:solidFill>
+                  <a:srgbClr val="CBD5E1"/>
+                </a:solidFill>
+                <a:latin typeface="Calibri"/>
+              </a:rPr>
+              <a:t>Automatically generates canonical mathematical Well-Formed Formulas (WFF).</a:t>
+            </a:r>
+          </a:p>
+          <a:p>
+            <a:pPr algn="l">
+              <a:spcBef>
+                <a:spcPts val="1000"/>
+              </a:spcBef>
+              <a:spcAft>
+                <a:spcPts val="100"/>
+              </a:spcAft>
+            </a:pPr>
+            <a:r>
+              <a:rPr sz="1200" b="1">
+                <a:solidFill>
+                  <a:srgbClr val="E9D5FF"/>
+                </a:solidFill>
+                <a:latin typeface="Calibri"/>
+              </a:rPr>
+              <a:t>• Interactive Truth Probes: </a:t>
+            </a:r>
+            <a:r>
+              <a:rPr sz="1100">
+                <a:solidFill>
+                  <a:srgbClr val="CBD5E1"/>
+                </a:solidFill>
+                <a:latin typeface="Calibri"/>
+              </a:rPr>
+              <a:t>Hover over intermediate wires to inspect local sub-formula evaluations.</a:t>
+            </a:r>
+          </a:p>
+          <a:p>
+            <a:pPr algn="l">
+              <a:spcBef>
+                <a:spcPts val="1400"/>
+              </a:spcBef>
+              <a:defRPr sz="1000" b="1">
+                <a:solidFill>
+                  <a:srgbClr val="E9D5FF"/>
+                </a:solidFill>
+                <a:latin typeface="Calibri"/>
+              </a:defRPr>
+            </a:pPr>
+            <a:r>
+              <a:t>Syntax: Well-Formed Formulas (WFF) with Real-Time AST Validation</a:t>
+            </a:r>
+          </a:p>
+        </p:txBody>
+      </p:sp>
+      <p:sp>
+        <p:nvSpPr>
+          <p:cNvPr id="7" name="Rounded Rectangle 6"/>
           <p:cNvSpPr/>
           <p:nvPr/>
         </p:nvSpPr>
         <p:spPr>
           <a:xfrm>
-            <a:off x="6217920" y="1645920"/>
-            <a:ext cx="5212080" cy="4663440"/>
+            <a:off x="6245352" y="1508760"/>
+            <a:ext cx="5212080" cy="4892040"/>
           </a:xfrm>
           <a:prstGeom prst="roundRect">
-            <a:avLst/>
+            <a:avLst>
+              <a:gd name="adj" fmla="val 4000"/>
+            </a:avLst>
           </a:prstGeom>
           <a:solidFill>
             <a:srgbClr val="191E2A"/>
           </a:solidFill>
-          <a:ln w="19050">
+          <a:ln w="22225">
             <a:solidFill>
               <a:srgbClr val="10B981"/>
             </a:solidFill>
@@ -7395,11 +10449,11 @@
           </a:fontRef>
         </p:style>
         <p:txBody>
-          <a:bodyPr rtlCol="0" anchor="ctr" wrap="square" lIns="320040" rIns="320040" tIns="274320"/>
+          <a:bodyPr rtlCol="0" anchor="t" wrap="square" lIns="256032" rIns="256032" tIns="228600" bIns="182880"/>
           <a:lstStyle/>
           <a:p>
-            <a:pPr algn="ctr">
-              <a:defRPr sz="1300" b="1">
+            <a:pPr algn="l">
+              <a:defRPr sz="1400" b="1">
                 <a:solidFill>
                   <a:srgbClr val="10B981"/>
                 </a:solidFill>
@@ -7411,67 +10465,175 @@
             </a:r>
           </a:p>
           <a:p>
-            <a:pPr>
-              <a:spcBef>
-                <a:spcPts val="800"/>
-              </a:spcBef>
-              <a:defRPr sz="1100">
-                <a:solidFill>
-                  <a:srgbClr val="CBD5E1"/>
-                </a:solidFill>
-                <a:latin typeface="Calibri"/>
-              </a:defRPr>
-            </a:pPr>
-            <a:r>
-              <a:t>• Full Truth Tables: Generates complete 2^n interpretation tables showing every combination of T and F.</a:t>
-            </a:r>
-          </a:p>
-          <a:p>
-            <a:pPr>
-              <a:spcBef>
-                <a:spcPts val="800"/>
-              </a:spcBef>
-              <a:defRPr sz="1100">
-                <a:solidFill>
-                  <a:srgbClr val="CBD5E1"/>
-                </a:solidFill>
-                <a:latin typeface="Calibri"/>
-              </a:defRPr>
-            </a:pPr>
-            <a:r>
-              <a:t>• Canonical DNF &amp; CNF: Automatically calculates Disjunctive and Conjunctive Normal Forms for the formula.</a:t>
-            </a:r>
-          </a:p>
-          <a:p>
-            <a:pPr>
-              <a:spcBef>
-                <a:spcPts val="800"/>
-              </a:spcBef>
-              <a:defRPr sz="1100">
-                <a:solidFill>
-                  <a:srgbClr val="CBD5E1"/>
-                </a:solidFill>
-                <a:latin typeface="Calibri"/>
-              </a:defRPr>
-            </a:pPr>
-            <a:r>
-              <a:t>• Tautology Checker: Instantly verifies if an expression is always True (Tautology) or always False (Contradiction).</a:t>
-            </a:r>
-          </a:p>
-          <a:p>
-            <a:pPr>
-              <a:spcBef>
-                <a:spcPts val="800"/>
-              </a:spcBef>
-              <a:defRPr sz="1100">
-                <a:solidFill>
-                  <a:srgbClr val="CBD5E1"/>
-                </a:solidFill>
-                <a:latin typeface="Calibri"/>
-              </a:defRPr>
-            </a:pPr>
-            <a:r>
-              <a:t>• Counter-Example Finder: If a theorem is invalid, it highlights the exact variable assignment that breaks it.</a:t>
+            <a:pPr algn="l">
+              <a:spcBef>
+                <a:spcPts val="200"/>
+              </a:spcBef>
+              <a:defRPr sz="1050" b="1">
+                <a:solidFill>
+                  <a:srgbClr val="FCD34D"/>
+                </a:solidFill>
+                <a:latin typeface="Calibri"/>
+              </a:defRPr>
+            </a:pPr>
+            <a:r>
+              <a:t>2ⁿ Exhaustive Interpretation &amp; Normal Forms</a:t>
+            </a:r>
+          </a:p>
+          <a:p>
+            <a:pPr algn="l">
+              <a:spcBef>
+                <a:spcPts val="1000"/>
+              </a:spcBef>
+              <a:spcAft>
+                <a:spcPts val="100"/>
+              </a:spcAft>
+            </a:pPr>
+            <a:r>
+              <a:rPr sz="1200" b="1">
+                <a:solidFill>
+                  <a:srgbClr val="A7F3D0"/>
+                </a:solidFill>
+                <a:latin typeface="Calibri"/>
+              </a:rPr>
+              <a:t>• Full 2^n Truth Tables: </a:t>
+            </a:r>
+            <a:r>
+              <a:rPr sz="1100">
+                <a:solidFill>
+                  <a:srgbClr val="CBD5E1"/>
+                </a:solidFill>
+                <a:latin typeface="Calibri"/>
+              </a:rPr>
+              <a:t>Generates complete 2^n interpretation tables showing every combination of T and F.</a:t>
+            </a:r>
+          </a:p>
+          <a:p>
+            <a:pPr algn="l">
+              <a:spcBef>
+                <a:spcPts val="1000"/>
+              </a:spcBef>
+              <a:spcAft>
+                <a:spcPts val="100"/>
+              </a:spcAft>
+            </a:pPr>
+            <a:r>
+              <a:rPr sz="1200" b="1">
+                <a:solidFill>
+                  <a:srgbClr val="A7F3D0"/>
+                </a:solidFill>
+                <a:latin typeface="Calibri"/>
+              </a:rPr>
+              <a:t>• Canonical DNF &amp; CNF: </a:t>
+            </a:r>
+            <a:r>
+              <a:rPr sz="1100">
+                <a:solidFill>
+                  <a:srgbClr val="CBD5E1"/>
+                </a:solidFill>
+                <a:latin typeface="Calibri"/>
+              </a:rPr>
+              <a:t>Automatically calculates Disjunctive and Conjunctive Normal Forms for any expression.</a:t>
+            </a:r>
+          </a:p>
+          <a:p>
+            <a:pPr algn="l">
+              <a:spcBef>
+                <a:spcPts val="1000"/>
+              </a:spcBef>
+              <a:spcAft>
+                <a:spcPts val="100"/>
+              </a:spcAft>
+            </a:pPr>
+            <a:r>
+              <a:rPr sz="1200" b="1">
+                <a:solidFill>
+                  <a:srgbClr val="A7F3D0"/>
+                </a:solidFill>
+                <a:latin typeface="Calibri"/>
+              </a:rPr>
+              <a:t>• Tautology Checker: </a:t>
+            </a:r>
+            <a:r>
+              <a:rPr sz="1100">
+                <a:solidFill>
+                  <a:srgbClr val="CBD5E1"/>
+                </a:solidFill>
+                <a:latin typeface="Calibri"/>
+              </a:rPr>
+              <a:t>Instantly verifies if an expression is always True (Tautology) or False (Contradiction).</a:t>
+            </a:r>
+          </a:p>
+          <a:p>
+            <a:pPr algn="l">
+              <a:spcBef>
+                <a:spcPts val="1000"/>
+              </a:spcBef>
+              <a:spcAft>
+                <a:spcPts val="100"/>
+              </a:spcAft>
+            </a:pPr>
+            <a:r>
+              <a:rPr sz="1200" b="1">
+                <a:solidFill>
+                  <a:srgbClr val="A7F3D0"/>
+                </a:solidFill>
+                <a:latin typeface="Calibri"/>
+              </a:rPr>
+              <a:t>• Counter-Example Finder: </a:t>
+            </a:r>
+            <a:r>
+              <a:rPr sz="1100">
+                <a:solidFill>
+                  <a:srgbClr val="CBD5E1"/>
+                </a:solidFill>
+                <a:latin typeface="Calibri"/>
+              </a:rPr>
+              <a:t>If a theorem is invalid, it highlights the exact variable assignment that breaks it.</a:t>
+            </a:r>
+          </a:p>
+          <a:p>
+            <a:pPr algn="l">
+              <a:spcBef>
+                <a:spcPts val="1000"/>
+              </a:spcBef>
+              <a:spcAft>
+                <a:spcPts val="100"/>
+              </a:spcAft>
+            </a:pPr>
+            <a:r>
+              <a:rPr sz="1200" b="1">
+                <a:solidFill>
+                  <a:srgbClr val="A7F3D0"/>
+                </a:solidFill>
+                <a:latin typeface="Calibri"/>
+              </a:rPr>
+              <a:t>• LaTeX Export: </a:t>
+            </a:r>
+            <a:r>
+              <a:rPr sz="1100">
+                <a:solidFill>
+                  <a:srgbClr val="CBD5E1"/>
+                </a:solidFill>
+                <a:latin typeface="Calibri"/>
+              </a:rPr>
+              <a:t>Renders publication-ready LaTeX syntax for class assignments, quizzes, and papers.</a:t>
+            </a:r>
+          </a:p>
+          <a:p>
+            <a:pPr algn="l">
+              <a:spcBef>
+                <a:spcPts val="1400"/>
+              </a:spcBef>
+              <a:defRPr sz="1000" b="1">
+                <a:solidFill>
+                  <a:srgbClr val="A7F3D0"/>
+                </a:solidFill>
+                <a:latin typeface="Calibri"/>
+              </a:defRPr>
+            </a:pPr>
+            <a:r>
+              <a:t>Output: Exhaustive 2ⁿ Table + Canonical Forms + LaTeX Math</a:t>
             </a:r>
           </a:p>
         </p:txBody>
@@ -7545,8 +10707,8 @@
         </p:nvSpPr>
         <p:spPr>
           <a:xfrm>
-            <a:off x="731520" y="365760"/>
-            <a:ext cx="10725912" cy="1005840"/>
+            <a:off x="731520" y="320040"/>
+            <a:ext cx="10725912" cy="274320"/>
           </a:xfrm>
           <a:prstGeom prst="rect">
             <a:avLst/>
@@ -7554,13 +10716,13 @@
           <a:noFill/>
         </p:spPr>
         <p:txBody>
-          <a:bodyPr wrap="square" lIns="0" tIns="0" rIns="0" bIns="0">
+          <a:bodyPr wrap="square" anchor="t" lIns="0" rIns="0" tIns="0" bIns="0">
             <a:spAutoFit/>
           </a:bodyPr>
           <a:lstStyle/>
           <a:p>
-            <a:pPr>
-              <a:defRPr sz="1100" b="1">
+            <a:pPr algn="l">
+              <a:defRPr sz="1000" b="1">
                 <a:solidFill>
                   <a:srgbClr val="EB3C3C"/>
                 </a:solidFill>
@@ -7568,14 +10730,34 @@
               </a:defRPr>
             </a:pPr>
             <a:r>
-              <a:t>ADVANCED THEORETICAL TOOLS</a:t>
-            </a:r>
-          </a:p>
-          <a:p>
-            <a:pPr>
-              <a:spcBef>
-                <a:spcPts val="300"/>
-              </a:spcBef>
+              <a:t>CORE DOMAIN 3 • PROOF SOLVERS</a:t>
+            </a:r>
+          </a:p>
+        </p:txBody>
+      </p:sp>
+      <p:sp>
+        <p:nvSpPr>
+          <p:cNvPr id="4" name="TextBox 3"/>
+          <p:cNvSpPr txBox="1"/>
+          <p:nvPr/>
+        </p:nvSpPr>
+        <p:spPr>
+          <a:xfrm>
+            <a:off x="731520" y="594360"/>
+            <a:ext cx="10725912" cy="594360"/>
+          </a:xfrm>
+          <a:prstGeom prst="rect">
+            <a:avLst/>
+          </a:prstGeom>
+          <a:noFill/>
+        </p:spPr>
+        <p:txBody>
+          <a:bodyPr wrap="square" anchor="t" lIns="0" rIns="0" tIns="0" bIns="0">
+            <a:spAutoFit/>
+          </a:bodyPr>
+          <a:lstStyle/>
+          <a:p>
+            <a:pPr algn="l">
               <a:defRPr sz="2200" b="1">
                 <a:solidFill>
                   <a:srgbClr val="FFFFFF"/>
@@ -7584,21 +10766,21 @@
               </a:defRPr>
             </a:pPr>
             <a:r>
-              <a:t>Module 3: Step-by-Step Mathematical Proof Solvers (Engineered by Hari)</a:t>
-            </a:r>
-          </a:p>
-        </p:txBody>
-      </p:sp>
-      <p:sp>
-        <p:nvSpPr>
-          <p:cNvPr id="4" name="Rectangle 3"/>
+              <a:t>Module 3: Step-by-Step Proof &amp; Countability Solvers (Hari's Contribution)</a:t>
+            </a:r>
+          </a:p>
+        </p:txBody>
+      </p:sp>
+      <p:sp>
+        <p:nvSpPr>
+          <p:cNvPr id="5" name="Rectangle 4"/>
           <p:cNvSpPr/>
           <p:nvPr/>
         </p:nvSpPr>
         <p:spPr>
           <a:xfrm>
-            <a:off x="731520" y="1353312"/>
-            <a:ext cx="10725912" cy="36576"/>
+            <a:off x="731520" y="1234440"/>
+            <a:ext cx="10725912" cy="32004"/>
           </a:xfrm>
           <a:prstGeom prst="rect">
             <a:avLst/>
@@ -7634,22 +10816,24 @@
       </p:sp>
       <p:sp>
         <p:nvSpPr>
-          <p:cNvPr id="5" name="Rounded Rectangle 4"/>
+          <p:cNvPr id="6" name="Rounded Rectangle 5"/>
           <p:cNvSpPr/>
           <p:nvPr/>
         </p:nvSpPr>
         <p:spPr>
           <a:xfrm>
-            <a:off x="731520" y="1645920"/>
-            <a:ext cx="3410712" cy="4663440"/>
+            <a:off x="731520" y="1508760"/>
+            <a:ext cx="3410712" cy="4892040"/>
           </a:xfrm>
           <a:prstGeom prst="roundRect">
-            <a:avLst/>
+            <a:avLst>
+              <a:gd name="adj" fmla="val 4000"/>
+            </a:avLst>
           </a:prstGeom>
           <a:solidFill>
             <a:srgbClr val="191E2A"/>
           </a:solidFill>
-          <a:ln w="19050">
+          <a:ln w="22225">
             <a:solidFill>
               <a:srgbClr val="F59E0B"/>
             </a:solidFill>
@@ -7670,11 +10854,11 @@
           </a:fontRef>
         </p:style>
         <p:txBody>
-          <a:bodyPr rtlCol="0" anchor="ctr" wrap="square" lIns="228600" rIns="228600" tIns="274320"/>
+          <a:bodyPr rtlCol="0" anchor="t" wrap="square" lIns="201168" rIns="201168" tIns="201168" bIns="137160"/>
           <a:lstStyle/>
           <a:p>
-            <a:pPr algn="ctr">
-              <a:defRPr sz="1200" b="1">
+            <a:pPr algn="l">
+              <a:defRPr sz="1250" b="1">
                 <a:solidFill>
                   <a:srgbClr val="F59E0B"/>
                 </a:solidFill>
@@ -7686,73 +10870,171 @@
             </a:r>
           </a:p>
           <a:p>
-            <a:pPr>
-              <a:spcBef>
-                <a:spcPts val="800"/>
-              </a:spcBef>
-              <a:defRPr sz="1050">
-                <a:solidFill>
-                  <a:srgbClr val="CBD5E1"/>
-                </a:solidFill>
-                <a:latin typeface="Calibri"/>
-              </a:defRPr>
-            </a:pPr>
-            <a:r>
-              <a:t>• Step-by-step arithmetic: Solves survey and counting problems with 2 and 3 sets.</a:t>
-            </a:r>
-          </a:p>
-          <a:p>
-            <a:pPr>
-              <a:spcBef>
-                <a:spcPts val="800"/>
-              </a:spcBef>
-              <a:defRPr sz="1050">
-                <a:solidFill>
-                  <a:srgbClr val="CBD5E1"/>
-                </a:solidFill>
-                <a:latin typeface="Calibri"/>
-              </a:defRPr>
-            </a:pPr>
-            <a:r>
-              <a:t>• Formula breakdown: Shows |A ∪ B| = |A| + |B| - |A ∩ B| step-by-step.</a:t>
-            </a:r>
-          </a:p>
-          <a:p>
-            <a:pPr>
-              <a:spcBef>
-                <a:spcPts val="800"/>
-              </a:spcBef>
-              <a:defRPr sz="1050">
-                <a:solidFill>
-                  <a:srgbClr val="CBD5E1"/>
-                </a:solidFill>
-                <a:latin typeface="Calibri"/>
-              </a:defRPr>
-            </a:pPr>
-            <a:r>
-              <a:t>• Real-world presets: Includes sample problems (sports, languages, courses).</a:t>
-            </a:r>
-          </a:p>
-        </p:txBody>
-      </p:sp>
-      <p:sp>
-        <p:nvSpPr>
-          <p:cNvPr id="6" name="Rounded Rectangle 5"/>
+            <a:pPr algn="l">
+              <a:spcBef>
+                <a:spcPts val="200"/>
+              </a:spcBef>
+              <a:defRPr sz="950" b="1">
+                <a:solidFill>
+                  <a:srgbClr val="FFFFFF"/>
+                </a:solidFill>
+                <a:latin typeface="Calibri"/>
+              </a:defRPr>
+            </a:pPr>
+            <a:r>
+              <a:t>Cardinality &amp; Survey Counting Solver</a:t>
+            </a:r>
+          </a:p>
+          <a:p>
+            <a:pPr algn="l">
+              <a:spcBef>
+                <a:spcPts val="900"/>
+              </a:spcBef>
+              <a:spcAft>
+                <a:spcPts val="100"/>
+              </a:spcAft>
+            </a:pPr>
+            <a:r>
+              <a:rPr sz="1100" b="1">
+                <a:solidFill>
+                  <a:srgbClr val="FCD34D"/>
+                </a:solidFill>
+                <a:latin typeface="Calibri"/>
+              </a:rPr>
+              <a:t>• Arithmetic Solver: </a:t>
+            </a:r>
+            <a:r>
+              <a:rPr sz="1000">
+                <a:solidFill>
+                  <a:srgbClr val="CBD5E1"/>
+                </a:solidFill>
+                <a:latin typeface="Calibri"/>
+              </a:rPr>
+              <a:t>Solves survey and cardinality counting problems for 2 and 3 sets.</a:t>
+            </a:r>
+          </a:p>
+          <a:p>
+            <a:pPr algn="l">
+              <a:spcBef>
+                <a:spcPts val="900"/>
+              </a:spcBef>
+              <a:spcAft>
+                <a:spcPts val="100"/>
+              </a:spcAft>
+            </a:pPr>
+            <a:r>
+              <a:rPr sz="1100" b="1">
+                <a:solidFill>
+                  <a:srgbClr val="FCD34D"/>
+                </a:solidFill>
+                <a:latin typeface="Calibri"/>
+              </a:rPr>
+              <a:t>• Formula Steps: </a:t>
+            </a:r>
+            <a:r>
+              <a:rPr sz="1000">
+                <a:solidFill>
+                  <a:srgbClr val="CBD5E1"/>
+                </a:solidFill>
+                <a:latin typeface="Calibri"/>
+              </a:rPr>
+              <a:t>Breaks down |A ∪ B ∪ C| = Σ|A| - Σ|A ∩ B| + |A ∩ B ∩ C| step-by-step.</a:t>
+            </a:r>
+          </a:p>
+          <a:p>
+            <a:pPr algn="l">
+              <a:spcBef>
+                <a:spcPts val="900"/>
+              </a:spcBef>
+              <a:spcAft>
+                <a:spcPts val="100"/>
+              </a:spcAft>
+            </a:pPr>
+            <a:r>
+              <a:rPr sz="1100" b="1">
+                <a:solidFill>
+                  <a:srgbClr val="FCD34D"/>
+                </a:solidFill>
+                <a:latin typeface="Calibri"/>
+              </a:rPr>
+              <a:t>• Variable Sliders: </a:t>
+            </a:r>
+            <a:r>
+              <a:rPr sz="1000">
+                <a:solidFill>
+                  <a:srgbClr val="CBD5E1"/>
+                </a:solidFill>
+                <a:latin typeface="Calibri"/>
+              </a:rPr>
+              <a:t>Adjust set sizes and overlap counts with live union recomputation.</a:t>
+            </a:r>
+          </a:p>
+          <a:p>
+            <a:pPr algn="l">
+              <a:spcBef>
+                <a:spcPts val="900"/>
+              </a:spcBef>
+              <a:spcAft>
+                <a:spcPts val="100"/>
+              </a:spcAft>
+            </a:pPr>
+            <a:r>
+              <a:rPr sz="1100" b="1">
+                <a:solidFill>
+                  <a:srgbClr val="FCD34D"/>
+                </a:solidFill>
+                <a:latin typeface="Calibri"/>
+              </a:rPr>
+              <a:t>• Problem Presets: </a:t>
+            </a:r>
+            <a:r>
+              <a:rPr sz="1000">
+                <a:solidFill>
+                  <a:srgbClr val="CBD5E1"/>
+                </a:solidFill>
+                <a:latin typeface="Calibri"/>
+              </a:rPr>
+              <a:t>Includes real-world examples (student courses, languages, sports).</a:t>
+            </a:r>
+          </a:p>
+          <a:p>
+            <a:pPr algn="l">
+              <a:spcBef>
+                <a:spcPts val="1200"/>
+              </a:spcBef>
+              <a:defRPr sz="850" b="1">
+                <a:solidFill>
+                  <a:srgbClr val="FCD34D"/>
+                </a:solidFill>
+                <a:latin typeface="Calibri"/>
+              </a:defRPr>
+            </a:pPr>
+            <a:r>
+              <a:t>Solver: Step-by-step cardinality steps</a:t>
+            </a:r>
+          </a:p>
+        </p:txBody>
+      </p:sp>
+      <p:sp>
+        <p:nvSpPr>
+          <p:cNvPr id="7" name="Rounded Rectangle 6"/>
           <p:cNvSpPr/>
           <p:nvPr/>
         </p:nvSpPr>
         <p:spPr>
           <a:xfrm>
-            <a:off x="4389120" y="1645920"/>
-            <a:ext cx="3410712" cy="4663440"/>
+            <a:off x="4389120" y="1508760"/>
+            <a:ext cx="3410712" cy="4892040"/>
           </a:xfrm>
           <a:prstGeom prst="roundRect">
-            <a:avLst/>
+            <a:avLst>
+              <a:gd name="adj" fmla="val 4000"/>
+            </a:avLst>
           </a:prstGeom>
           <a:solidFill>
             <a:srgbClr val="191E2A"/>
           </a:solidFill>
-          <a:ln w="19050">
+          <a:ln w="22225">
             <a:solidFill>
               <a:srgbClr val="38BDF8"/>
             </a:solidFill>
@@ -7773,11 +11055,11 @@
           </a:fontRef>
         </p:style>
         <p:txBody>
-          <a:bodyPr rtlCol="0" anchor="ctr" wrap="square" lIns="228600" rIns="228600" tIns="274320"/>
+          <a:bodyPr rtlCol="0" anchor="t" wrap="square" lIns="201168" rIns="201168" tIns="201168" bIns="137160"/>
           <a:lstStyle/>
           <a:p>
-            <a:pPr algn="ctr">
-              <a:defRPr sz="1200" b="1">
+            <a:pPr algn="l">
+              <a:defRPr sz="1250" b="1">
                 <a:solidFill>
                   <a:srgbClr val="38BDF8"/>
                 </a:solidFill>
@@ -7789,11 +11071,11 @@
             </a:r>
           </a:p>
           <a:p>
-            <a:pPr>
-              <a:spcBef>
-                <a:spcPts val="800"/>
-              </a:spcBef>
-              <a:defRPr sz="1050">
+            <a:pPr algn="l">
+              <a:spcBef>
+                <a:spcPts val="200"/>
+              </a:spcBef>
+              <a:defRPr sz="950" b="1">
                 <a:solidFill>
                   <a:srgbClr val="FFFFFF"/>
                 </a:solidFill>
@@ -7801,61 +11083,159 @@
               </a:defRPr>
             </a:pPr>
             <a:r>
-              <a:t>• Uncountability of Real Numbers: Proves why real numbers cannot be listed in a 1-to-1 list with integers.</a:t>
-            </a:r>
-          </a:p>
-          <a:p>
-            <a:pPr>
-              <a:spcBef>
-                <a:spcPts val="800"/>
-              </a:spcBef>
-              <a:defRPr sz="1050">
-                <a:solidFill>
-                  <a:srgbClr val="FFFFFF"/>
-                </a:solidFill>
-                <a:latin typeface="Calibri"/>
-              </a:defRPr>
-            </a:pPr>
-            <a:r>
-              <a:t>• Live Anti-Diagonal: Inverts the diagonal digits to construct a new number not in the list.</a:t>
-            </a:r>
-          </a:p>
-          <a:p>
-            <a:pPr>
-              <a:spcBef>
-                <a:spcPts val="800"/>
-              </a:spcBef>
-              <a:defRPr sz="1050">
-                <a:solidFill>
-                  <a:srgbClr val="FFFFFF"/>
-                </a:solidFill>
-                <a:latin typeface="Calibri"/>
-              </a:defRPr>
-            </a:pPr>
-            <a:r>
-              <a:t>• Cantor's Snake Path: Visualizes positive rationals Q+ demonstrating countability.</a:t>
-            </a:r>
-          </a:p>
-        </p:txBody>
-      </p:sp>
-      <p:sp>
-        <p:nvSpPr>
-          <p:cNvPr id="7" name="Rounded Rectangle 6"/>
+              <a:t>Countability &amp; Infinity Verification</a:t>
+            </a:r>
+          </a:p>
+          <a:p>
+            <a:pPr algn="l">
+              <a:spcBef>
+                <a:spcPts val="900"/>
+              </a:spcBef>
+              <a:spcAft>
+                <a:spcPts val="100"/>
+              </a:spcAft>
+            </a:pPr>
+            <a:r>
+              <a:rPr sz="1100" b="1">
+                <a:solidFill>
+                  <a:srgbClr val="BAE6FD"/>
+                </a:solidFill>
+                <a:latin typeface="Calibri"/>
+              </a:rPr>
+              <a:t>• Uncountability of R: </a:t>
+            </a:r>
+            <a:r>
+              <a:rPr sz="1000">
+                <a:solidFill>
+                  <a:srgbClr val="CBD5E1"/>
+                </a:solidFill>
+                <a:latin typeface="Calibri"/>
+              </a:rPr>
+              <a:t>Proves real numbers in [0, 1) cannot be mapped 1-to-1 to integers.</a:t>
+            </a:r>
+          </a:p>
+          <a:p>
+            <a:pPr algn="l">
+              <a:spcBef>
+                <a:spcPts val="900"/>
+              </a:spcBef>
+              <a:spcAft>
+                <a:spcPts val="100"/>
+              </a:spcAft>
+            </a:pPr>
+            <a:r>
+              <a:rPr sz="1100" b="1">
+                <a:solidFill>
+                  <a:srgbClr val="BAE6FD"/>
+                </a:solidFill>
+                <a:latin typeface="Calibri"/>
+              </a:rPr>
+              <a:t>• Interactive Grid: </a:t>
+            </a:r>
+            <a:r>
+              <a:rPr sz="1000">
+                <a:solidFill>
+                  <a:srgbClr val="CBD5E1"/>
+                </a:solidFill>
+                <a:latin typeface="Calibri"/>
+              </a:rPr>
+              <a:t>Displays an infinite decimal matrix with dynamic diagonal tracking.</a:t>
+            </a:r>
+          </a:p>
+          <a:p>
+            <a:pPr algn="l">
+              <a:spcBef>
+                <a:spcPts val="900"/>
+              </a:spcBef>
+              <a:spcAft>
+                <a:spcPts val="100"/>
+              </a:spcAft>
+            </a:pPr>
+            <a:r>
+              <a:rPr sz="1100" b="1">
+                <a:solidFill>
+                  <a:srgbClr val="BAE6FD"/>
+                </a:solidFill>
+                <a:latin typeface="Calibri"/>
+              </a:rPr>
+              <a:t>• Anti-Diagonal Flip: </a:t>
+            </a:r>
+            <a:r>
+              <a:rPr sz="1000">
+                <a:solidFill>
+                  <a:srgbClr val="CBD5E1"/>
+                </a:solidFill>
+                <a:latin typeface="Calibri"/>
+              </a:rPr>
+              <a:t>Inverts diagonal digits to construct a new number not in the list.</a:t>
+            </a:r>
+          </a:p>
+          <a:p>
+            <a:pPr algn="l">
+              <a:spcBef>
+                <a:spcPts val="900"/>
+              </a:spcBef>
+              <a:spcAft>
+                <a:spcPts val="100"/>
+              </a:spcAft>
+            </a:pPr>
+            <a:r>
+              <a:rPr sz="1100" b="1">
+                <a:solidFill>
+                  <a:srgbClr val="BAE6FD"/>
+                </a:solidFill>
+                <a:latin typeface="Calibri"/>
+              </a:rPr>
+              <a:t>• Snake Path for Q+: </a:t>
+            </a:r>
+            <a:r>
+              <a:rPr sz="1000">
+                <a:solidFill>
+                  <a:srgbClr val="CBD5E1"/>
+                </a:solidFill>
+                <a:latin typeface="Calibri"/>
+              </a:rPr>
+              <a:t>Visualizes Cantor's snake path mapping ℕ to ℚ⁺ to prove rationals countable.</a:t>
+            </a:r>
+          </a:p>
+          <a:p>
+            <a:pPr algn="l">
+              <a:spcBef>
+                <a:spcPts val="1200"/>
+              </a:spcBef>
+              <a:defRPr sz="850" b="1">
+                <a:solidFill>
+                  <a:srgbClr val="BAE6FD"/>
+                </a:solidFill>
+                <a:latin typeface="Calibri"/>
+              </a:defRPr>
+            </a:pPr>
+            <a:r>
+              <a:t>Proof: Interactive anti-diagonal construction</a:t>
+            </a:r>
+          </a:p>
+        </p:txBody>
+      </p:sp>
+      <p:sp>
+        <p:nvSpPr>
+          <p:cNvPr id="8" name="Rounded Rectangle 7"/>
           <p:cNvSpPr/>
           <p:nvPr/>
         </p:nvSpPr>
         <p:spPr>
           <a:xfrm>
-            <a:off x="8046720" y="1645920"/>
-            <a:ext cx="3410712" cy="4663440"/>
+            <a:off x="8046720" y="1508760"/>
+            <a:ext cx="3410712" cy="4892040"/>
           </a:xfrm>
           <a:prstGeom prst="roundRect">
-            <a:avLst/>
+            <a:avLst>
+              <a:gd name="adj" fmla="val 4000"/>
+            </a:avLst>
           </a:prstGeom>
           <a:solidFill>
             <a:srgbClr val="191E2A"/>
           </a:solidFill>
-          <a:ln w="19050">
+          <a:ln w="22225">
             <a:solidFill>
               <a:srgbClr val="EB3C3C"/>
             </a:solidFill>
@@ -7876,11 +11256,11 @@
           </a:fontRef>
         </p:style>
         <p:txBody>
-          <a:bodyPr rtlCol="0" anchor="ctr" wrap="square" lIns="228600" rIns="228600" tIns="274320"/>
+          <a:bodyPr rtlCol="0" anchor="t" wrap="square" lIns="201168" rIns="201168" tIns="201168" bIns="137160"/>
           <a:lstStyle/>
           <a:p>
-            <a:pPr algn="ctr">
-              <a:defRPr sz="1200" b="1">
+            <a:pPr algn="l">
+              <a:defRPr sz="1250" b="1">
                 <a:solidFill>
                   <a:srgbClr val="EB3C3C"/>
                 </a:solidFill>
@@ -7892,51 +11272,147 @@
             </a:r>
           </a:p>
           <a:p>
-            <a:pPr>
-              <a:spcBef>
-                <a:spcPts val="800"/>
-              </a:spcBef>
-              <a:defRPr sz="1050">
-                <a:solidFill>
-                  <a:srgbClr val="CBD5E1"/>
-                </a:solidFill>
-                <a:latin typeface="Calibri"/>
-              </a:defRPr>
-            </a:pPr>
-            <a:r>
-              <a:t>• Theorem Derivations: Interactive step-by-step derivations for summation theorems (e.g. 1+2+...+n).</a:t>
-            </a:r>
-          </a:p>
-          <a:p>
-            <a:pPr>
-              <a:spcBef>
-                <a:spcPts val="800"/>
-              </a:spcBef>
-              <a:defRPr sz="1050">
-                <a:solidFill>
-                  <a:srgbClr val="CBD5E1"/>
-                </a:solidFill>
-                <a:latin typeface="Calibri"/>
-              </a:defRPr>
-            </a:pPr>
-            <a:r>
-              <a:t>• 3-Stage Structure: Breaks down Base Step P(1), Inductive Hypothesis P(k), and Inductive Step P(k+1).</a:t>
-            </a:r>
-          </a:p>
-          <a:p>
-            <a:pPr>
-              <a:spcBef>
-                <a:spcPts val="800"/>
-              </a:spcBef>
-              <a:defRPr sz="1050">
-                <a:solidFill>
-                  <a:srgbClr val="CBD5E1"/>
-                </a:solidFill>
-                <a:latin typeface="Calibri"/>
-              </a:defRPr>
-            </a:pPr>
-            <a:r>
-              <a:t>• Visual Verification: Validates step logic so students learn how to structure mathematical proofs.</a:t>
+            <a:pPr algn="l">
+              <a:spcBef>
+                <a:spcPts val="200"/>
+              </a:spcBef>
+              <a:defRPr sz="950" b="1">
+                <a:solidFill>
+                  <a:srgbClr val="FFFFFF"/>
+                </a:solidFill>
+                <a:latin typeface="Calibri"/>
+              </a:defRPr>
+            </a:pPr>
+            <a:r>
+              <a:t>Formal Recursive Proof Pipeline</a:t>
+            </a:r>
+          </a:p>
+          <a:p>
+            <a:pPr algn="l">
+              <a:spcBef>
+                <a:spcPts val="900"/>
+              </a:spcBef>
+              <a:spcAft>
+                <a:spcPts val="100"/>
+              </a:spcAft>
+            </a:pPr>
+            <a:r>
+              <a:rPr sz="1100" b="1">
+                <a:solidFill>
+                  <a:srgbClr val="FECACA"/>
+                </a:solidFill>
+                <a:latin typeface="Calibri"/>
+              </a:rPr>
+              <a:t>• 3-Stage Pipeline: </a:t>
+            </a:r>
+            <a:r>
+              <a:rPr sz="1000">
+                <a:solidFill>
+                  <a:srgbClr val="CBD5E1"/>
+                </a:solidFill>
+                <a:latin typeface="Calibri"/>
+              </a:rPr>
+              <a:t>Breaks down Base Step P(1), Hypothesis P(k), and Inductive Step P(k+1).</a:t>
+            </a:r>
+          </a:p>
+          <a:p>
+            <a:pPr algn="l">
+              <a:spcBef>
+                <a:spcPts val="900"/>
+              </a:spcBef>
+              <a:spcAft>
+                <a:spcPts val="100"/>
+              </a:spcAft>
+            </a:pPr>
+            <a:r>
+              <a:rPr sz="1100" b="1">
+                <a:solidFill>
+                  <a:srgbClr val="FECACA"/>
+                </a:solidFill>
+                <a:latin typeface="Calibri"/>
+              </a:rPr>
+              <a:t>• Algebraic Expansion: </a:t>
+            </a:r>
+            <a:r>
+              <a:rPr sz="1000">
+                <a:solidFill>
+                  <a:srgbClr val="CBD5E1"/>
+                </a:solidFill>
+                <a:latin typeface="Calibri"/>
+              </a:rPr>
+              <a:t>Expands and factors summation formulas like Σ i = n(n+1)/2 step-by-step.</a:t>
+            </a:r>
+          </a:p>
+          <a:p>
+            <a:pPr algn="l">
+              <a:spcBef>
+                <a:spcPts val="900"/>
+              </a:spcBef>
+              <a:spcAft>
+                <a:spcPts val="100"/>
+              </a:spcAft>
+            </a:pPr>
+            <a:r>
+              <a:rPr sz="1100" b="1">
+                <a:solidFill>
+                  <a:srgbClr val="FECACA"/>
+                </a:solidFill>
+                <a:latin typeface="Calibri"/>
+              </a:rPr>
+              <a:t>• Visual Proof Link: </a:t>
+            </a:r>
+            <a:r>
+              <a:rPr sz="1000">
+                <a:solidFill>
+                  <a:srgbClr val="CBD5E1"/>
+                </a:solidFill>
+                <a:latin typeface="Calibri"/>
+              </a:rPr>
+              <a:t>Highlights the exact algebraic substitution connecting P(k) directly to P(k+1).</a:t>
+            </a:r>
+          </a:p>
+          <a:p>
+            <a:pPr algn="l">
+              <a:spcBef>
+                <a:spcPts val="900"/>
+              </a:spcBef>
+              <a:spcAft>
+                <a:spcPts val="100"/>
+              </a:spcAft>
+            </a:pPr>
+            <a:r>
+              <a:rPr sz="1100" b="1">
+                <a:solidFill>
+                  <a:srgbClr val="FECACA"/>
+                </a:solidFill>
+                <a:latin typeface="Calibri"/>
+              </a:rPr>
+              <a:t>• Classic Theorems: </a:t>
+            </a:r>
+            <a:r>
+              <a:rPr sz="1000">
+                <a:solidFill>
+                  <a:srgbClr val="CBD5E1"/>
+                </a:solidFill>
+                <a:latin typeface="Calibri"/>
+              </a:rPr>
+              <a:t>Pre-loaded with arithmetic series, geometric sums, and divisibility proofs.</a:t>
+            </a:r>
+          </a:p>
+          <a:p>
+            <a:pPr algn="l">
+              <a:spcBef>
+                <a:spcPts val="1200"/>
+              </a:spcBef>
+              <a:defRPr sz="850" b="1">
+                <a:solidFill>
+                  <a:srgbClr val="FECACA"/>
+                </a:solidFill>
+                <a:latin typeface="Calibri"/>
+              </a:defRPr>
+            </a:pPr>
+            <a:r>
+              <a:t>Pipeline: Base Case → Hypothesis → Induction</a:t>
             </a:r>
           </a:p>
         </p:txBody>
@@ -8010,8 +11486,8 @@
         </p:nvSpPr>
         <p:spPr>
           <a:xfrm>
-            <a:off x="731520" y="365760"/>
-            <a:ext cx="10725912" cy="1005840"/>
+            <a:off x="731520" y="320040"/>
+            <a:ext cx="10725912" cy="274320"/>
           </a:xfrm>
           <a:prstGeom prst="rect">
             <a:avLst/>
@@ -8019,13 +11495,13 @@
           <a:noFill/>
         </p:spPr>
         <p:txBody>
-          <a:bodyPr wrap="square" lIns="0" tIns="0" rIns="0" bIns="0">
+          <a:bodyPr wrap="square" anchor="t" lIns="0" rIns="0" tIns="0" bIns="0">
             <a:spAutoFit/>
           </a:bodyPr>
           <a:lstStyle/>
           <a:p>
-            <a:pPr>
-              <a:defRPr sz="1100" b="1">
+            <a:pPr algn="l">
+              <a:defRPr sz="1000" b="1">
                 <a:solidFill>
                   <a:srgbClr val="EB3C3C"/>
                 </a:solidFill>
@@ -8033,14 +11509,34 @@
               </a:defRPr>
             </a:pPr>
             <a:r>
-              <a:t>ALGEBRAIC SYSTEMS &amp; STRUCTURES</a:t>
-            </a:r>
-          </a:p>
-          <a:p>
-            <a:pPr>
-              <a:spcBef>
-                <a:spcPts val="300"/>
-              </a:spcBef>
+              <a:t>CORE DOMAIN 4 • RELATIONS &amp; FUNCTIONS</a:t>
+            </a:r>
+          </a:p>
+        </p:txBody>
+      </p:sp>
+      <p:sp>
+        <p:nvSpPr>
+          <p:cNvPr id="4" name="TextBox 3"/>
+          <p:cNvSpPr txBox="1"/>
+          <p:nvPr/>
+        </p:nvSpPr>
+        <p:spPr>
+          <a:xfrm>
+            <a:off x="731520" y="594360"/>
+            <a:ext cx="10725912" cy="594360"/>
+          </a:xfrm>
+          <a:prstGeom prst="rect">
+            <a:avLst/>
+          </a:prstGeom>
+          <a:noFill/>
+        </p:spPr>
+        <p:txBody>
+          <a:bodyPr wrap="square" anchor="t" lIns="0" rIns="0" tIns="0" bIns="0">
+            <a:spAutoFit/>
+          </a:bodyPr>
+          <a:lstStyle/>
+          <a:p>
+            <a:pPr algn="l">
               <a:defRPr sz="2200" b="1">
                 <a:solidFill>
                   <a:srgbClr val="FFFFFF"/>
@@ -8049,21 +11545,21 @@
               </a:defRPr>
             </a:pPr>
             <a:r>
-              <a:t>Module 4: Relations, Order Theory &amp; Functions (Engineered by Krishna)</a:t>
-            </a:r>
-          </a:p>
-        </p:txBody>
-      </p:sp>
-      <p:sp>
-        <p:nvSpPr>
-          <p:cNvPr id="4" name="Rectangle 3"/>
+              <a:t>Module 4: Relations, Order Theory &amp; Functions (Krishna's Contribution)</a:t>
+            </a:r>
+          </a:p>
+        </p:txBody>
+      </p:sp>
+      <p:sp>
+        <p:nvSpPr>
+          <p:cNvPr id="5" name="Rectangle 4"/>
           <p:cNvSpPr/>
           <p:nvPr/>
         </p:nvSpPr>
         <p:spPr>
           <a:xfrm>
-            <a:off x="731520" y="1353312"/>
-            <a:ext cx="10725912" cy="36576"/>
+            <a:off x="731520" y="1234440"/>
+            <a:ext cx="10725912" cy="32004"/>
           </a:xfrm>
           <a:prstGeom prst="rect">
             <a:avLst/>
@@ -8099,22 +11595,24 @@
       </p:sp>
       <p:sp>
         <p:nvSpPr>
-          <p:cNvPr id="5" name="Rounded Rectangle 4"/>
+          <p:cNvPr id="6" name="Rounded Rectangle 5"/>
           <p:cNvSpPr/>
           <p:nvPr/>
         </p:nvSpPr>
         <p:spPr>
           <a:xfrm>
-            <a:off x="731520" y="1645920"/>
-            <a:ext cx="5212080" cy="4663440"/>
+            <a:off x="731520" y="1508760"/>
+            <a:ext cx="5212080" cy="4892040"/>
           </a:xfrm>
           <a:prstGeom prst="roundRect">
-            <a:avLst/>
+            <a:avLst>
+              <a:gd name="adj" fmla="val 4000"/>
+            </a:avLst>
           </a:prstGeom>
           <a:solidFill>
             <a:srgbClr val="191E2A"/>
           </a:solidFill>
-          <a:ln w="19050">
+          <a:ln w="22225">
             <a:solidFill>
               <a:srgbClr val="F59E0B"/>
             </a:solidFill>
@@ -8135,11 +11633,11 @@
           </a:fontRef>
         </p:style>
         <p:txBody>
-          <a:bodyPr rtlCol="0" anchor="ctr" wrap="square" lIns="320040" rIns="320040" tIns="274320"/>
+          <a:bodyPr rtlCol="0" anchor="t" wrap="square" lIns="256032" rIns="256032" tIns="228600" bIns="182880"/>
           <a:lstStyle/>
           <a:p>
-            <a:pPr algn="ctr">
-              <a:defRPr sz="1300" b="1">
+            <a:pPr algn="l">
+              <a:defRPr sz="1400" b="1">
                 <a:solidFill>
                   <a:srgbClr val="F59E0B"/>
                 </a:solidFill>
@@ -8151,89 +11649,199 @@
             </a:r>
           </a:p>
           <a:p>
-            <a:pPr>
-              <a:spcBef>
-                <a:spcPts val="800"/>
-              </a:spcBef>
-              <a:defRPr sz="1100">
-                <a:solidFill>
-                  <a:srgbClr val="FFFFFF"/>
-                </a:solidFill>
-                <a:latin typeface="Calibri"/>
-              </a:defRPr>
-            </a:pPr>
-            <a:r>
-              <a:t>• Interactive Matrix Grid: Click grid cells to toggle pairs (a, b) on a finite set A = {1, 2, 3, 4}.</a:t>
-            </a:r>
-          </a:p>
-          <a:p>
-            <a:pPr>
-              <a:spcBef>
-                <a:spcPts val="800"/>
-              </a:spcBef>
-              <a:defRPr sz="1100">
-                <a:solidFill>
-                  <a:srgbClr val="FFFFFF"/>
-                </a:solidFill>
-                <a:latin typeface="Calibri"/>
-              </a:defRPr>
-            </a:pPr>
-            <a:r>
-              <a:t>• Instant Property Checking: Real-time verification of Reflexive, Symmetric, Transitive, and Anti-symmetric properties.</a:t>
-            </a:r>
-          </a:p>
-          <a:p>
-            <a:pPr>
-              <a:spcBef>
-                <a:spcPts val="800"/>
-              </a:spcBef>
-              <a:defRPr sz="1100">
-                <a:solidFill>
-                  <a:srgbClr val="FFFFFF"/>
-                </a:solidFill>
-                <a:latin typeface="Calibri"/>
-              </a:defRPr>
-            </a:pPr>
-            <a:r>
-              <a:t>• Equivalence Relations: Highlights when a relation forms equivalence classes [a] and partitions the set.</a:t>
-            </a:r>
-          </a:p>
-          <a:p>
-            <a:pPr>
-              <a:spcBef>
-                <a:spcPts val="800"/>
-              </a:spcBef>
-              <a:defRPr sz="1100">
-                <a:solidFill>
-                  <a:srgbClr val="FFFFFF"/>
-                </a:solidFill>
-                <a:latin typeface="Calibri"/>
-              </a:defRPr>
-            </a:pPr>
-            <a:r>
-              <a:t>• Warshall's Algorithm: Step-by-step matrix derivation computing Transitive Closure R+ in O(n^3) operations.</a:t>
-            </a:r>
-          </a:p>
-        </p:txBody>
-      </p:sp>
-      <p:sp>
-        <p:nvSpPr>
-          <p:cNvPr id="6" name="Rounded Rectangle 5"/>
+            <a:pPr algn="l">
+              <a:spcBef>
+                <a:spcPts val="200"/>
+              </a:spcBef>
+              <a:defRPr sz="1050" b="1">
+                <a:solidFill>
+                  <a:srgbClr val="FCD34D"/>
+                </a:solidFill>
+                <a:latin typeface="Calibri"/>
+              </a:defRPr>
+            </a:pPr>
+            <a:r>
+              <a:t>Binary Relations &amp; Warshall's Algorithm</a:t>
+            </a:r>
+          </a:p>
+          <a:p>
+            <a:pPr algn="l">
+              <a:spcBef>
+                <a:spcPts val="1000"/>
+              </a:spcBef>
+              <a:spcAft>
+                <a:spcPts val="100"/>
+              </a:spcAft>
+            </a:pPr>
+            <a:r>
+              <a:rPr sz="1200" b="1">
+                <a:solidFill>
+                  <a:srgbClr val="FCD34D"/>
+                </a:solidFill>
+                <a:latin typeface="Calibri"/>
+              </a:rPr>
+              <a:t>• Interactive Matrix Grid: </a:t>
+            </a:r>
+            <a:r>
+              <a:rPr sz="1100">
+                <a:solidFill>
+                  <a:srgbClr val="CBD5E1"/>
+                </a:solidFill>
+                <a:latin typeface="Calibri"/>
+              </a:rPr>
+              <a:t>Click grid cells to toggle pairs (a, b) on a finite set A = {1, 2, 3, 4}.</a:t>
+            </a:r>
+          </a:p>
+          <a:p>
+            <a:pPr algn="l">
+              <a:spcBef>
+                <a:spcPts val="1000"/>
+              </a:spcBef>
+              <a:spcAft>
+                <a:spcPts val="100"/>
+              </a:spcAft>
+            </a:pPr>
+            <a:r>
+              <a:rPr sz="1200" b="1">
+                <a:solidFill>
+                  <a:srgbClr val="FCD34D"/>
+                </a:solidFill>
+                <a:latin typeface="Calibri"/>
+              </a:rPr>
+              <a:t>• Instant Property Checking: </a:t>
+            </a:r>
+            <a:r>
+              <a:rPr sz="1100">
+                <a:solidFill>
+                  <a:srgbClr val="CBD5E1"/>
+                </a:solidFill>
+                <a:latin typeface="Calibri"/>
+              </a:rPr>
+              <a:t>Real-time verification of Reflexive, Symmetric, Transitive, and Anti-symmetric properties.</a:t>
+            </a:r>
+          </a:p>
+          <a:p>
+            <a:pPr algn="l">
+              <a:spcBef>
+                <a:spcPts val="1000"/>
+              </a:spcBef>
+              <a:spcAft>
+                <a:spcPts val="100"/>
+              </a:spcAft>
+            </a:pPr>
+            <a:r>
+              <a:rPr sz="1200" b="1">
+                <a:solidFill>
+                  <a:srgbClr val="FCD34D"/>
+                </a:solidFill>
+                <a:latin typeface="Calibri"/>
+              </a:rPr>
+              <a:t>• Equivalence Relations: </a:t>
+            </a:r>
+            <a:r>
+              <a:rPr sz="1100">
+                <a:solidFill>
+                  <a:srgbClr val="CBD5E1"/>
+                </a:solidFill>
+                <a:latin typeface="Calibri"/>
+              </a:rPr>
+              <a:t>Highlights when a relation forms equivalence classes [a] and partitions the set.</a:t>
+            </a:r>
+          </a:p>
+          <a:p>
+            <a:pPr algn="l">
+              <a:spcBef>
+                <a:spcPts val="1000"/>
+              </a:spcBef>
+              <a:spcAft>
+                <a:spcPts val="100"/>
+              </a:spcAft>
+            </a:pPr>
+            <a:r>
+              <a:rPr sz="1200" b="1">
+                <a:solidFill>
+                  <a:srgbClr val="FCD34D"/>
+                </a:solidFill>
+                <a:latin typeface="Calibri"/>
+              </a:rPr>
+              <a:t>• Warshall's Algorithm: </a:t>
+            </a:r>
+            <a:r>
+              <a:rPr sz="1100">
+                <a:solidFill>
+                  <a:srgbClr val="CBD5E1"/>
+                </a:solidFill>
+                <a:latin typeface="Calibri"/>
+              </a:rPr>
+              <a:t>Step-by-step matrix derivation computing Transitive Closure R+ in O(n^3) operations.</a:t>
+            </a:r>
+          </a:p>
+          <a:p>
+            <a:pPr algn="l">
+              <a:spcBef>
+                <a:spcPts val="1000"/>
+              </a:spcBef>
+              <a:spcAft>
+                <a:spcPts val="100"/>
+              </a:spcAft>
+            </a:pPr>
+            <a:r>
+              <a:rPr sz="1200" b="1">
+                <a:solidFill>
+                  <a:srgbClr val="FCD34D"/>
+                </a:solidFill>
+                <a:latin typeface="Calibri"/>
+              </a:rPr>
+              <a:t>• Directed Relation Graph: </a:t>
+            </a:r>
+            <a:r>
+              <a:rPr sz="1100">
+                <a:solidFill>
+                  <a:srgbClr val="CBD5E1"/>
+                </a:solidFill>
+                <a:latin typeface="Calibri"/>
+              </a:rPr>
+              <a:t>Visualizes relation pairs as a directed graph with animated self-loops and dual edges.</a:t>
+            </a:r>
+          </a:p>
+          <a:p>
+            <a:pPr algn="l">
+              <a:spcBef>
+                <a:spcPts val="1400"/>
+              </a:spcBef>
+              <a:defRPr sz="1000" b="1">
+                <a:solidFill>
+                  <a:srgbClr val="FCD34D"/>
+                </a:solidFill>
+                <a:latin typeface="Calibri"/>
+              </a:defRPr>
+            </a:pPr>
+            <a:r>
+              <a:t>Algorithm: Warshall's Transitive Closure in O(n³) with Step Matrix</a:t>
+            </a:r>
+          </a:p>
+        </p:txBody>
+      </p:sp>
+      <p:sp>
+        <p:nvSpPr>
+          <p:cNvPr id="7" name="Rounded Rectangle 6"/>
           <p:cNvSpPr/>
           <p:nvPr/>
         </p:nvSpPr>
         <p:spPr>
           <a:xfrm>
-            <a:off x="6217920" y="1645920"/>
-            <a:ext cx="5212080" cy="4663440"/>
+            <a:off x="6245352" y="1508760"/>
+            <a:ext cx="5212080" cy="4892040"/>
           </a:xfrm>
           <a:prstGeom prst="roundRect">
-            <a:avLst/>
+            <a:avLst>
+              <a:gd name="adj" fmla="val 4000"/>
+            </a:avLst>
           </a:prstGeom>
           <a:solidFill>
             <a:srgbClr val="191E2A"/>
           </a:solidFill>
-          <a:ln w="19050">
+          <a:ln w="22225">
             <a:solidFill>
               <a:srgbClr val="A855F7"/>
             </a:solidFill>
@@ -8254,11 +11862,11 @@
           </a:fontRef>
         </p:style>
         <p:txBody>
-          <a:bodyPr rtlCol="0" anchor="ctr" wrap="square" lIns="320040" rIns="320040" tIns="274320"/>
+          <a:bodyPr rtlCol="0" anchor="t" wrap="square" lIns="256032" rIns="256032" tIns="228600" bIns="182880"/>
           <a:lstStyle/>
           <a:p>
-            <a:pPr algn="ctr">
-              <a:defRPr sz="1300" b="1">
+            <a:pPr algn="l">
+              <a:defRPr sz="1400" b="1">
                 <a:solidFill>
                   <a:srgbClr val="A855F7"/>
                 </a:solidFill>
@@ -8270,67 +11878,175 @@
             </a:r>
           </a:p>
           <a:p>
-            <a:pPr>
-              <a:spcBef>
-                <a:spcPts val="800"/>
-              </a:spcBef>
-              <a:defRPr sz="1100">
-                <a:solidFill>
-                  <a:srgbClr val="CBD5E1"/>
-                </a:solidFill>
-                <a:latin typeface="Calibri"/>
-              </a:defRPr>
-            </a:pPr>
-            <a:r>
-              <a:t>• Hasse Diagrams for Posets: Draws clean order hierarchy trees by stripping redundant self-loops and transitive edges.</a:t>
-            </a:r>
-          </a:p>
-          <a:p>
-            <a:pPr>
-              <a:spcBef>
-                <a:spcPts val="800"/>
-              </a:spcBef>
-              <a:defRPr sz="1100">
-                <a:solidFill>
-                  <a:srgbClr val="CBD5E1"/>
-                </a:solidFill>
-                <a:latin typeface="Calibri"/>
-              </a:defRPr>
-            </a:pPr>
-            <a:r>
-              <a:t>• Lattice &amp; Bound Detection: Identifies maximal/minimal elements, bounds, and partial order structures.</a:t>
-            </a:r>
-          </a:p>
-          <a:p>
-            <a:pPr>
-              <a:spcBef>
-                <a:spcPts val="800"/>
-              </a:spcBef>
-              <a:defRPr sz="1100">
-                <a:solidFill>
-                  <a:srgbClr val="CBD5E1"/>
-                </a:solidFill>
-                <a:latin typeface="Calibri"/>
-              </a:defRPr>
-            </a:pPr>
-            <a:r>
-              <a:t>• Function Mapping Analyzer: Visual arrow diagrams connecting domain elements to codomain targets.</a:t>
-            </a:r>
-          </a:p>
-          <a:p>
-            <a:pPr>
-              <a:spcBef>
-                <a:spcPts val="800"/>
-              </a:spcBef>
-              <a:defRPr sz="1100">
-                <a:solidFill>
-                  <a:srgbClr val="CBD5E1"/>
-                </a:solidFill>
-                <a:latin typeface="Calibri"/>
-              </a:defRPr>
-            </a:pPr>
-            <a:r>
-              <a:t>• Function Types: Automatically classifies mappings as Injective (one-to-one), Surjective (onto), or Bijective.</a:t>
+            <a:pPr algn="l">
+              <a:spcBef>
+                <a:spcPts val="200"/>
+              </a:spcBef>
+              <a:defRPr sz="1050" b="1">
+                <a:solidFill>
+                  <a:srgbClr val="FCD34D"/>
+                </a:solidFill>
+                <a:latin typeface="Calibri"/>
+              </a:defRPr>
+            </a:pPr>
+            <a:r>
+              <a:t>Poset Trees, Lattices &amp; Function Mappings</a:t>
+            </a:r>
+          </a:p>
+          <a:p>
+            <a:pPr algn="l">
+              <a:spcBef>
+                <a:spcPts val="1000"/>
+              </a:spcBef>
+              <a:spcAft>
+                <a:spcPts val="100"/>
+              </a:spcAft>
+            </a:pPr>
+            <a:r>
+              <a:rPr sz="1200" b="1">
+                <a:solidFill>
+                  <a:srgbClr val="E9D5FF"/>
+                </a:solidFill>
+                <a:latin typeface="Calibri"/>
+              </a:rPr>
+              <a:t>• Hasse Diagrams for Posets: </a:t>
+            </a:r>
+            <a:r>
+              <a:rPr sz="1100">
+                <a:solidFill>
+                  <a:srgbClr val="CBD5E1"/>
+                </a:solidFill>
+                <a:latin typeface="Calibri"/>
+              </a:rPr>
+              <a:t>Draws clean order hierarchy trees by stripping redundant self-loops and transitive edges.</a:t>
+            </a:r>
+          </a:p>
+          <a:p>
+            <a:pPr algn="l">
+              <a:spcBef>
+                <a:spcPts val="1000"/>
+              </a:spcBef>
+              <a:spcAft>
+                <a:spcPts val="100"/>
+              </a:spcAft>
+            </a:pPr>
+            <a:r>
+              <a:rPr sz="1200" b="1">
+                <a:solidFill>
+                  <a:srgbClr val="E9D5FF"/>
+                </a:solidFill>
+                <a:latin typeface="Calibri"/>
+              </a:rPr>
+              <a:t>• Lattice &amp; Bound Detection: </a:t>
+            </a:r>
+            <a:r>
+              <a:rPr sz="1100">
+                <a:solidFill>
+                  <a:srgbClr val="CBD5E1"/>
+                </a:solidFill>
+                <a:latin typeface="Calibri"/>
+              </a:rPr>
+              <a:t>Identifies maximal/minimal elements, upper/lower bounds, and partial order structures.</a:t>
+            </a:r>
+          </a:p>
+          <a:p>
+            <a:pPr algn="l">
+              <a:spcBef>
+                <a:spcPts val="1000"/>
+              </a:spcBef>
+              <a:spcAft>
+                <a:spcPts val="100"/>
+              </a:spcAft>
+            </a:pPr>
+            <a:r>
+              <a:rPr sz="1200" b="1">
+                <a:solidFill>
+                  <a:srgbClr val="E9D5FF"/>
+                </a:solidFill>
+                <a:latin typeface="Calibri"/>
+              </a:rPr>
+              <a:t>• Lattice GLB/LUB Analysis: </a:t>
+            </a:r>
+            <a:r>
+              <a:rPr sz="1100">
+                <a:solidFill>
+                  <a:srgbClr val="CBD5E1"/>
+                </a:solidFill>
+                <a:latin typeface="Calibri"/>
+              </a:rPr>
+              <a:t>Verifies if every pair of elements has a unique greatest lower bound and least upper bound.</a:t>
+            </a:r>
+          </a:p>
+          <a:p>
+            <a:pPr algn="l">
+              <a:spcBef>
+                <a:spcPts val="1000"/>
+              </a:spcBef>
+              <a:spcAft>
+                <a:spcPts val="100"/>
+              </a:spcAft>
+            </a:pPr>
+            <a:r>
+              <a:rPr sz="1200" b="1">
+                <a:solidFill>
+                  <a:srgbClr val="E9D5FF"/>
+                </a:solidFill>
+                <a:latin typeface="Calibri"/>
+              </a:rPr>
+              <a:t>• Function Mapping Analyzer: </a:t>
+            </a:r>
+            <a:r>
+              <a:rPr sz="1100">
+                <a:solidFill>
+                  <a:srgbClr val="CBD5E1"/>
+                </a:solidFill>
+                <a:latin typeface="Calibri"/>
+              </a:rPr>
+              <a:t>Visual arrow diagrams connecting domain elements to codomain targets with vector lines.</a:t>
+            </a:r>
+          </a:p>
+          <a:p>
+            <a:pPr algn="l">
+              <a:spcBef>
+                <a:spcPts val="1000"/>
+              </a:spcBef>
+              <a:spcAft>
+                <a:spcPts val="100"/>
+              </a:spcAft>
+            </a:pPr>
+            <a:r>
+              <a:rPr sz="1200" b="1">
+                <a:solidFill>
+                  <a:srgbClr val="E9D5FF"/>
+                </a:solidFill>
+                <a:latin typeface="Calibri"/>
+              </a:rPr>
+              <a:t>• Function Classification: </a:t>
+            </a:r>
+            <a:r>
+              <a:rPr sz="1100">
+                <a:solidFill>
+                  <a:srgbClr val="CBD5E1"/>
+                </a:solidFill>
+                <a:latin typeface="Calibri"/>
+              </a:rPr>
+              <a:t>Automatically classifies mappings as Injective (one-to-one), Surjective (onto), or Bijective.</a:t>
+            </a:r>
+          </a:p>
+          <a:p>
+            <a:pPr algn="l">
+              <a:spcBef>
+                <a:spcPts val="1400"/>
+              </a:spcBef>
+              <a:defRPr sz="1000" b="1">
+                <a:solidFill>
+                  <a:srgbClr val="E9D5FF"/>
+                </a:solidFill>
+                <a:latin typeface="Calibri"/>
+              </a:defRPr>
+            </a:pPr>
+            <a:r>
+              <a:t>Hierarchy: Transitive Reduction for Posets + Function Type Classifier</a:t>
             </a:r>
           </a:p>
         </p:txBody>
@@ -8404,8 +12120,8 @@
         </p:nvSpPr>
         <p:spPr>
           <a:xfrm>
-            <a:off x="731520" y="365760"/>
-            <a:ext cx="10725912" cy="1005840"/>
+            <a:off x="731520" y="320040"/>
+            <a:ext cx="10725912" cy="274320"/>
           </a:xfrm>
           <a:prstGeom prst="rect">
             <a:avLst/>
@@ -8413,13 +12129,13 @@
           <a:noFill/>
         </p:spPr>
         <p:txBody>
-          <a:bodyPr wrap="square" lIns="0" tIns="0" rIns="0" bIns="0">
+          <a:bodyPr wrap="square" anchor="t" lIns="0" rIns="0" tIns="0" bIns="0">
             <a:spAutoFit/>
           </a:bodyPr>
           <a:lstStyle/>
           <a:p>
-            <a:pPr>
-              <a:defRPr sz="1100" b="1">
+            <a:pPr algn="l">
+              <a:defRPr sz="1000" b="1">
                 <a:solidFill>
                   <a:srgbClr val="EB3C3C"/>
                 </a:solidFill>
@@ -8427,14 +12143,34 @@
               </a:defRPr>
             </a:pPr>
             <a:r>
-              <a:t>AUTOMATA THEORY &amp; STATE MACHINES</a:t>
-            </a:r>
-          </a:p>
-          <a:p>
-            <a:pPr>
-              <a:spcBef>
-                <a:spcPts val="300"/>
-              </a:spcBef>
+              <a:t>CORE DOMAIN 5 • AUTOMATA THEORY</a:t>
+            </a:r>
+          </a:p>
+        </p:txBody>
+      </p:sp>
+      <p:sp>
+        <p:nvSpPr>
+          <p:cNvPr id="4" name="TextBox 3"/>
+          <p:cNvSpPr txBox="1"/>
+          <p:nvPr/>
+        </p:nvSpPr>
+        <p:spPr>
+          <a:xfrm>
+            <a:off x="731520" y="594360"/>
+            <a:ext cx="10725912" cy="594360"/>
+          </a:xfrm>
+          <a:prstGeom prst="rect">
+            <a:avLst/>
+          </a:prstGeom>
+          <a:noFill/>
+        </p:spPr>
+        <p:txBody>
+          <a:bodyPr wrap="square" anchor="t" lIns="0" rIns="0" tIns="0" bIns="0">
+            <a:spAutoFit/>
+          </a:bodyPr>
+          <a:lstStyle/>
+          <a:p>
+            <a:pPr algn="l">
               <a:defRPr sz="2200" b="1">
                 <a:solidFill>
                   <a:srgbClr val="FFFFFF"/>
@@ -8443,21 +12179,21 @@
               </a:defRPr>
             </a:pPr>
             <a:r>
-              <a:t>Module 5: Finite Automata (DFA / NFA) Visualizer (Engineered by Akash)</a:t>
-            </a:r>
-          </a:p>
-        </p:txBody>
-      </p:sp>
-      <p:sp>
-        <p:nvSpPr>
-          <p:cNvPr id="4" name="Rectangle 3"/>
+              <a:t>Module 5: Finite Automata (DFA / NFA) Visualizer (Akash's Contribution)</a:t>
+            </a:r>
+          </a:p>
+        </p:txBody>
+      </p:sp>
+      <p:sp>
+        <p:nvSpPr>
+          <p:cNvPr id="5" name="Rectangle 4"/>
           <p:cNvSpPr/>
           <p:nvPr/>
         </p:nvSpPr>
         <p:spPr>
           <a:xfrm>
-            <a:off x="731520" y="1353312"/>
-            <a:ext cx="10725912" cy="36576"/>
+            <a:off x="731520" y="1234440"/>
+            <a:ext cx="10725912" cy="32004"/>
           </a:xfrm>
           <a:prstGeom prst="rect">
             <a:avLst/>
@@ -8493,22 +12229,24 @@
       </p:sp>
       <p:sp>
         <p:nvSpPr>
-          <p:cNvPr id="5" name="Rounded Rectangle 4"/>
+          <p:cNvPr id="6" name="Rounded Rectangle 5"/>
           <p:cNvSpPr/>
           <p:nvPr/>
         </p:nvSpPr>
         <p:spPr>
           <a:xfrm>
-            <a:off x="731520" y="1645920"/>
-            <a:ext cx="5212080" cy="4663440"/>
+            <a:off x="731520" y="1508760"/>
+            <a:ext cx="5212080" cy="4892040"/>
           </a:xfrm>
           <a:prstGeom prst="roundRect">
-            <a:avLst/>
+            <a:avLst>
+              <a:gd name="adj" fmla="val 4000"/>
+            </a:avLst>
           </a:prstGeom>
           <a:solidFill>
             <a:srgbClr val="191E2A"/>
           </a:solidFill>
-          <a:ln w="19050">
+          <a:ln w="22225">
             <a:solidFill>
               <a:srgbClr val="38BDF8"/>
             </a:solidFill>
@@ -8529,11 +12267,11 @@
           </a:fontRef>
         </p:style>
         <p:txBody>
-          <a:bodyPr rtlCol="0" anchor="ctr" wrap="square" lIns="320040" rIns="320040" tIns="274320"/>
+          <a:bodyPr rtlCol="0" anchor="t" wrap="square" lIns="256032" rIns="256032" tIns="228600" bIns="182880"/>
           <a:lstStyle/>
           <a:p>
-            <a:pPr algn="ctr">
-              <a:defRPr sz="1300" b="1">
+            <a:pPr algn="l">
+              <a:defRPr sz="1400" b="1">
                 <a:solidFill>
                   <a:srgbClr val="38BDF8"/>
                 </a:solidFill>
@@ -8545,89 +12283,199 @@
             </a:r>
           </a:p>
           <a:p>
-            <a:pPr>
-              <a:spcBef>
-                <a:spcPts val="800"/>
-              </a:spcBef>
-              <a:defRPr sz="1100">
-                <a:solidFill>
-                  <a:srgbClr val="FFFFFF"/>
-                </a:solidFill>
-                <a:latin typeface="Calibri"/>
-              </a:defRPr>
-            </a:pPr>
-            <a:r>
-              <a:t>• Custom Circular States: Add states q0, q1 with start arrow (→q0) and concentric double-rings for accept states.</a:t>
-            </a:r>
-          </a:p>
-          <a:p>
-            <a:pPr>
-              <a:spcBef>
-                <a:spcPts val="800"/>
-              </a:spcBef>
-              <a:defRPr sz="1100">
-                <a:solidFill>
-                  <a:srgbClr val="FFFFFF"/>
-                </a:solidFill>
-                <a:latin typeface="Calibri"/>
-              </a:defRPr>
-            </a:pPr>
-            <a:r>
-              <a:t>• Glowing Step Playback: Type an input string (e.g. '101') and watch active states glow with animated pulse rings.</a:t>
-            </a:r>
-          </a:p>
-          <a:p>
-            <a:pPr>
-              <a:spcBef>
-                <a:spcPts val="800"/>
-              </a:spcBef>
-              <a:defRPr sz="1100">
-                <a:solidFill>
-                  <a:srgbClr val="FFFFFF"/>
-                </a:solidFill>
-                <a:latin typeface="Calibri"/>
-              </a:defRPr>
-            </a:pPr>
-            <a:r>
-              <a:t>• Active Edge Highlighting: Transition arrows light up with a drop-shadow glow as characters are consumed.</a:t>
-            </a:r>
-          </a:p>
-          <a:p>
-            <a:pPr>
-              <a:spcBef>
-                <a:spcPts val="800"/>
-              </a:spcBef>
-              <a:defRPr sz="1100">
-                <a:solidFill>
-                  <a:srgbClr val="FFFFFF"/>
-                </a:solidFill>
-                <a:latin typeface="Calibri"/>
-              </a:defRPr>
-            </a:pPr>
-            <a:r>
-              <a:t>• Batch Test Suite: Test multiple strings simultaneously with green ACCEPTED and red REJECTED badges.</a:t>
-            </a:r>
-          </a:p>
-        </p:txBody>
-      </p:sp>
-      <p:sp>
-        <p:nvSpPr>
-          <p:cNvPr id="6" name="Rounded Rectangle 5"/>
+            <a:pPr algn="l">
+              <a:spcBef>
+                <a:spcPts val="200"/>
+              </a:spcBef>
+              <a:defRPr sz="1050" b="1">
+                <a:solidFill>
+                  <a:srgbClr val="FCD34D"/>
+                </a:solidFill>
+                <a:latin typeface="Calibri"/>
+              </a:defRPr>
+            </a:pPr>
+            <a:r>
+              <a:t>DFA/NFA Graph Editor &amp; Glowing Step Playback</a:t>
+            </a:r>
+          </a:p>
+          <a:p>
+            <a:pPr algn="l">
+              <a:spcBef>
+                <a:spcPts val="1000"/>
+              </a:spcBef>
+              <a:spcAft>
+                <a:spcPts val="100"/>
+              </a:spcAft>
+            </a:pPr>
+            <a:r>
+              <a:rPr sz="1200" b="1">
+                <a:solidFill>
+                  <a:srgbClr val="BAE6FD"/>
+                </a:solidFill>
+                <a:latin typeface="Calibri"/>
+              </a:rPr>
+              <a:t>• Custom Circular States: </a:t>
+            </a:r>
+            <a:r>
+              <a:rPr sz="1100">
+                <a:solidFill>
+                  <a:srgbClr val="CBD5E1"/>
+                </a:solidFill>
+                <a:latin typeface="Calibri"/>
+              </a:rPr>
+              <a:t>Add states q0, q1 with start arrow (→q0) and concentric double-rings for accept states.</a:t>
+            </a:r>
+          </a:p>
+          <a:p>
+            <a:pPr algn="l">
+              <a:spcBef>
+                <a:spcPts val="1000"/>
+              </a:spcBef>
+              <a:spcAft>
+                <a:spcPts val="100"/>
+              </a:spcAft>
+            </a:pPr>
+            <a:r>
+              <a:rPr sz="1200" b="1">
+                <a:solidFill>
+                  <a:srgbClr val="BAE6FD"/>
+                </a:solidFill>
+                <a:latin typeface="Calibri"/>
+              </a:rPr>
+              <a:t>• Glowing Step Playback: </a:t>
+            </a:r>
+            <a:r>
+              <a:rPr sz="1100">
+                <a:solidFill>
+                  <a:srgbClr val="CBD5E1"/>
+                </a:solidFill>
+                <a:latin typeface="Calibri"/>
+              </a:rPr>
+              <a:t>Type an input string (e.g. '101') and watch active states glow with animated pulse rings.</a:t>
+            </a:r>
+          </a:p>
+          <a:p>
+            <a:pPr algn="l">
+              <a:spcBef>
+                <a:spcPts val="1000"/>
+              </a:spcBef>
+              <a:spcAft>
+                <a:spcPts val="100"/>
+              </a:spcAft>
+            </a:pPr>
+            <a:r>
+              <a:rPr sz="1200" b="1">
+                <a:solidFill>
+                  <a:srgbClr val="BAE6FD"/>
+                </a:solidFill>
+                <a:latin typeface="Calibri"/>
+              </a:rPr>
+              <a:t>• Active Edge Highlighting: </a:t>
+            </a:r>
+            <a:r>
+              <a:rPr sz="1100">
+                <a:solidFill>
+                  <a:srgbClr val="CBD5E1"/>
+                </a:solidFill>
+                <a:latin typeface="Calibri"/>
+              </a:rPr>
+              <a:t>Transition arrows light up with a drop-shadow glow as characters are consumed.</a:t>
+            </a:r>
+          </a:p>
+          <a:p>
+            <a:pPr algn="l">
+              <a:spcBef>
+                <a:spcPts val="1000"/>
+              </a:spcBef>
+              <a:spcAft>
+                <a:spcPts val="100"/>
+              </a:spcAft>
+            </a:pPr>
+            <a:r>
+              <a:rPr sz="1200" b="1">
+                <a:solidFill>
+                  <a:srgbClr val="BAE6FD"/>
+                </a:solidFill>
+                <a:latin typeface="Calibri"/>
+              </a:rPr>
+              <a:t>• Batch Test Suite: </a:t>
+            </a:r>
+            <a:r>
+              <a:rPr sz="1100">
+                <a:solidFill>
+                  <a:srgbClr val="CBD5E1"/>
+                </a:solidFill>
+                <a:latin typeface="Calibri"/>
+              </a:rPr>
+              <a:t>Test multiple strings simultaneously with green ACCEPTED and red REJECTED badges.</a:t>
+            </a:r>
+          </a:p>
+          <a:p>
+            <a:pPr algn="l">
+              <a:spcBef>
+                <a:spcPts val="1000"/>
+              </a:spcBef>
+              <a:spcAft>
+                <a:spcPts val="100"/>
+              </a:spcAft>
+            </a:pPr>
+            <a:r>
+              <a:rPr sz="1200" b="1">
+                <a:solidFill>
+                  <a:srgbClr val="BAE6FD"/>
+                </a:solidFill>
+                <a:latin typeface="Calibri"/>
+              </a:rPr>
+              <a:t>• Execution Trace Table: </a:t>
+            </a:r>
+            <a:r>
+              <a:rPr sz="1100">
+                <a:solidFill>
+                  <a:srgbClr val="CBD5E1"/>
+                </a:solidFill>
+                <a:latin typeface="Calibri"/>
+              </a:rPr>
+              <a:t>Displays an interactive step-by-step trace showing current state, symbol, and next state.</a:t>
+            </a:r>
+          </a:p>
+          <a:p>
+            <a:pPr algn="l">
+              <a:spcBef>
+                <a:spcPts val="1400"/>
+              </a:spcBef>
+              <a:defRPr sz="1000" b="1">
+                <a:solidFill>
+                  <a:srgbClr val="BAE6FD"/>
+                </a:solidFill>
+                <a:latin typeface="Calibri"/>
+              </a:defRPr>
+            </a:pPr>
+            <a:r>
+              <a:t>Simulation: Real-Time Glowing State Pulses &amp; Multi-String Testing</a:t>
+            </a:r>
+          </a:p>
+        </p:txBody>
+      </p:sp>
+      <p:sp>
+        <p:nvSpPr>
+          <p:cNvPr id="7" name="Rounded Rectangle 6"/>
           <p:cNvSpPr/>
           <p:nvPr/>
         </p:nvSpPr>
         <p:spPr>
           <a:xfrm>
-            <a:off x="6217920" y="1645920"/>
-            <a:ext cx="5212080" cy="4663440"/>
+            <a:off x="6245352" y="1508760"/>
+            <a:ext cx="5212080" cy="4892040"/>
           </a:xfrm>
           <a:prstGeom prst="roundRect">
-            <a:avLst/>
+            <a:avLst>
+              <a:gd name="adj" fmla="val 4000"/>
+            </a:avLst>
           </a:prstGeom>
           <a:solidFill>
             <a:srgbClr val="191E2A"/>
           </a:solidFill>
-          <a:ln w="19050">
+          <a:ln w="22225">
             <a:solidFill>
               <a:srgbClr val="EB3C3C"/>
             </a:solidFill>
@@ -8648,11 +12496,11 @@
           </a:fontRef>
         </p:style>
         <p:txBody>
-          <a:bodyPr rtlCol="0" anchor="ctr" wrap="square" lIns="320040" rIns="320040" tIns="274320"/>
+          <a:bodyPr rtlCol="0" anchor="t" wrap="square" lIns="256032" rIns="256032" tIns="228600" bIns="182880"/>
           <a:lstStyle/>
           <a:p>
-            <a:pPr algn="ctr">
-              <a:defRPr sz="1300" b="1">
+            <a:pPr algn="l">
+              <a:defRPr sz="1400" b="1">
                 <a:solidFill>
                   <a:srgbClr val="EB3C3C"/>
                 </a:solidFill>
@@ -8664,67 +12512,175 @@
             </a:r>
           </a:p>
           <a:p>
-            <a:pPr>
-              <a:spcBef>
-                <a:spcPts val="800"/>
-              </a:spcBef>
-              <a:defRPr sz="1100">
-                <a:solidFill>
-                  <a:srgbClr val="CBD5E1"/>
-                </a:solidFill>
-                <a:latin typeface="Calibri"/>
-              </a:defRPr>
-            </a:pPr>
-            <a:r>
-              <a:t>• NFA → DFA Subset Construction: Calculates ε-closures and powerset tables with 1-click 'Load Converted DFA to Canvas'.</a:t>
-            </a:r>
-          </a:p>
-          <a:p>
-            <a:pPr>
-              <a:spcBef>
-                <a:spcPts val="800"/>
-              </a:spcBef>
-              <a:defRPr sz="1100">
-                <a:solidFill>
-                  <a:srgbClr val="CBD5E1"/>
-                </a:solidFill>
-                <a:latin typeface="Calibri"/>
-              </a:defRPr>
-            </a:pPr>
-            <a:r>
-              <a:t>• Hopcroft DFA Minimization: Runs partition refinement (0-equiv, 1-equiv) and builds the Distinguishability Matrix.</a:t>
-            </a:r>
-          </a:p>
-          <a:p>
-            <a:pPr>
-              <a:spcBef>
-                <a:spcPts val="800"/>
-              </a:spcBef>
-              <a:defRPr sz="1100">
-                <a:solidFill>
-                  <a:srgbClr val="CBD5E1"/>
-                </a:solidFill>
-                <a:latin typeface="Calibri"/>
-              </a:defRPr>
-            </a:pPr>
-            <a:r>
-              <a:t>• 1-Click Minimal Graph: Instantly merges redundant states and renders the minimal equivalent DFA on screen.</a:t>
-            </a:r>
-          </a:p>
-          <a:p>
-            <a:pPr>
-              <a:spcBef>
-                <a:spcPts val="800"/>
-              </a:spcBef>
-              <a:defRPr sz="1100">
-                <a:solidFill>
-                  <a:srgbClr val="CBD5E1"/>
-                </a:solidFill>
-                <a:latin typeface="Calibri"/>
-              </a:defRPr>
-            </a:pPr>
-            <a:r>
-              <a:t>• Moore ⇄ Mealy Transducers: Simulates state-output vs edge-output machines with cumulative output sequences.</a:t>
+            <a:pPr algn="l">
+              <a:spcBef>
+                <a:spcPts val="200"/>
+              </a:spcBef>
+              <a:defRPr sz="1050" b="1">
+                <a:solidFill>
+                  <a:srgbClr val="FCD34D"/>
+                </a:solidFill>
+                <a:latin typeface="Calibri"/>
+              </a:defRPr>
+            </a:pPr>
+            <a:r>
+              <a:t>NFA → DFA Subset Construction &amp; Hopcroft Algorithm</a:t>
+            </a:r>
+          </a:p>
+          <a:p>
+            <a:pPr algn="l">
+              <a:spcBef>
+                <a:spcPts val="1000"/>
+              </a:spcBef>
+              <a:spcAft>
+                <a:spcPts val="100"/>
+              </a:spcAft>
+            </a:pPr>
+            <a:r>
+              <a:rPr sz="1200" b="1">
+                <a:solidFill>
+                  <a:srgbClr val="FECACA"/>
+                </a:solidFill>
+                <a:latin typeface="Calibri"/>
+              </a:rPr>
+              <a:t>• NFA → DFA Subset Construction: </a:t>
+            </a:r>
+            <a:r>
+              <a:rPr sz="1100">
+                <a:solidFill>
+                  <a:srgbClr val="CBD5E1"/>
+                </a:solidFill>
+                <a:latin typeface="Calibri"/>
+              </a:rPr>
+              <a:t>Calculates ε-closures and powerset tables with 1-click 'Load Converted DFA to Canvas'.</a:t>
+            </a:r>
+          </a:p>
+          <a:p>
+            <a:pPr algn="l">
+              <a:spcBef>
+                <a:spcPts val="1000"/>
+              </a:spcBef>
+              <a:spcAft>
+                <a:spcPts val="100"/>
+              </a:spcAft>
+            </a:pPr>
+            <a:r>
+              <a:rPr sz="1200" b="1">
+                <a:solidFill>
+                  <a:srgbClr val="FECACA"/>
+                </a:solidFill>
+                <a:latin typeface="Calibri"/>
+              </a:rPr>
+              <a:t>• Hopcroft DFA Minimization: </a:t>
+            </a:r>
+            <a:r>
+              <a:rPr sz="1100">
+                <a:solidFill>
+                  <a:srgbClr val="CBD5E1"/>
+                </a:solidFill>
+                <a:latin typeface="Calibri"/>
+              </a:rPr>
+              <a:t>Runs partition refinement (0-equiv, 1-equiv) and builds the Distinguishability Matrix.</a:t>
+            </a:r>
+          </a:p>
+          <a:p>
+            <a:pPr algn="l">
+              <a:spcBef>
+                <a:spcPts val="1000"/>
+              </a:spcBef>
+              <a:spcAft>
+                <a:spcPts val="100"/>
+              </a:spcAft>
+            </a:pPr>
+            <a:r>
+              <a:rPr sz="1200" b="1">
+                <a:solidFill>
+                  <a:srgbClr val="FECACA"/>
+                </a:solidFill>
+                <a:latin typeface="Calibri"/>
+              </a:rPr>
+              <a:t>• 1-Click Minimal Graph: </a:t>
+            </a:r>
+            <a:r>
+              <a:rPr sz="1100">
+                <a:solidFill>
+                  <a:srgbClr val="CBD5E1"/>
+                </a:solidFill>
+                <a:latin typeface="Calibri"/>
+              </a:rPr>
+              <a:t>Instantly merges redundant states and renders the minimal equivalent DFA on screen.</a:t>
+            </a:r>
+          </a:p>
+          <a:p>
+            <a:pPr algn="l">
+              <a:spcBef>
+                <a:spcPts val="1000"/>
+              </a:spcBef>
+              <a:spcAft>
+                <a:spcPts val="100"/>
+              </a:spcAft>
+            </a:pPr>
+            <a:r>
+              <a:rPr sz="1200" b="1">
+                <a:solidFill>
+                  <a:srgbClr val="FECACA"/>
+                </a:solidFill>
+                <a:latin typeface="Calibri"/>
+              </a:rPr>
+              <a:t>• Distinguishability Table: </a:t>
+            </a:r>
+            <a:r>
+              <a:rPr sz="1100">
+                <a:solidFill>
+                  <a:srgbClr val="CBD5E1"/>
+                </a:solidFill>
+                <a:latin typeface="Calibri"/>
+              </a:rPr>
+              <a:t>Displays lower-triangular table marking distinct pairs to visually prove equivalence.</a:t>
+            </a:r>
+          </a:p>
+          <a:p>
+            <a:pPr algn="l">
+              <a:spcBef>
+                <a:spcPts val="1000"/>
+              </a:spcBef>
+              <a:spcAft>
+                <a:spcPts val="100"/>
+              </a:spcAft>
+            </a:pPr>
+            <a:r>
+              <a:rPr sz="1200" b="1">
+                <a:solidFill>
+                  <a:srgbClr val="FECACA"/>
+                </a:solidFill>
+                <a:latin typeface="Calibri"/>
+              </a:rPr>
+              <a:t>• Moore ⇄ Mealy Transducers: </a:t>
+            </a:r>
+            <a:r>
+              <a:rPr sz="1100">
+                <a:solidFill>
+                  <a:srgbClr val="CBD5E1"/>
+                </a:solidFill>
+                <a:latin typeface="Calibri"/>
+              </a:rPr>
+              <a:t>Simulates state-output vs edge-output machines with cumulative output sequences.</a:t>
+            </a:r>
+          </a:p>
+          <a:p>
+            <a:pPr algn="l">
+              <a:spcBef>
+                <a:spcPts val="1400"/>
+              </a:spcBef>
+              <a:defRPr sz="1000" b="1">
+                <a:solidFill>
+                  <a:srgbClr val="FECACA"/>
+                </a:solidFill>
+                <a:latin typeface="Calibri"/>
+              </a:defRPr>
+            </a:pPr>
+            <a:r>
+              <a:t>Solvers: Hopcroft Minimization + Powerset Engine + Transducers</a:t>
             </a:r>
           </a:p>
         </p:txBody>
